--- a/Images/SupplyVoltage.pptx
+++ b/Images/SupplyVoltage.pptx
@@ -288,7 +288,8 @@
           <a:p>
             <a:fld id="{26A4EE3E-C51C-46FF-A86D-714B8E2F6002}" type="datetimeFigureOut">
               <a:rPr lang="de-DE" smtClean="0"/>
-              <a:t>19.02.2026</a:t>
+              <a:pPr/>
+              <a:t>24.02.2026</a:t>
             </a:fld>
             <a:endParaRPr lang="de-DE"/>
           </a:p>
@@ -330,6 +331,7 @@
           <a:p>
             <a:fld id="{D868F6A0-EAC2-4ADD-93DE-56541012D13E}" type="slidenum">
               <a:rPr lang="de-DE" smtClean="0"/>
+              <a:pPr/>
               <a:t>‹Nr.›</a:t>
             </a:fld>
             <a:endParaRPr lang="de-DE"/>
@@ -453,7 +455,8 @@
           <a:p>
             <a:fld id="{26A4EE3E-C51C-46FF-A86D-714B8E2F6002}" type="datetimeFigureOut">
               <a:rPr lang="de-DE" smtClean="0"/>
-              <a:t>19.02.2026</a:t>
+              <a:pPr/>
+              <a:t>24.02.2026</a:t>
             </a:fld>
             <a:endParaRPr lang="de-DE"/>
           </a:p>
@@ -495,6 +498,7 @@
           <a:p>
             <a:fld id="{D868F6A0-EAC2-4ADD-93DE-56541012D13E}" type="slidenum">
               <a:rPr lang="de-DE" smtClean="0"/>
+              <a:pPr/>
               <a:t>‹Nr.›</a:t>
             </a:fld>
             <a:endParaRPr lang="de-DE"/>
@@ -628,7 +632,8 @@
           <a:p>
             <a:fld id="{26A4EE3E-C51C-46FF-A86D-714B8E2F6002}" type="datetimeFigureOut">
               <a:rPr lang="de-DE" smtClean="0"/>
-              <a:t>19.02.2026</a:t>
+              <a:pPr/>
+              <a:t>24.02.2026</a:t>
             </a:fld>
             <a:endParaRPr lang="de-DE"/>
           </a:p>
@@ -670,6 +675,7 @@
           <a:p>
             <a:fld id="{D868F6A0-EAC2-4ADD-93DE-56541012D13E}" type="slidenum">
               <a:rPr lang="de-DE" smtClean="0"/>
+              <a:pPr/>
               <a:t>‹Nr.›</a:t>
             </a:fld>
             <a:endParaRPr lang="de-DE"/>
@@ -793,7 +799,8 @@
           <a:p>
             <a:fld id="{26A4EE3E-C51C-46FF-A86D-714B8E2F6002}" type="datetimeFigureOut">
               <a:rPr lang="de-DE" smtClean="0"/>
-              <a:t>19.02.2026</a:t>
+              <a:pPr/>
+              <a:t>24.02.2026</a:t>
             </a:fld>
             <a:endParaRPr lang="de-DE"/>
           </a:p>
@@ -835,6 +842,7 @@
           <a:p>
             <a:fld id="{D868F6A0-EAC2-4ADD-93DE-56541012D13E}" type="slidenum">
               <a:rPr lang="de-DE" smtClean="0"/>
+              <a:pPr/>
               <a:t>‹Nr.›</a:t>
             </a:fld>
             <a:endParaRPr lang="de-DE"/>
@@ -1034,7 +1042,8 @@
           <a:p>
             <a:fld id="{26A4EE3E-C51C-46FF-A86D-714B8E2F6002}" type="datetimeFigureOut">
               <a:rPr lang="de-DE" smtClean="0"/>
-              <a:t>19.02.2026</a:t>
+              <a:pPr/>
+              <a:t>24.02.2026</a:t>
             </a:fld>
             <a:endParaRPr lang="de-DE"/>
           </a:p>
@@ -1076,6 +1085,7 @@
           <a:p>
             <a:fld id="{D868F6A0-EAC2-4ADD-93DE-56541012D13E}" type="slidenum">
               <a:rPr lang="de-DE" smtClean="0"/>
+              <a:pPr/>
               <a:t>‹Nr.›</a:t>
             </a:fld>
             <a:endParaRPr lang="de-DE"/>
@@ -1317,7 +1327,8 @@
           <a:p>
             <a:fld id="{26A4EE3E-C51C-46FF-A86D-714B8E2F6002}" type="datetimeFigureOut">
               <a:rPr lang="de-DE" smtClean="0"/>
-              <a:t>19.02.2026</a:t>
+              <a:pPr/>
+              <a:t>24.02.2026</a:t>
             </a:fld>
             <a:endParaRPr lang="de-DE"/>
           </a:p>
@@ -1359,6 +1370,7 @@
           <a:p>
             <a:fld id="{D868F6A0-EAC2-4ADD-93DE-56541012D13E}" type="slidenum">
               <a:rPr lang="de-DE" smtClean="0"/>
+              <a:pPr/>
               <a:t>‹Nr.›</a:t>
             </a:fld>
             <a:endParaRPr lang="de-DE"/>
@@ -1734,7 +1746,8 @@
           <a:p>
             <a:fld id="{26A4EE3E-C51C-46FF-A86D-714B8E2F6002}" type="datetimeFigureOut">
               <a:rPr lang="de-DE" smtClean="0"/>
-              <a:t>19.02.2026</a:t>
+              <a:pPr/>
+              <a:t>24.02.2026</a:t>
             </a:fld>
             <a:endParaRPr lang="de-DE"/>
           </a:p>
@@ -1776,6 +1789,7 @@
           <a:p>
             <a:fld id="{D868F6A0-EAC2-4ADD-93DE-56541012D13E}" type="slidenum">
               <a:rPr lang="de-DE" smtClean="0"/>
+              <a:pPr/>
               <a:t>‹Nr.›</a:t>
             </a:fld>
             <a:endParaRPr lang="de-DE"/>
@@ -1847,7 +1861,8 @@
           <a:p>
             <a:fld id="{26A4EE3E-C51C-46FF-A86D-714B8E2F6002}" type="datetimeFigureOut">
               <a:rPr lang="de-DE" smtClean="0"/>
-              <a:t>19.02.2026</a:t>
+              <a:pPr/>
+              <a:t>24.02.2026</a:t>
             </a:fld>
             <a:endParaRPr lang="de-DE"/>
           </a:p>
@@ -1889,6 +1904,7 @@
           <a:p>
             <a:fld id="{D868F6A0-EAC2-4ADD-93DE-56541012D13E}" type="slidenum">
               <a:rPr lang="de-DE" smtClean="0"/>
+              <a:pPr/>
               <a:t>‹Nr.›</a:t>
             </a:fld>
             <a:endParaRPr lang="de-DE"/>
@@ -1937,7 +1953,8 @@
           <a:p>
             <a:fld id="{26A4EE3E-C51C-46FF-A86D-714B8E2F6002}" type="datetimeFigureOut">
               <a:rPr lang="de-DE" smtClean="0"/>
-              <a:t>19.02.2026</a:t>
+              <a:pPr/>
+              <a:t>24.02.2026</a:t>
             </a:fld>
             <a:endParaRPr lang="de-DE"/>
           </a:p>
@@ -1979,6 +1996,7 @@
           <a:p>
             <a:fld id="{D868F6A0-EAC2-4ADD-93DE-56541012D13E}" type="slidenum">
               <a:rPr lang="de-DE" smtClean="0"/>
+              <a:pPr/>
               <a:t>‹Nr.›</a:t>
             </a:fld>
             <a:endParaRPr lang="de-DE"/>
@@ -2209,7 +2227,8 @@
           <a:p>
             <a:fld id="{26A4EE3E-C51C-46FF-A86D-714B8E2F6002}" type="datetimeFigureOut">
               <a:rPr lang="de-DE" smtClean="0"/>
-              <a:t>19.02.2026</a:t>
+              <a:pPr/>
+              <a:t>24.02.2026</a:t>
             </a:fld>
             <a:endParaRPr lang="de-DE"/>
           </a:p>
@@ -2251,6 +2270,7 @@
           <a:p>
             <a:fld id="{D868F6A0-EAC2-4ADD-93DE-56541012D13E}" type="slidenum">
               <a:rPr lang="de-DE" smtClean="0"/>
+              <a:pPr/>
               <a:t>‹Nr.›</a:t>
             </a:fld>
             <a:endParaRPr lang="de-DE"/>
@@ -2457,7 +2477,8 @@
           <a:p>
             <a:fld id="{26A4EE3E-C51C-46FF-A86D-714B8E2F6002}" type="datetimeFigureOut">
               <a:rPr lang="de-DE" smtClean="0"/>
-              <a:t>19.02.2026</a:t>
+              <a:pPr/>
+              <a:t>24.02.2026</a:t>
             </a:fld>
             <a:endParaRPr lang="de-DE"/>
           </a:p>
@@ -2499,6 +2520,7 @@
           <a:p>
             <a:fld id="{D868F6A0-EAC2-4ADD-93DE-56541012D13E}" type="slidenum">
               <a:rPr lang="de-DE" smtClean="0"/>
+              <a:pPr/>
               <a:t>‹Nr.›</a:t>
             </a:fld>
             <a:endParaRPr lang="de-DE"/>
@@ -2665,7 +2687,8 @@
           <a:p>
             <a:fld id="{26A4EE3E-C51C-46FF-A86D-714B8E2F6002}" type="datetimeFigureOut">
               <a:rPr lang="de-DE" smtClean="0"/>
-              <a:t>19.02.2026</a:t>
+              <a:pPr/>
+              <a:t>24.02.2026</a:t>
             </a:fld>
             <a:endParaRPr lang="de-DE"/>
           </a:p>
@@ -2743,6 +2766,7 @@
           <a:p>
             <a:fld id="{D868F6A0-EAC2-4ADD-93DE-56541012D13E}" type="slidenum">
               <a:rPr lang="de-DE" smtClean="0"/>
+              <a:pPr/>
               <a:t>‹Nr.›</a:t>
             </a:fld>
             <a:endParaRPr lang="de-DE"/>
@@ -3037,43 +3061,18 @@
       </p:grpSpPr>
       <p:grpSp>
         <p:nvGrpSpPr>
-          <p:cNvPr id="17" name="Gruppieren 16"/>
+          <p:cNvPr id="19" name="Gruppieren 18"/>
           <p:cNvGrpSpPr/>
           <p:nvPr/>
         </p:nvGrpSpPr>
         <p:grpSpPr>
           <a:xfrm>
-            <a:off x="684074" y="2420676"/>
-            <a:ext cx="7567350" cy="2926118"/>
-            <a:chOff x="684074" y="2420676"/>
-            <a:chExt cx="7567350" cy="2926118"/>
+            <a:off x="899592" y="2420888"/>
+            <a:ext cx="7179499" cy="2925906"/>
+            <a:chOff x="899592" y="2420888"/>
+            <a:chExt cx="7179499" cy="2925906"/>
           </a:xfrm>
         </p:grpSpPr>
-        <p:pic>
-          <p:nvPicPr>
-            <p:cNvPr id="5" name="Grafik 4" descr="VoltageSupply.png"/>
-            <p:cNvPicPr>
-              <a:picLocks noChangeAspect="1"/>
-            </p:cNvPicPr>
-            <p:nvPr/>
-          </p:nvPicPr>
-          <p:blipFill>
-            <a:blip r:embed="rId2" cstate="print"/>
-            <a:srcRect l="7686" t="36485" r="7281" b="16722"/>
-            <a:stretch>
-              <a:fillRect/>
-            </a:stretch>
-          </p:blipFill>
-          <p:spPr>
-            <a:xfrm>
-              <a:off x="684074" y="2420676"/>
-              <a:ext cx="7567350" cy="2216150"/>
-            </a:xfrm>
-            <a:prstGeom prst="rect">
-              <a:avLst/>
-            </a:prstGeom>
-          </p:spPr>
-        </p:pic>
         <p:sp>
           <p:nvSpPr>
             <p:cNvPr id="9" name="Geschweifte Klammer links 8"/>
@@ -3374,6 +3373,31 @@
             </a:p>
           </p:txBody>
         </p:sp>
+        <p:pic>
+          <p:nvPicPr>
+            <p:cNvPr id="18" name="Grafik 17" descr="VoltageSupply.png"/>
+            <p:cNvPicPr>
+              <a:picLocks noChangeAspect="1"/>
+            </p:cNvPicPr>
+            <p:nvPr/>
+          </p:nvPicPr>
+          <p:blipFill>
+            <a:blip r:embed="rId2" cstate="print"/>
+            <a:srcRect l="12815" t="30301" r="8669" b="34158"/>
+            <a:stretch>
+              <a:fillRect/>
+            </a:stretch>
+          </p:blipFill>
+          <p:spPr>
+            <a:xfrm>
+              <a:off x="899592" y="2420888"/>
+              <a:ext cx="7179499" cy="2223267"/>
+            </a:xfrm>
+            <a:prstGeom prst="rect">
+              <a:avLst/>
+            </a:prstGeom>
+          </p:spPr>
+        </p:pic>
       </p:grpSp>
     </p:spTree>
   </p:cSld>

--- a/Images/SupplyVoltage.pptx
+++ b/Images/SupplyVoltage.pptx
@@ -104,6 +104,22 @@
       </a:defRPr>
     </a:lvl9pPr>
   </p:defaultTextStyle>
+  <p:extLst>
+    <p:ext uri="{EFAFB233-063F-42B5-8137-9DF3F51BA10A}">
+      <p15:sldGuideLst xmlns:p15="http://schemas.microsoft.com/office/powerpoint/2012/main">
+        <p15:guide id="1" orient="horz" pos="2160">
+          <p15:clr>
+            <a:srgbClr val="A4A3A4"/>
+          </p15:clr>
+        </p15:guide>
+        <p15:guide id="2" pos="2880">
+          <p15:clr>
+            <a:srgbClr val="A4A3A4"/>
+          </p15:clr>
+        </p15:guide>
+      </p15:sldGuideLst>
+    </p:ext>
+  </p:extLst>
 </p:presentation>
 </file>
 
@@ -145,10 +161,9 @@
           <a:lstStyle/>
           <a:p>
             <a:r>
-              <a:rPr lang="de-DE" smtClean="0"/>
+              <a:rPr lang="de-DE"/>
               <a:t>Titelmasterformat durch Klicken bearbeiten</a:t>
             </a:r>
-            <a:endParaRPr lang="de-DE"/>
           </a:p>
         </p:txBody>
       </p:sp>
@@ -264,10 +279,9 @@
           </a:lstStyle>
           <a:p>
             <a:r>
-              <a:rPr lang="de-DE" smtClean="0"/>
+              <a:rPr lang="de-DE"/>
               <a:t>Formatvorlage des Untertitelmasters durch Klicken bearbeiten</a:t>
             </a:r>
-            <a:endParaRPr lang="de-DE"/>
           </a:p>
         </p:txBody>
       </p:sp>
@@ -379,10 +393,9 @@
           <a:lstStyle/>
           <a:p>
             <a:r>
-              <a:rPr lang="de-DE" smtClean="0"/>
+              <a:rPr lang="de-DE"/>
               <a:t>Titelmasterformat durch Klicken bearbeiten</a:t>
             </a:r>
-            <a:endParaRPr lang="de-DE"/>
           </a:p>
         </p:txBody>
       </p:sp>
@@ -403,38 +416,37 @@
           <a:p>
             <a:pPr lvl="0"/>
             <a:r>
-              <a:rPr lang="de-DE" smtClean="0"/>
+              <a:rPr lang="de-DE"/>
               <a:t>Textmasterformate durch Klicken bearbeiten</a:t>
             </a:r>
           </a:p>
           <a:p>
             <a:pPr lvl="1"/>
             <a:r>
-              <a:rPr lang="de-DE" smtClean="0"/>
+              <a:rPr lang="de-DE"/>
               <a:t>Zweite Ebene</a:t>
             </a:r>
           </a:p>
           <a:p>
             <a:pPr lvl="2"/>
             <a:r>
-              <a:rPr lang="de-DE" smtClean="0"/>
+              <a:rPr lang="de-DE"/>
               <a:t>Dritte Ebene</a:t>
             </a:r>
           </a:p>
           <a:p>
             <a:pPr lvl="3"/>
             <a:r>
-              <a:rPr lang="de-DE" smtClean="0"/>
+              <a:rPr lang="de-DE"/>
               <a:t>Vierte Ebene</a:t>
             </a:r>
           </a:p>
           <a:p>
             <a:pPr lvl="4"/>
             <a:r>
-              <a:rPr lang="de-DE" smtClean="0"/>
+              <a:rPr lang="de-DE"/>
               <a:t>Fünfte Ebene</a:t>
             </a:r>
-            <a:endParaRPr lang="de-DE"/>
           </a:p>
         </p:txBody>
       </p:sp>
@@ -551,10 +563,9 @@
           <a:lstStyle/>
           <a:p>
             <a:r>
-              <a:rPr lang="de-DE" smtClean="0"/>
+              <a:rPr lang="de-DE"/>
               <a:t>Titelmasterformat durch Klicken bearbeiten</a:t>
             </a:r>
-            <a:endParaRPr lang="de-DE"/>
           </a:p>
         </p:txBody>
       </p:sp>
@@ -580,38 +591,37 @@
           <a:p>
             <a:pPr lvl="0"/>
             <a:r>
-              <a:rPr lang="de-DE" smtClean="0"/>
+              <a:rPr lang="de-DE"/>
               <a:t>Textmasterformate durch Klicken bearbeiten</a:t>
             </a:r>
           </a:p>
           <a:p>
             <a:pPr lvl="1"/>
             <a:r>
-              <a:rPr lang="de-DE" smtClean="0"/>
+              <a:rPr lang="de-DE"/>
               <a:t>Zweite Ebene</a:t>
             </a:r>
           </a:p>
           <a:p>
             <a:pPr lvl="2"/>
             <a:r>
-              <a:rPr lang="de-DE" smtClean="0"/>
+              <a:rPr lang="de-DE"/>
               <a:t>Dritte Ebene</a:t>
             </a:r>
           </a:p>
           <a:p>
             <a:pPr lvl="3"/>
             <a:r>
-              <a:rPr lang="de-DE" smtClean="0"/>
+              <a:rPr lang="de-DE"/>
               <a:t>Vierte Ebene</a:t>
             </a:r>
           </a:p>
           <a:p>
             <a:pPr lvl="4"/>
             <a:r>
-              <a:rPr lang="de-DE" smtClean="0"/>
+              <a:rPr lang="de-DE"/>
               <a:t>Fünfte Ebene</a:t>
             </a:r>
-            <a:endParaRPr lang="de-DE"/>
           </a:p>
         </p:txBody>
       </p:sp>
@@ -723,10 +733,9 @@
           <a:lstStyle/>
           <a:p>
             <a:r>
-              <a:rPr lang="de-DE" smtClean="0"/>
+              <a:rPr lang="de-DE"/>
               <a:t>Titelmasterformat durch Klicken bearbeiten</a:t>
             </a:r>
-            <a:endParaRPr lang="de-DE"/>
           </a:p>
         </p:txBody>
       </p:sp>
@@ -747,38 +756,37 @@
           <a:p>
             <a:pPr lvl="0"/>
             <a:r>
-              <a:rPr lang="de-DE" smtClean="0"/>
+              <a:rPr lang="de-DE"/>
               <a:t>Textmasterformate durch Klicken bearbeiten</a:t>
             </a:r>
           </a:p>
           <a:p>
             <a:pPr lvl="1"/>
             <a:r>
-              <a:rPr lang="de-DE" smtClean="0"/>
+              <a:rPr lang="de-DE"/>
               <a:t>Zweite Ebene</a:t>
             </a:r>
           </a:p>
           <a:p>
             <a:pPr lvl="2"/>
             <a:r>
-              <a:rPr lang="de-DE" smtClean="0"/>
+              <a:rPr lang="de-DE"/>
               <a:t>Dritte Ebene</a:t>
             </a:r>
           </a:p>
           <a:p>
             <a:pPr lvl="3"/>
             <a:r>
-              <a:rPr lang="de-DE" smtClean="0"/>
+              <a:rPr lang="de-DE"/>
               <a:t>Vierte Ebene</a:t>
             </a:r>
           </a:p>
           <a:p>
             <a:pPr lvl="4"/>
             <a:r>
-              <a:rPr lang="de-DE" smtClean="0"/>
+              <a:rPr lang="de-DE"/>
               <a:t>Fünfte Ebene</a:t>
             </a:r>
-            <a:endParaRPr lang="de-DE"/>
           </a:p>
         </p:txBody>
       </p:sp>
@@ -899,10 +907,9 @@
           </a:lstStyle>
           <a:p>
             <a:r>
-              <a:rPr lang="de-DE" smtClean="0"/>
+              <a:rPr lang="de-DE"/>
               <a:t>Titelmasterformat durch Klicken bearbeiten</a:t>
             </a:r>
-            <a:endParaRPr lang="de-DE"/>
           </a:p>
         </p:txBody>
       </p:sp>
@@ -1019,7 +1026,7 @@
           <a:p>
             <a:pPr lvl="0"/>
             <a:r>
-              <a:rPr lang="de-DE" smtClean="0"/>
+              <a:rPr lang="de-DE"/>
               <a:t>Textmasterformate durch Klicken bearbeiten</a:t>
             </a:r>
           </a:p>
@@ -1133,10 +1140,9 @@
           <a:lstStyle/>
           <a:p>
             <a:r>
-              <a:rPr lang="de-DE" smtClean="0"/>
+              <a:rPr lang="de-DE"/>
               <a:t>Titelmasterformat durch Klicken bearbeiten</a:t>
             </a:r>
-            <a:endParaRPr lang="de-DE"/>
           </a:p>
         </p:txBody>
       </p:sp>
@@ -1190,38 +1196,37 @@
           <a:p>
             <a:pPr lvl="0"/>
             <a:r>
-              <a:rPr lang="de-DE" smtClean="0"/>
+              <a:rPr lang="de-DE"/>
               <a:t>Textmasterformate durch Klicken bearbeiten</a:t>
             </a:r>
           </a:p>
           <a:p>
             <a:pPr lvl="1"/>
             <a:r>
-              <a:rPr lang="de-DE" smtClean="0"/>
+              <a:rPr lang="de-DE"/>
               <a:t>Zweite Ebene</a:t>
             </a:r>
           </a:p>
           <a:p>
             <a:pPr lvl="2"/>
             <a:r>
-              <a:rPr lang="de-DE" smtClean="0"/>
+              <a:rPr lang="de-DE"/>
               <a:t>Dritte Ebene</a:t>
             </a:r>
           </a:p>
           <a:p>
             <a:pPr lvl="3"/>
             <a:r>
-              <a:rPr lang="de-DE" smtClean="0"/>
+              <a:rPr lang="de-DE"/>
               <a:t>Vierte Ebene</a:t>
             </a:r>
           </a:p>
           <a:p>
             <a:pPr lvl="4"/>
             <a:r>
-              <a:rPr lang="de-DE" smtClean="0"/>
+              <a:rPr lang="de-DE"/>
               <a:t>Fünfte Ebene</a:t>
             </a:r>
-            <a:endParaRPr lang="de-DE"/>
           </a:p>
         </p:txBody>
       </p:sp>
@@ -1275,38 +1280,37 @@
           <a:p>
             <a:pPr lvl="0"/>
             <a:r>
-              <a:rPr lang="de-DE" smtClean="0"/>
+              <a:rPr lang="de-DE"/>
               <a:t>Textmasterformate durch Klicken bearbeiten</a:t>
             </a:r>
           </a:p>
           <a:p>
             <a:pPr lvl="1"/>
             <a:r>
-              <a:rPr lang="de-DE" smtClean="0"/>
+              <a:rPr lang="de-DE"/>
               <a:t>Zweite Ebene</a:t>
             </a:r>
           </a:p>
           <a:p>
             <a:pPr lvl="2"/>
             <a:r>
-              <a:rPr lang="de-DE" smtClean="0"/>
+              <a:rPr lang="de-DE"/>
               <a:t>Dritte Ebene</a:t>
             </a:r>
           </a:p>
           <a:p>
             <a:pPr lvl="3"/>
             <a:r>
-              <a:rPr lang="de-DE" smtClean="0"/>
+              <a:rPr lang="de-DE"/>
               <a:t>Vierte Ebene</a:t>
             </a:r>
           </a:p>
           <a:p>
             <a:pPr lvl="4"/>
             <a:r>
-              <a:rPr lang="de-DE" smtClean="0"/>
+              <a:rPr lang="de-DE"/>
               <a:t>Fünfte Ebene</a:t>
             </a:r>
-            <a:endParaRPr lang="de-DE"/>
           </a:p>
         </p:txBody>
       </p:sp>
@@ -1422,10 +1426,9 @@
           </a:lstStyle>
           <a:p>
             <a:r>
-              <a:rPr lang="de-DE" smtClean="0"/>
+              <a:rPr lang="de-DE"/>
               <a:t>Titelmasterformat durch Klicken bearbeiten</a:t>
             </a:r>
-            <a:endParaRPr lang="de-DE"/>
           </a:p>
         </p:txBody>
       </p:sp>
@@ -1488,7 +1491,7 @@
           <a:p>
             <a:pPr lvl="0"/>
             <a:r>
-              <a:rPr lang="de-DE" smtClean="0"/>
+              <a:rPr lang="de-DE"/>
               <a:t>Textmasterformate durch Klicken bearbeiten</a:t>
             </a:r>
           </a:p>
@@ -1544,38 +1547,37 @@
           <a:p>
             <a:pPr lvl="0"/>
             <a:r>
-              <a:rPr lang="de-DE" smtClean="0"/>
+              <a:rPr lang="de-DE"/>
               <a:t>Textmasterformate durch Klicken bearbeiten</a:t>
             </a:r>
           </a:p>
           <a:p>
             <a:pPr lvl="1"/>
             <a:r>
-              <a:rPr lang="de-DE" smtClean="0"/>
+              <a:rPr lang="de-DE"/>
               <a:t>Zweite Ebene</a:t>
             </a:r>
           </a:p>
           <a:p>
             <a:pPr lvl="2"/>
             <a:r>
-              <a:rPr lang="de-DE" smtClean="0"/>
+              <a:rPr lang="de-DE"/>
               <a:t>Dritte Ebene</a:t>
             </a:r>
           </a:p>
           <a:p>
             <a:pPr lvl="3"/>
             <a:r>
-              <a:rPr lang="de-DE" smtClean="0"/>
+              <a:rPr lang="de-DE"/>
               <a:t>Vierte Ebene</a:t>
             </a:r>
           </a:p>
           <a:p>
             <a:pPr lvl="4"/>
             <a:r>
-              <a:rPr lang="de-DE" smtClean="0"/>
+              <a:rPr lang="de-DE"/>
               <a:t>Fünfte Ebene</a:t>
             </a:r>
-            <a:endParaRPr lang="de-DE"/>
           </a:p>
         </p:txBody>
       </p:sp>
@@ -1638,7 +1640,7 @@
           <a:p>
             <a:pPr lvl="0"/>
             <a:r>
-              <a:rPr lang="de-DE" smtClean="0"/>
+              <a:rPr lang="de-DE"/>
               <a:t>Textmasterformate durch Klicken bearbeiten</a:t>
             </a:r>
           </a:p>
@@ -1694,38 +1696,37 @@
           <a:p>
             <a:pPr lvl="0"/>
             <a:r>
-              <a:rPr lang="de-DE" smtClean="0"/>
+              <a:rPr lang="de-DE"/>
               <a:t>Textmasterformate durch Klicken bearbeiten</a:t>
             </a:r>
           </a:p>
           <a:p>
             <a:pPr lvl="1"/>
             <a:r>
-              <a:rPr lang="de-DE" smtClean="0"/>
+              <a:rPr lang="de-DE"/>
               <a:t>Zweite Ebene</a:t>
             </a:r>
           </a:p>
           <a:p>
             <a:pPr lvl="2"/>
             <a:r>
-              <a:rPr lang="de-DE" smtClean="0"/>
+              <a:rPr lang="de-DE"/>
               <a:t>Dritte Ebene</a:t>
             </a:r>
           </a:p>
           <a:p>
             <a:pPr lvl="3"/>
             <a:r>
-              <a:rPr lang="de-DE" smtClean="0"/>
+              <a:rPr lang="de-DE"/>
               <a:t>Vierte Ebene</a:t>
             </a:r>
           </a:p>
           <a:p>
             <a:pPr lvl="4"/>
             <a:r>
-              <a:rPr lang="de-DE" smtClean="0"/>
+              <a:rPr lang="de-DE"/>
               <a:t>Fünfte Ebene</a:t>
             </a:r>
-            <a:endParaRPr lang="de-DE"/>
           </a:p>
         </p:txBody>
       </p:sp>
@@ -1837,10 +1838,9 @@
           <a:lstStyle/>
           <a:p>
             <a:r>
-              <a:rPr lang="de-DE" smtClean="0"/>
+              <a:rPr lang="de-DE"/>
               <a:t>Titelmasterformat durch Klicken bearbeiten</a:t>
             </a:r>
-            <a:endParaRPr lang="de-DE"/>
           </a:p>
         </p:txBody>
       </p:sp>
@@ -2053,10 +2053,9 @@
           </a:lstStyle>
           <a:p>
             <a:r>
-              <a:rPr lang="de-DE" smtClean="0"/>
+              <a:rPr lang="de-DE"/>
               <a:t>Titelmasterformat durch Klicken bearbeiten</a:t>
             </a:r>
-            <a:endParaRPr lang="de-DE"/>
           </a:p>
         </p:txBody>
       </p:sp>
@@ -2110,38 +2109,37 @@
           <a:p>
             <a:pPr lvl="0"/>
             <a:r>
-              <a:rPr lang="de-DE" smtClean="0"/>
+              <a:rPr lang="de-DE"/>
               <a:t>Textmasterformate durch Klicken bearbeiten</a:t>
             </a:r>
           </a:p>
           <a:p>
             <a:pPr lvl="1"/>
             <a:r>
-              <a:rPr lang="de-DE" smtClean="0"/>
+              <a:rPr lang="de-DE"/>
               <a:t>Zweite Ebene</a:t>
             </a:r>
           </a:p>
           <a:p>
             <a:pPr lvl="2"/>
             <a:r>
-              <a:rPr lang="de-DE" smtClean="0"/>
+              <a:rPr lang="de-DE"/>
               <a:t>Dritte Ebene</a:t>
             </a:r>
           </a:p>
           <a:p>
             <a:pPr lvl="3"/>
             <a:r>
-              <a:rPr lang="de-DE" smtClean="0"/>
+              <a:rPr lang="de-DE"/>
               <a:t>Vierte Ebene</a:t>
             </a:r>
           </a:p>
           <a:p>
             <a:pPr lvl="4"/>
             <a:r>
-              <a:rPr lang="de-DE" smtClean="0"/>
+              <a:rPr lang="de-DE"/>
               <a:t>Fünfte Ebene</a:t>
             </a:r>
-            <a:endParaRPr lang="de-DE"/>
           </a:p>
         </p:txBody>
       </p:sp>
@@ -2204,7 +2202,7 @@
           <a:p>
             <a:pPr lvl="0"/>
             <a:r>
-              <a:rPr lang="de-DE" smtClean="0"/>
+              <a:rPr lang="de-DE"/>
               <a:t>Textmasterformate durch Klicken bearbeiten</a:t>
             </a:r>
           </a:p>
@@ -2327,10 +2325,9 @@
           </a:lstStyle>
           <a:p>
             <a:r>
-              <a:rPr lang="de-DE" smtClean="0"/>
+              <a:rPr lang="de-DE"/>
               <a:t>Titelmasterformat durch Klicken bearbeiten</a:t>
             </a:r>
-            <a:endParaRPr lang="de-DE"/>
           </a:p>
         </p:txBody>
       </p:sp>
@@ -2454,7 +2451,7 @@
           <a:p>
             <a:pPr lvl="0"/>
             <a:r>
-              <a:rPr lang="de-DE" smtClean="0"/>
+              <a:rPr lang="de-DE"/>
               <a:t>Textmasterformate durch Klicken bearbeiten</a:t>
             </a:r>
           </a:p>
@@ -2583,10 +2580,9 @@
           <a:lstStyle/>
           <a:p>
             <a:r>
-              <a:rPr lang="de-DE" smtClean="0"/>
+              <a:rPr lang="de-DE"/>
               <a:t>Titelmasterformat durch Klicken bearbeiten</a:t>
             </a:r>
-            <a:endParaRPr lang="de-DE"/>
           </a:p>
         </p:txBody>
       </p:sp>
@@ -2617,38 +2613,37 @@
           <a:p>
             <a:pPr lvl="0"/>
             <a:r>
-              <a:rPr lang="de-DE" smtClean="0"/>
+              <a:rPr lang="de-DE"/>
               <a:t>Textmasterformate durch Klicken bearbeiten</a:t>
             </a:r>
           </a:p>
           <a:p>
             <a:pPr lvl="1"/>
             <a:r>
-              <a:rPr lang="de-DE" smtClean="0"/>
+              <a:rPr lang="de-DE"/>
               <a:t>Zweite Ebene</a:t>
             </a:r>
           </a:p>
           <a:p>
             <a:pPr lvl="2"/>
             <a:r>
-              <a:rPr lang="de-DE" smtClean="0"/>
+              <a:rPr lang="de-DE"/>
               <a:t>Dritte Ebene</a:t>
             </a:r>
           </a:p>
           <a:p>
             <a:pPr lvl="3"/>
             <a:r>
-              <a:rPr lang="de-DE" smtClean="0"/>
+              <a:rPr lang="de-DE"/>
               <a:t>Vierte Ebene</a:t>
             </a:r>
           </a:p>
           <a:p>
             <a:pPr lvl="4"/>
             <a:r>
-              <a:rPr lang="de-DE" smtClean="0"/>
+              <a:rPr lang="de-DE"/>
               <a:t>Fünfte Ebene</a:t>
             </a:r>
-            <a:endParaRPr lang="de-DE"/>
           </a:p>
         </p:txBody>
       </p:sp>
@@ -3061,7 +3056,13 @@
       </p:grpSpPr>
       <p:grpSp>
         <p:nvGrpSpPr>
-          <p:cNvPr id="19" name="Gruppieren 18"/>
+          <p:cNvPr id="5" name="Gruppieren 4">
+            <a:extLst>
+              <a:ext uri="{FF2B5EF4-FFF2-40B4-BE49-F238E27FC236}">
+                <a16:creationId xmlns:a16="http://schemas.microsoft.com/office/drawing/2014/main" id="{8B467F03-0823-EAD4-9906-68848A50F031}"/>
+              </a:ext>
+            </a:extLst>
+          </p:cNvPr>
           <p:cNvGrpSpPr/>
           <p:nvPr/>
         </p:nvGrpSpPr>
@@ -3073,187 +3074,431 @@
             <a:chExt cx="7179499" cy="2925906"/>
           </a:xfrm>
         </p:grpSpPr>
+        <p:grpSp>
+          <p:nvGrpSpPr>
+            <p:cNvPr id="4" name="Gruppieren 3">
+              <a:extLst>
+                <a:ext uri="{FF2B5EF4-FFF2-40B4-BE49-F238E27FC236}">
+                  <a16:creationId xmlns:a16="http://schemas.microsoft.com/office/drawing/2014/main" id="{433A2B36-E311-791C-3CAC-206BF6B717F5}"/>
+                </a:ext>
+              </a:extLst>
+            </p:cNvPr>
+            <p:cNvGrpSpPr/>
+            <p:nvPr/>
+          </p:nvGrpSpPr>
+          <p:grpSpPr>
+            <a:xfrm>
+              <a:off x="899592" y="2420888"/>
+              <a:ext cx="7179499" cy="2925906"/>
+              <a:chOff x="899592" y="2420888"/>
+              <a:chExt cx="7179499" cy="2925906"/>
+            </a:xfrm>
+          </p:grpSpPr>
+          <p:grpSp>
+            <p:nvGrpSpPr>
+              <p:cNvPr id="19" name="Gruppieren 18"/>
+              <p:cNvGrpSpPr/>
+              <p:nvPr/>
+            </p:nvGrpSpPr>
+            <p:grpSpPr>
+              <a:xfrm>
+                <a:off x="899592" y="2420888"/>
+                <a:ext cx="7179499" cy="2925906"/>
+                <a:chOff x="899592" y="2420888"/>
+                <a:chExt cx="7179499" cy="2925906"/>
+              </a:xfrm>
+            </p:grpSpPr>
+            <p:sp>
+              <p:nvSpPr>
+                <p:cNvPr id="9" name="Geschweifte Klammer links 8"/>
+                <p:cNvSpPr/>
+                <p:nvPr/>
+              </p:nvSpPr>
+              <p:spPr>
+                <a:xfrm rot="16200000">
+                  <a:off x="3311860" y="4545124"/>
+                  <a:ext cx="288032" cy="648072"/>
+                </a:xfrm>
+                <a:prstGeom prst="leftBrace">
+                  <a:avLst/>
+                </a:prstGeom>
+                <a:ln w="12700">
+                  <a:solidFill>
+                    <a:schemeClr val="tx1"/>
+                  </a:solidFill>
+                </a:ln>
+              </p:spPr>
+              <p:style>
+                <a:lnRef idx="1">
+                  <a:schemeClr val="accent1"/>
+                </a:lnRef>
+                <a:fillRef idx="0">
+                  <a:schemeClr val="accent1"/>
+                </a:fillRef>
+                <a:effectRef idx="0">
+                  <a:schemeClr val="accent1"/>
+                </a:effectRef>
+                <a:fontRef idx="minor">
+                  <a:schemeClr val="tx1"/>
+                </a:fontRef>
+              </p:style>
+              <p:txBody>
+                <a:bodyPr rtlCol="0" anchor="ctr"/>
+                <a:lstStyle/>
+                <a:p>
+                  <a:pPr algn="ctr"/>
+                  <a:endParaRPr lang="de-DE"/>
+                </a:p>
+              </p:txBody>
+            </p:sp>
+            <p:sp>
+              <p:nvSpPr>
+                <p:cNvPr id="10" name="Geschweifte Klammer links 9"/>
+                <p:cNvSpPr/>
+                <p:nvPr/>
+              </p:nvSpPr>
+              <p:spPr>
+                <a:xfrm rot="16200000">
+                  <a:off x="4463988" y="4113076"/>
+                  <a:ext cx="288032" cy="1512168"/>
+                </a:xfrm>
+                <a:prstGeom prst="leftBrace">
+                  <a:avLst/>
+                </a:prstGeom>
+                <a:ln w="12700">
+                  <a:solidFill>
+                    <a:schemeClr val="tx1"/>
+                  </a:solidFill>
+                </a:ln>
+              </p:spPr>
+              <p:style>
+                <a:lnRef idx="1">
+                  <a:schemeClr val="accent1"/>
+                </a:lnRef>
+                <a:fillRef idx="0">
+                  <a:schemeClr val="accent1"/>
+                </a:fillRef>
+                <a:effectRef idx="0">
+                  <a:schemeClr val="accent1"/>
+                </a:effectRef>
+                <a:fontRef idx="minor">
+                  <a:schemeClr val="tx1"/>
+                </a:fontRef>
+              </p:style>
+              <p:txBody>
+                <a:bodyPr rtlCol="0" anchor="ctr"/>
+                <a:lstStyle/>
+                <a:p>
+                  <a:pPr algn="ctr"/>
+                  <a:endParaRPr lang="de-DE"/>
+                </a:p>
+              </p:txBody>
+            </p:sp>
+            <p:sp>
+              <p:nvSpPr>
+                <p:cNvPr id="11" name="Geschweifte Klammer links 10"/>
+                <p:cNvSpPr/>
+                <p:nvPr/>
+              </p:nvSpPr>
+              <p:spPr>
+                <a:xfrm rot="16200000">
+                  <a:off x="6228184" y="3933056"/>
+                  <a:ext cx="288032" cy="1872208"/>
+                </a:xfrm>
+                <a:prstGeom prst="leftBrace">
+                  <a:avLst/>
+                </a:prstGeom>
+                <a:ln w="12700">
+                  <a:solidFill>
+                    <a:schemeClr val="tx1"/>
+                  </a:solidFill>
+                </a:ln>
+              </p:spPr>
+              <p:style>
+                <a:lnRef idx="1">
+                  <a:schemeClr val="accent1"/>
+                </a:lnRef>
+                <a:fillRef idx="0">
+                  <a:schemeClr val="accent1"/>
+                </a:fillRef>
+                <a:effectRef idx="0">
+                  <a:schemeClr val="accent1"/>
+                </a:effectRef>
+                <a:fontRef idx="minor">
+                  <a:schemeClr val="tx1"/>
+                </a:fontRef>
+              </p:style>
+              <p:txBody>
+                <a:bodyPr rtlCol="0" anchor="ctr"/>
+                <a:lstStyle/>
+                <a:p>
+                  <a:pPr algn="ctr"/>
+                  <a:endParaRPr lang="de-DE"/>
+                </a:p>
+              </p:txBody>
+            </p:sp>
+            <p:sp>
+              <p:nvSpPr>
+                <p:cNvPr id="12" name="Geschweifte Klammer links 11"/>
+                <p:cNvSpPr/>
+                <p:nvPr/>
+              </p:nvSpPr>
+              <p:spPr>
+                <a:xfrm rot="16200000">
+                  <a:off x="2591780" y="4545124"/>
+                  <a:ext cx="288032" cy="648072"/>
+                </a:xfrm>
+                <a:prstGeom prst="leftBrace">
+                  <a:avLst/>
+                </a:prstGeom>
+                <a:ln w="12700">
+                  <a:solidFill>
+                    <a:schemeClr val="tx1"/>
+                  </a:solidFill>
+                </a:ln>
+              </p:spPr>
+              <p:style>
+                <a:lnRef idx="1">
+                  <a:schemeClr val="accent1"/>
+                </a:lnRef>
+                <a:fillRef idx="0">
+                  <a:schemeClr val="accent1"/>
+                </a:fillRef>
+                <a:effectRef idx="0">
+                  <a:schemeClr val="accent1"/>
+                </a:effectRef>
+                <a:fontRef idx="minor">
+                  <a:schemeClr val="tx1"/>
+                </a:fontRef>
+              </p:style>
+              <p:txBody>
+                <a:bodyPr rtlCol="0" anchor="ctr"/>
+                <a:lstStyle/>
+                <a:p>
+                  <a:pPr algn="ctr"/>
+                  <a:endParaRPr lang="de-DE"/>
+                </a:p>
+              </p:txBody>
+            </p:sp>
+            <p:sp>
+              <p:nvSpPr>
+                <p:cNvPr id="13" name="Textfeld 12"/>
+                <p:cNvSpPr txBox="1"/>
+                <p:nvPr/>
+              </p:nvSpPr>
+              <p:spPr>
+                <a:xfrm>
+                  <a:off x="2195736" y="5085184"/>
+                  <a:ext cx="898003" cy="261610"/>
+                </a:xfrm>
+                <a:prstGeom prst="rect">
+                  <a:avLst/>
+                </a:prstGeom>
+                <a:noFill/>
+              </p:spPr>
+              <p:txBody>
+                <a:bodyPr wrap="none" rtlCol="0">
+                  <a:spAutoFit/>
+                </a:bodyPr>
+                <a:lstStyle/>
+                <a:p>
+                  <a:r>
+                    <a:rPr lang="de-DE" sz="1100" dirty="0" err="1"/>
+                    <a:t>Rectification</a:t>
+                  </a:r>
+                  <a:endParaRPr lang="de-DE" sz="1100" dirty="0"/>
+                </a:p>
+              </p:txBody>
+            </p:sp>
+            <p:sp>
+              <p:nvSpPr>
+                <p:cNvPr id="14" name="Textfeld 13"/>
+                <p:cNvSpPr txBox="1"/>
+                <p:nvPr/>
+              </p:nvSpPr>
+              <p:spPr>
+                <a:xfrm>
+                  <a:off x="2987824" y="5085184"/>
+                  <a:ext cx="1042273" cy="261610"/>
+                </a:xfrm>
+                <a:prstGeom prst="rect">
+                  <a:avLst/>
+                </a:prstGeom>
+                <a:noFill/>
+              </p:spPr>
+              <p:txBody>
+                <a:bodyPr wrap="none" rtlCol="0">
+                  <a:spAutoFit/>
+                </a:bodyPr>
+                <a:lstStyle/>
+                <a:p>
+                  <a:r>
+                    <a:rPr lang="de-DE" sz="1100" dirty="0"/>
+                    <a:t>On/Off </a:t>
+                  </a:r>
+                  <a:r>
+                    <a:rPr lang="de-DE" sz="1100" dirty="0" err="1"/>
+                    <a:t>Control</a:t>
+                  </a:r>
+                  <a:endParaRPr lang="de-DE" sz="1100" dirty="0"/>
+                </a:p>
+              </p:txBody>
+            </p:sp>
+            <p:sp>
+              <p:nvSpPr>
+                <p:cNvPr id="15" name="Textfeld 14"/>
+                <p:cNvSpPr txBox="1"/>
+                <p:nvPr/>
+              </p:nvSpPr>
+              <p:spPr>
+                <a:xfrm>
+                  <a:off x="4139952" y="5085184"/>
+                  <a:ext cx="1064715" cy="261610"/>
+                </a:xfrm>
+                <a:prstGeom prst="rect">
+                  <a:avLst/>
+                </a:prstGeom>
+                <a:noFill/>
+              </p:spPr>
+              <p:txBody>
+                <a:bodyPr wrap="none" rtlCol="0">
+                  <a:spAutoFit/>
+                </a:bodyPr>
+                <a:lstStyle/>
+                <a:p>
+                  <a:r>
+                    <a:rPr lang="de-DE" sz="1100" dirty="0"/>
+                    <a:t>Buck </a:t>
+                  </a:r>
+                  <a:r>
+                    <a:rPr lang="de-DE" sz="1100" dirty="0" err="1"/>
+                    <a:t>Converter</a:t>
+                  </a:r>
+                  <a:endParaRPr lang="de-DE" sz="1100" dirty="0"/>
+                </a:p>
+              </p:txBody>
+            </p:sp>
+            <p:sp>
+              <p:nvSpPr>
+                <p:cNvPr id="16" name="Textfeld 15"/>
+                <p:cNvSpPr txBox="1"/>
+                <p:nvPr/>
+              </p:nvSpPr>
+              <p:spPr>
+                <a:xfrm>
+                  <a:off x="5940152" y="5085184"/>
+                  <a:ext cx="881973" cy="261610"/>
+                </a:xfrm>
+                <a:prstGeom prst="rect">
+                  <a:avLst/>
+                </a:prstGeom>
+                <a:noFill/>
+              </p:spPr>
+              <p:txBody>
+                <a:bodyPr wrap="none" rtlCol="0">
+                  <a:spAutoFit/>
+                </a:bodyPr>
+                <a:lstStyle/>
+                <a:p>
+                  <a:r>
+                    <a:rPr lang="de-DE" sz="1100" dirty="0" err="1"/>
+                    <a:t>Stabilization</a:t>
+                  </a:r>
+                  <a:endParaRPr lang="de-DE" sz="1100" dirty="0"/>
+                </a:p>
+              </p:txBody>
+            </p:sp>
+            <p:pic>
+              <p:nvPicPr>
+                <p:cNvPr id="18" name="Grafik 17" descr="VoltageSupply.png"/>
+                <p:cNvPicPr>
+                  <a:picLocks noChangeAspect="1"/>
+                </p:cNvPicPr>
+                <p:nvPr/>
+              </p:nvPicPr>
+              <p:blipFill>
+                <a:blip r:embed="rId2" cstate="print"/>
+                <a:srcRect l="12815" t="30301" r="8669" b="34158"/>
+                <a:stretch>
+                  <a:fillRect/>
+                </a:stretch>
+              </p:blipFill>
+              <p:spPr>
+                <a:xfrm>
+                  <a:off x="899592" y="2420888"/>
+                  <a:ext cx="7179499" cy="2223267"/>
+                </a:xfrm>
+                <a:prstGeom prst="rect">
+                  <a:avLst/>
+                </a:prstGeom>
+              </p:spPr>
+            </p:pic>
+          </p:grpSp>
+          <p:sp>
+            <p:nvSpPr>
+              <p:cNvPr id="2" name="Geschweifte Klammer links 1">
+                <a:extLst>
+                  <a:ext uri="{FF2B5EF4-FFF2-40B4-BE49-F238E27FC236}">
+                    <a16:creationId xmlns:a16="http://schemas.microsoft.com/office/drawing/2014/main" id="{9EC9D7E8-465D-CB7F-BABF-4ADE3AE71243}"/>
+                  </a:ext>
+                </a:extLst>
+              </p:cNvPr>
+              <p:cNvSpPr/>
+              <p:nvPr/>
+            </p:nvSpPr>
+            <p:spPr>
+              <a:xfrm rot="16200000">
+                <a:off x="1691680" y="4365104"/>
+                <a:ext cx="288032" cy="1008112"/>
+              </a:xfrm>
+              <a:prstGeom prst="leftBrace">
+                <a:avLst/>
+              </a:prstGeom>
+              <a:ln w="12700">
+                <a:solidFill>
+                  <a:schemeClr val="tx1"/>
+                </a:solidFill>
+              </a:ln>
+            </p:spPr>
+            <p:style>
+              <a:lnRef idx="1">
+                <a:schemeClr val="accent1"/>
+              </a:lnRef>
+              <a:fillRef idx="0">
+                <a:schemeClr val="accent1"/>
+              </a:fillRef>
+              <a:effectRef idx="0">
+                <a:schemeClr val="accent1"/>
+              </a:effectRef>
+              <a:fontRef idx="minor">
+                <a:schemeClr val="tx1"/>
+              </a:fontRef>
+            </p:style>
+            <p:txBody>
+              <a:bodyPr rtlCol="0" anchor="ctr"/>
+              <a:lstStyle/>
+              <a:p>
+                <a:pPr algn="ctr"/>
+                <a:endParaRPr lang="de-DE"/>
+              </a:p>
+            </p:txBody>
+          </p:sp>
+        </p:grpSp>
         <p:sp>
           <p:nvSpPr>
-            <p:cNvPr id="9" name="Geschweifte Klammer links 8"/>
-            <p:cNvSpPr/>
-            <p:nvPr/>
-          </p:nvSpPr>
-          <p:spPr>
-            <a:xfrm rot="16200000">
-              <a:off x="3311860" y="4545124"/>
-              <a:ext cx="288032" cy="648072"/>
-            </a:xfrm>
-            <a:prstGeom prst="leftBrace">
-              <a:avLst/>
-            </a:prstGeom>
-            <a:ln w="12700">
-              <a:solidFill>
-                <a:schemeClr val="tx1"/>
-              </a:solidFill>
-            </a:ln>
-          </p:spPr>
-          <p:style>
-            <a:lnRef idx="1">
-              <a:schemeClr val="accent1"/>
-            </a:lnRef>
-            <a:fillRef idx="0">
-              <a:schemeClr val="accent1"/>
-            </a:fillRef>
-            <a:effectRef idx="0">
-              <a:schemeClr val="accent1"/>
-            </a:effectRef>
-            <a:fontRef idx="minor">
-              <a:schemeClr val="tx1"/>
-            </a:fontRef>
-          </p:style>
-          <p:txBody>
-            <a:bodyPr rtlCol="0" anchor="ctr"/>
-            <a:lstStyle/>
-            <a:p>
-              <a:pPr algn="ctr"/>
-              <a:endParaRPr lang="de-DE"/>
-            </a:p>
-          </p:txBody>
-        </p:sp>
-        <p:sp>
-          <p:nvSpPr>
-            <p:cNvPr id="10" name="Geschweifte Klammer links 9"/>
-            <p:cNvSpPr/>
-            <p:nvPr/>
-          </p:nvSpPr>
-          <p:spPr>
-            <a:xfrm rot="16200000">
-              <a:off x="4463988" y="4113076"/>
-              <a:ext cx="288032" cy="1512168"/>
-            </a:xfrm>
-            <a:prstGeom prst="leftBrace">
-              <a:avLst/>
-            </a:prstGeom>
-            <a:ln w="12700">
-              <a:solidFill>
-                <a:schemeClr val="tx1"/>
-              </a:solidFill>
-            </a:ln>
-          </p:spPr>
-          <p:style>
-            <a:lnRef idx="1">
-              <a:schemeClr val="accent1"/>
-            </a:lnRef>
-            <a:fillRef idx="0">
-              <a:schemeClr val="accent1"/>
-            </a:fillRef>
-            <a:effectRef idx="0">
-              <a:schemeClr val="accent1"/>
-            </a:effectRef>
-            <a:fontRef idx="minor">
-              <a:schemeClr val="tx1"/>
-            </a:fontRef>
-          </p:style>
-          <p:txBody>
-            <a:bodyPr rtlCol="0" anchor="ctr"/>
-            <a:lstStyle/>
-            <a:p>
-              <a:pPr algn="ctr"/>
-              <a:endParaRPr lang="de-DE"/>
-            </a:p>
-          </p:txBody>
-        </p:sp>
-        <p:sp>
-          <p:nvSpPr>
-            <p:cNvPr id="11" name="Geschweifte Klammer links 10"/>
-            <p:cNvSpPr/>
-            <p:nvPr/>
-          </p:nvSpPr>
-          <p:spPr>
-            <a:xfrm rot="16200000">
-              <a:off x="6228184" y="3933056"/>
-              <a:ext cx="288032" cy="1872208"/>
-            </a:xfrm>
-            <a:prstGeom prst="leftBrace">
-              <a:avLst/>
-            </a:prstGeom>
-            <a:ln w="12700">
-              <a:solidFill>
-                <a:schemeClr val="tx1"/>
-              </a:solidFill>
-            </a:ln>
-          </p:spPr>
-          <p:style>
-            <a:lnRef idx="1">
-              <a:schemeClr val="accent1"/>
-            </a:lnRef>
-            <a:fillRef idx="0">
-              <a:schemeClr val="accent1"/>
-            </a:fillRef>
-            <a:effectRef idx="0">
-              <a:schemeClr val="accent1"/>
-            </a:effectRef>
-            <a:fontRef idx="minor">
-              <a:schemeClr val="tx1"/>
-            </a:fontRef>
-          </p:style>
-          <p:txBody>
-            <a:bodyPr rtlCol="0" anchor="ctr"/>
-            <a:lstStyle/>
-            <a:p>
-              <a:pPr algn="ctr"/>
-              <a:endParaRPr lang="de-DE"/>
-            </a:p>
-          </p:txBody>
-        </p:sp>
-        <p:sp>
-          <p:nvSpPr>
-            <p:cNvPr id="12" name="Geschweifte Klammer links 11"/>
-            <p:cNvSpPr/>
-            <p:nvPr/>
-          </p:nvSpPr>
-          <p:spPr>
-            <a:xfrm rot="16200000">
-              <a:off x="2591780" y="4545124"/>
-              <a:ext cx="288032" cy="648072"/>
-            </a:xfrm>
-            <a:prstGeom prst="leftBrace">
-              <a:avLst/>
-            </a:prstGeom>
-            <a:ln w="12700">
-              <a:solidFill>
-                <a:schemeClr val="tx1"/>
-              </a:solidFill>
-            </a:ln>
-          </p:spPr>
-          <p:style>
-            <a:lnRef idx="1">
-              <a:schemeClr val="accent1"/>
-            </a:lnRef>
-            <a:fillRef idx="0">
-              <a:schemeClr val="accent1"/>
-            </a:fillRef>
-            <a:effectRef idx="0">
-              <a:schemeClr val="accent1"/>
-            </a:effectRef>
-            <a:fontRef idx="minor">
-              <a:schemeClr val="tx1"/>
-            </a:fontRef>
-          </p:style>
-          <p:txBody>
-            <a:bodyPr rtlCol="0" anchor="ctr"/>
-            <a:lstStyle/>
-            <a:p>
-              <a:pPr algn="ctr"/>
-              <a:endParaRPr lang="de-DE"/>
-            </a:p>
-          </p:txBody>
-        </p:sp>
-        <p:sp>
-          <p:nvSpPr>
-            <p:cNvPr id="13" name="Textfeld 12"/>
+            <p:cNvPr id="3" name="Textfeld 2">
+              <a:extLst>
+                <a:ext uri="{FF2B5EF4-FFF2-40B4-BE49-F238E27FC236}">
+                  <a16:creationId xmlns:a16="http://schemas.microsoft.com/office/drawing/2014/main" id="{B1BB88DD-A82B-9461-F193-3F9AEED336EA}"/>
+                </a:ext>
+              </a:extLst>
+            </p:cNvPr>
             <p:cNvSpPr txBox="1"/>
             <p:nvPr/>
           </p:nvSpPr>
           <p:spPr>
             <a:xfrm>
-              <a:off x="2195736" y="5085184"/>
+              <a:off x="1366466" y="5085184"/>
               <a:ext cx="898003" cy="261610"/>
             </a:xfrm>
             <a:prstGeom prst="rect">
@@ -3268,136 +3513,12 @@
             <a:lstStyle/>
             <a:p>
               <a:r>
-                <a:rPr lang="de-DE" sz="1100" dirty="0" err="1" smtClean="0"/>
-                <a:t>Rectification</a:t>
+                <a:rPr lang="de-DE" sz="1100" dirty="0"/>
+                <a:t>Transformer</a:t>
               </a:r>
-              <a:endParaRPr lang="de-DE" sz="1100" dirty="0"/>
             </a:p>
           </p:txBody>
         </p:sp>
-        <p:sp>
-          <p:nvSpPr>
-            <p:cNvPr id="14" name="Textfeld 13"/>
-            <p:cNvSpPr txBox="1"/>
-            <p:nvPr/>
-          </p:nvSpPr>
-          <p:spPr>
-            <a:xfrm>
-              <a:off x="2987824" y="5085184"/>
-              <a:ext cx="1042273" cy="261610"/>
-            </a:xfrm>
-            <a:prstGeom prst="rect">
-              <a:avLst/>
-            </a:prstGeom>
-            <a:noFill/>
-          </p:spPr>
-          <p:txBody>
-            <a:bodyPr wrap="none" rtlCol="0">
-              <a:spAutoFit/>
-            </a:bodyPr>
-            <a:lstStyle/>
-            <a:p>
-              <a:r>
-                <a:rPr lang="de-DE" sz="1100" dirty="0" smtClean="0"/>
-                <a:t>On/Off </a:t>
-              </a:r>
-              <a:r>
-                <a:rPr lang="de-DE" sz="1100" dirty="0" err="1" smtClean="0"/>
-                <a:t>Control</a:t>
-              </a:r>
-              <a:endParaRPr lang="de-DE" sz="1100" dirty="0"/>
-            </a:p>
-          </p:txBody>
-        </p:sp>
-        <p:sp>
-          <p:nvSpPr>
-            <p:cNvPr id="15" name="Textfeld 14"/>
-            <p:cNvSpPr txBox="1"/>
-            <p:nvPr/>
-          </p:nvSpPr>
-          <p:spPr>
-            <a:xfrm>
-              <a:off x="4139952" y="5085184"/>
-              <a:ext cx="1064715" cy="261610"/>
-            </a:xfrm>
-            <a:prstGeom prst="rect">
-              <a:avLst/>
-            </a:prstGeom>
-            <a:noFill/>
-          </p:spPr>
-          <p:txBody>
-            <a:bodyPr wrap="none" rtlCol="0">
-              <a:spAutoFit/>
-            </a:bodyPr>
-            <a:lstStyle/>
-            <a:p>
-              <a:r>
-                <a:rPr lang="de-DE" sz="1100" dirty="0" smtClean="0"/>
-                <a:t>Buck </a:t>
-              </a:r>
-              <a:r>
-                <a:rPr lang="de-DE" sz="1100" dirty="0" err="1" smtClean="0"/>
-                <a:t>Converter</a:t>
-              </a:r>
-              <a:endParaRPr lang="de-DE" sz="1100" dirty="0"/>
-            </a:p>
-          </p:txBody>
-        </p:sp>
-        <p:sp>
-          <p:nvSpPr>
-            <p:cNvPr id="16" name="Textfeld 15"/>
-            <p:cNvSpPr txBox="1"/>
-            <p:nvPr/>
-          </p:nvSpPr>
-          <p:spPr>
-            <a:xfrm>
-              <a:off x="5940152" y="5085184"/>
-              <a:ext cx="881973" cy="261610"/>
-            </a:xfrm>
-            <a:prstGeom prst="rect">
-              <a:avLst/>
-            </a:prstGeom>
-            <a:noFill/>
-          </p:spPr>
-          <p:txBody>
-            <a:bodyPr wrap="none" rtlCol="0">
-              <a:spAutoFit/>
-            </a:bodyPr>
-            <a:lstStyle/>
-            <a:p>
-              <a:r>
-                <a:rPr lang="de-DE" sz="1100" dirty="0" err="1" smtClean="0"/>
-                <a:t>Stabilization</a:t>
-              </a:r>
-              <a:endParaRPr lang="de-DE" sz="1100" dirty="0"/>
-            </a:p>
-          </p:txBody>
-        </p:sp>
-        <p:pic>
-          <p:nvPicPr>
-            <p:cNvPr id="18" name="Grafik 17" descr="VoltageSupply.png"/>
-            <p:cNvPicPr>
-              <a:picLocks noChangeAspect="1"/>
-            </p:cNvPicPr>
-            <p:nvPr/>
-          </p:nvPicPr>
-          <p:blipFill>
-            <a:blip r:embed="rId2" cstate="print"/>
-            <a:srcRect l="12815" t="30301" r="8669" b="34158"/>
-            <a:stretch>
-              <a:fillRect/>
-            </a:stretch>
-          </p:blipFill>
-          <p:spPr>
-            <a:xfrm>
-              <a:off x="899592" y="2420888"/>
-              <a:ext cx="7179499" cy="2223267"/>
-            </a:xfrm>
-            <a:prstGeom prst="rect">
-              <a:avLst/>
-            </a:prstGeom>
-          </p:spPr>
-        </p:pic>
       </p:grpSp>
     </p:spTree>
   </p:cSld>

--- a/Images/SupplyVoltage.pptx
+++ b/Images/SupplyVoltage.pptx
@@ -6,6 +6,8 @@
   </p:sldMasterIdLst>
   <p:sldIdLst>
     <p:sldId id="256" r:id="rId2"/>
+    <p:sldId id="257" r:id="rId3"/>
+    <p:sldId id="258" r:id="rId4"/>
   </p:sldIdLst>
   <p:sldSz cx="9144000" cy="6858000" type="screen4x3"/>
   <p:notesSz cx="6858000" cy="9144000"/>
@@ -121,6 +123,5237 @@
     </p:ext>
   </p:extLst>
 </p:presentation>
+</file>
+
+<file path=ppt/charts/chart1.xml><?xml version="1.0" encoding="utf-8"?>
+<c:chartSpace xmlns:c="http://schemas.openxmlformats.org/drawingml/2006/chart" xmlns:a="http://schemas.openxmlformats.org/drawingml/2006/main" xmlns:r="http://schemas.openxmlformats.org/officeDocument/2006/relationships" xmlns:c16r2="http://schemas.microsoft.com/office/drawing/2015/06/chart">
+  <c:date1904 val="0"/>
+  <c:lang val="de-DE"/>
+  <c:roundedCorners val="0"/>
+  <mc:AlternateContent xmlns:mc="http://schemas.openxmlformats.org/markup-compatibility/2006">
+    <mc:Choice xmlns:c14="http://schemas.microsoft.com/office/drawing/2007/8/2/chart" Requires="c14">
+      <c14:style val="102"/>
+    </mc:Choice>
+    <mc:Fallback>
+      <c:style val="2"/>
+    </mc:Fallback>
+  </mc:AlternateContent>
+  <c:chart>
+    <c:autoTitleDeleted val="1"/>
+    <c:plotArea>
+      <c:layout>
+        <c:manualLayout>
+          <c:layoutTarget val="inner"/>
+          <c:xMode val="edge"/>
+          <c:yMode val="edge"/>
+          <c:x val="0.18526512340951484"/>
+          <c:y val="8.488248037301506E-2"/>
+          <c:w val="0.81473487659048516"/>
+          <c:h val="0.76657317897420862"/>
+        </c:manualLayout>
+      </c:layout>
+      <c:scatterChart>
+        <c:scatterStyle val="smoothMarker"/>
+        <c:varyColors val="0"/>
+        <c:ser>
+          <c:idx val="0"/>
+          <c:order val="0"/>
+          <c:tx>
+            <c:strRef>
+              <c:f>Tabelle1!$B$1</c:f>
+              <c:strCache>
+                <c:ptCount val="1"/>
+                <c:pt idx="0">
+                  <c:v>Y-Werte</c:v>
+                </c:pt>
+              </c:strCache>
+            </c:strRef>
+          </c:tx>
+          <c:spPr>
+            <a:ln w="19050" cap="rnd">
+              <a:solidFill>
+                <a:schemeClr val="accent1"/>
+              </a:solidFill>
+              <a:round/>
+            </a:ln>
+            <a:effectLst/>
+          </c:spPr>
+          <c:marker>
+            <c:symbol val="none"/>
+          </c:marker>
+          <c:xVal>
+            <c:numRef>
+              <c:f>Tabelle1!$A$2:$A$33</c:f>
+              <c:numCache>
+                <c:formatCode>General</c:formatCode>
+                <c:ptCount val="32"/>
+                <c:pt idx="0">
+                  <c:v>0</c:v>
+                </c:pt>
+                <c:pt idx="1">
+                  <c:v>0.2</c:v>
+                </c:pt>
+                <c:pt idx="2">
+                  <c:v>0.4</c:v>
+                </c:pt>
+                <c:pt idx="3">
+                  <c:v>0.6</c:v>
+                </c:pt>
+                <c:pt idx="4">
+                  <c:v>0.8</c:v>
+                </c:pt>
+                <c:pt idx="5">
+                  <c:v>1</c:v>
+                </c:pt>
+                <c:pt idx="6">
+                  <c:v>1.2</c:v>
+                </c:pt>
+                <c:pt idx="7">
+                  <c:v>1.4</c:v>
+                </c:pt>
+                <c:pt idx="8">
+                  <c:v>1.6</c:v>
+                </c:pt>
+                <c:pt idx="9">
+                  <c:v>1.8</c:v>
+                </c:pt>
+                <c:pt idx="10">
+                  <c:v>2</c:v>
+                </c:pt>
+                <c:pt idx="11">
+                  <c:v>2.2000000000000002</c:v>
+                </c:pt>
+                <c:pt idx="12">
+                  <c:v>2.4</c:v>
+                </c:pt>
+                <c:pt idx="13">
+                  <c:v>2.6</c:v>
+                </c:pt>
+                <c:pt idx="14">
+                  <c:v>2.8</c:v>
+                </c:pt>
+                <c:pt idx="15">
+                  <c:v>3</c:v>
+                </c:pt>
+                <c:pt idx="16">
+                  <c:v>3.2</c:v>
+                </c:pt>
+                <c:pt idx="17">
+                  <c:v>3.4</c:v>
+                </c:pt>
+                <c:pt idx="18">
+                  <c:v>3.6</c:v>
+                </c:pt>
+                <c:pt idx="19">
+                  <c:v>3.8</c:v>
+                </c:pt>
+                <c:pt idx="20">
+                  <c:v>4</c:v>
+                </c:pt>
+                <c:pt idx="21">
+                  <c:v>4.2</c:v>
+                </c:pt>
+                <c:pt idx="22">
+                  <c:v>4.4000000000000004</c:v>
+                </c:pt>
+                <c:pt idx="23">
+                  <c:v>4.5999999999999996</c:v>
+                </c:pt>
+                <c:pt idx="24">
+                  <c:v>4.8</c:v>
+                </c:pt>
+                <c:pt idx="25">
+                  <c:v>5</c:v>
+                </c:pt>
+                <c:pt idx="26">
+                  <c:v>5.2</c:v>
+                </c:pt>
+                <c:pt idx="27">
+                  <c:v>5.4</c:v>
+                </c:pt>
+                <c:pt idx="28">
+                  <c:v>5.6</c:v>
+                </c:pt>
+                <c:pt idx="29">
+                  <c:v>5.8</c:v>
+                </c:pt>
+                <c:pt idx="30">
+                  <c:v>6</c:v>
+                </c:pt>
+                <c:pt idx="31">
+                  <c:v>6.2</c:v>
+                </c:pt>
+              </c:numCache>
+            </c:numRef>
+          </c:xVal>
+          <c:yVal>
+            <c:numRef>
+              <c:f>Tabelle1!$B$2:$B$33</c:f>
+              <c:numCache>
+                <c:formatCode>General</c:formatCode>
+                <c:ptCount val="32"/>
+                <c:pt idx="0">
+                  <c:v>0</c:v>
+                </c:pt>
+                <c:pt idx="1">
+                  <c:v>0.19866933079506122</c:v>
+                </c:pt>
+                <c:pt idx="2">
+                  <c:v>0.38941834230865052</c:v>
+                </c:pt>
+                <c:pt idx="3">
+                  <c:v>0.56464247339503537</c:v>
+                </c:pt>
+                <c:pt idx="4">
+                  <c:v>0.71735609089952279</c:v>
+                </c:pt>
+                <c:pt idx="5">
+                  <c:v>0.8414709848078965</c:v>
+                </c:pt>
+                <c:pt idx="6">
+                  <c:v>0.93203908596722629</c:v>
+                </c:pt>
+                <c:pt idx="7">
+                  <c:v>0.98544972998846014</c:v>
+                </c:pt>
+                <c:pt idx="8">
+                  <c:v>0.99957360304150511</c:v>
+                </c:pt>
+                <c:pt idx="9">
+                  <c:v>0.97384763087819515</c:v>
+                </c:pt>
+                <c:pt idx="10">
+                  <c:v>0.90929742682568171</c:v>
+                </c:pt>
+                <c:pt idx="11">
+                  <c:v>0.80849640381959009</c:v>
+                </c:pt>
+                <c:pt idx="12">
+                  <c:v>0.67546318055115095</c:v>
+                </c:pt>
+                <c:pt idx="13">
+                  <c:v>0.51550137182146416</c:v>
+                </c:pt>
+                <c:pt idx="14">
+                  <c:v>0.33498815015590511</c:v>
+                </c:pt>
+                <c:pt idx="15">
+                  <c:v>0.14112000805986721</c:v>
+                </c:pt>
+                <c:pt idx="16">
+                  <c:v>-5.8374143427580086E-2</c:v>
+                </c:pt>
+                <c:pt idx="17">
+                  <c:v>-0.25554110202683122</c:v>
+                </c:pt>
+                <c:pt idx="18">
+                  <c:v>-0.44252044329485246</c:v>
+                </c:pt>
+                <c:pt idx="19">
+                  <c:v>-0.61185789094271892</c:v>
+                </c:pt>
+                <c:pt idx="20">
+                  <c:v>-0.7568024953079282</c:v>
+                </c:pt>
+                <c:pt idx="21">
+                  <c:v>-0.87157577241358819</c:v>
+                </c:pt>
+                <c:pt idx="22">
+                  <c:v>-0.95160207388951601</c:v>
+                </c:pt>
+                <c:pt idx="23">
+                  <c:v>-0.99369100363346441</c:v>
+                </c:pt>
+                <c:pt idx="24">
+                  <c:v>-0.99616460883584068</c:v>
+                </c:pt>
+                <c:pt idx="25">
+                  <c:v>-0.95892427466313845</c:v>
+                </c:pt>
+                <c:pt idx="26">
+                  <c:v>-0.88345465572015314</c:v>
+                </c:pt>
+                <c:pt idx="27">
+                  <c:v>-0.77276448755598715</c:v>
+                </c:pt>
+                <c:pt idx="28">
+                  <c:v>-0.63126663787232162</c:v>
+                </c:pt>
+                <c:pt idx="29">
+                  <c:v>-0.46460217941375737</c:v>
+                </c:pt>
+                <c:pt idx="30">
+                  <c:v>-0.27941549819892586</c:v>
+                </c:pt>
+                <c:pt idx="31">
+                  <c:v>-8.3089402817496397E-2</c:v>
+                </c:pt>
+              </c:numCache>
+            </c:numRef>
+          </c:yVal>
+          <c:smooth val="1"/>
+          <c:extLst>
+            <c:ext xmlns:c16="http://schemas.microsoft.com/office/drawing/2014/chart" uri="{C3380CC4-5D6E-409C-BE32-E72D297353CC}">
+              <c16:uniqueId val="{00000000-2BBC-463A-AB7C-F6D96D8ACC5D}"/>
+            </c:ext>
+          </c:extLst>
+        </c:ser>
+        <c:dLbls>
+          <c:showLegendKey val="0"/>
+          <c:showVal val="0"/>
+          <c:showCatName val="0"/>
+          <c:showSerName val="0"/>
+          <c:showPercent val="0"/>
+          <c:showBubbleSize val="0"/>
+        </c:dLbls>
+        <c:axId val="1043246464"/>
+        <c:axId val="1043335744"/>
+      </c:scatterChart>
+      <c:valAx>
+        <c:axId val="1043246464"/>
+        <c:scaling>
+          <c:orientation val="minMax"/>
+        </c:scaling>
+        <c:delete val="1"/>
+        <c:axPos val="b"/>
+        <c:numFmt formatCode="General" sourceLinked="1"/>
+        <c:majorTickMark val="none"/>
+        <c:minorTickMark val="none"/>
+        <c:tickLblPos val="nextTo"/>
+        <c:crossAx val="1043335744"/>
+        <c:crosses val="autoZero"/>
+        <c:crossBetween val="midCat"/>
+      </c:valAx>
+      <c:valAx>
+        <c:axId val="1043335744"/>
+        <c:scaling>
+          <c:orientation val="minMax"/>
+        </c:scaling>
+        <c:delete val="1"/>
+        <c:axPos val="l"/>
+        <c:numFmt formatCode="General" sourceLinked="1"/>
+        <c:majorTickMark val="none"/>
+        <c:minorTickMark val="none"/>
+        <c:tickLblPos val="nextTo"/>
+        <c:crossAx val="1043246464"/>
+        <c:crosses val="autoZero"/>
+        <c:crossBetween val="midCat"/>
+      </c:valAx>
+      <c:spPr>
+        <a:noFill/>
+        <a:ln>
+          <a:noFill/>
+        </a:ln>
+        <a:effectLst/>
+      </c:spPr>
+    </c:plotArea>
+    <c:plotVisOnly val="1"/>
+    <c:dispBlanksAs val="gap"/>
+    <c:extLst>
+      <c:ext xmlns:c16r3="http://schemas.microsoft.com/office/drawing/2017/03/chart" uri="{56B9EC1D-385E-4148-901F-78D8002777C0}">
+        <c16r3:dataDisplayOptions16>
+          <c16r3:dispNaAsBlank val="1"/>
+        </c16r3:dataDisplayOptions16>
+      </c:ext>
+    </c:extLst>
+    <c:showDLblsOverMax val="0"/>
+  </c:chart>
+  <c:spPr>
+    <a:noFill/>
+    <a:ln>
+      <a:noFill/>
+    </a:ln>
+    <a:effectLst/>
+  </c:spPr>
+  <c:txPr>
+    <a:bodyPr/>
+    <a:lstStyle/>
+    <a:p>
+      <a:pPr>
+        <a:defRPr/>
+      </a:pPr>
+      <a:endParaRPr lang="de-DE"/>
+    </a:p>
+  </c:txPr>
+  <c:externalData r:id="rId3">
+    <c:autoUpdate val="0"/>
+  </c:externalData>
+</c:chartSpace>
+</file>
+
+<file path=ppt/charts/chart2.xml><?xml version="1.0" encoding="utf-8"?>
+<c:chartSpace xmlns:c="http://schemas.openxmlformats.org/drawingml/2006/chart" xmlns:a="http://schemas.openxmlformats.org/drawingml/2006/main" xmlns:r="http://schemas.openxmlformats.org/officeDocument/2006/relationships" xmlns:c16r2="http://schemas.microsoft.com/office/drawing/2015/06/chart">
+  <c:date1904 val="0"/>
+  <c:lang val="de-DE"/>
+  <c:roundedCorners val="0"/>
+  <mc:AlternateContent xmlns:mc="http://schemas.openxmlformats.org/markup-compatibility/2006">
+    <mc:Choice xmlns:c14="http://schemas.microsoft.com/office/drawing/2007/8/2/chart" Requires="c14">
+      <c14:style val="102"/>
+    </mc:Choice>
+    <mc:Fallback>
+      <c:style val="2"/>
+    </mc:Fallback>
+  </mc:AlternateContent>
+  <c:chart>
+    <c:autoTitleDeleted val="1"/>
+    <c:plotArea>
+      <c:layout>
+        <c:manualLayout>
+          <c:layoutTarget val="inner"/>
+          <c:xMode val="edge"/>
+          <c:yMode val="edge"/>
+          <c:x val="0.18526512340951484"/>
+          <c:y val="8.488248037301506E-2"/>
+          <c:w val="0.81473487659048516"/>
+          <c:h val="0.76657317897420862"/>
+        </c:manualLayout>
+      </c:layout>
+      <c:scatterChart>
+        <c:scatterStyle val="smoothMarker"/>
+        <c:varyColors val="0"/>
+        <c:ser>
+          <c:idx val="0"/>
+          <c:order val="0"/>
+          <c:tx>
+            <c:strRef>
+              <c:f>Tabelle1!$B$1</c:f>
+              <c:strCache>
+                <c:ptCount val="1"/>
+                <c:pt idx="0">
+                  <c:v>Y-Werte</c:v>
+                </c:pt>
+              </c:strCache>
+            </c:strRef>
+          </c:tx>
+          <c:spPr>
+            <a:ln w="19050" cap="rnd">
+              <a:solidFill>
+                <a:schemeClr val="accent1"/>
+              </a:solidFill>
+              <a:round/>
+            </a:ln>
+            <a:effectLst/>
+          </c:spPr>
+          <c:marker>
+            <c:symbol val="none"/>
+          </c:marker>
+          <c:xVal>
+            <c:numRef>
+              <c:f>Tabelle1!$A$2:$A$33</c:f>
+              <c:numCache>
+                <c:formatCode>General</c:formatCode>
+                <c:ptCount val="32"/>
+                <c:pt idx="0">
+                  <c:v>0</c:v>
+                </c:pt>
+                <c:pt idx="1">
+                  <c:v>0.2</c:v>
+                </c:pt>
+                <c:pt idx="2">
+                  <c:v>0.4</c:v>
+                </c:pt>
+                <c:pt idx="3">
+                  <c:v>0.6</c:v>
+                </c:pt>
+                <c:pt idx="4">
+                  <c:v>0.8</c:v>
+                </c:pt>
+                <c:pt idx="5">
+                  <c:v>1</c:v>
+                </c:pt>
+                <c:pt idx="6">
+                  <c:v>1.2</c:v>
+                </c:pt>
+                <c:pt idx="7">
+                  <c:v>1.4</c:v>
+                </c:pt>
+                <c:pt idx="8">
+                  <c:v>1.6</c:v>
+                </c:pt>
+                <c:pt idx="9">
+                  <c:v>1.8</c:v>
+                </c:pt>
+                <c:pt idx="10">
+                  <c:v>2</c:v>
+                </c:pt>
+                <c:pt idx="11">
+                  <c:v>2.2000000000000002</c:v>
+                </c:pt>
+                <c:pt idx="12">
+                  <c:v>2.4</c:v>
+                </c:pt>
+                <c:pt idx="13">
+                  <c:v>2.6</c:v>
+                </c:pt>
+                <c:pt idx="14">
+                  <c:v>2.8</c:v>
+                </c:pt>
+                <c:pt idx="15">
+                  <c:v>3</c:v>
+                </c:pt>
+                <c:pt idx="16">
+                  <c:v>3.2</c:v>
+                </c:pt>
+                <c:pt idx="17">
+                  <c:v>3.4</c:v>
+                </c:pt>
+                <c:pt idx="18">
+                  <c:v>3.6</c:v>
+                </c:pt>
+                <c:pt idx="19">
+                  <c:v>3.8</c:v>
+                </c:pt>
+                <c:pt idx="20">
+                  <c:v>4</c:v>
+                </c:pt>
+                <c:pt idx="21">
+                  <c:v>4.2</c:v>
+                </c:pt>
+                <c:pt idx="22">
+                  <c:v>4.4000000000000004</c:v>
+                </c:pt>
+                <c:pt idx="23">
+                  <c:v>4.5999999999999996</c:v>
+                </c:pt>
+                <c:pt idx="24">
+                  <c:v>4.8</c:v>
+                </c:pt>
+                <c:pt idx="25">
+                  <c:v>5</c:v>
+                </c:pt>
+                <c:pt idx="26">
+                  <c:v>5.2</c:v>
+                </c:pt>
+                <c:pt idx="27">
+                  <c:v>5.4</c:v>
+                </c:pt>
+                <c:pt idx="28">
+                  <c:v>5.6</c:v>
+                </c:pt>
+                <c:pt idx="29">
+                  <c:v>5.8</c:v>
+                </c:pt>
+                <c:pt idx="30">
+                  <c:v>6</c:v>
+                </c:pt>
+                <c:pt idx="31">
+                  <c:v>6.2</c:v>
+                </c:pt>
+              </c:numCache>
+            </c:numRef>
+          </c:xVal>
+          <c:yVal>
+            <c:numRef>
+              <c:f>Tabelle1!$B$2:$B$33</c:f>
+              <c:numCache>
+                <c:formatCode>General</c:formatCode>
+                <c:ptCount val="32"/>
+                <c:pt idx="0">
+                  <c:v>0</c:v>
+                </c:pt>
+                <c:pt idx="1">
+                  <c:v>0.19866933079506122</c:v>
+                </c:pt>
+                <c:pt idx="2">
+                  <c:v>0.38941834230865052</c:v>
+                </c:pt>
+                <c:pt idx="3">
+                  <c:v>0.56464247339503537</c:v>
+                </c:pt>
+                <c:pt idx="4">
+                  <c:v>0.71735609089952279</c:v>
+                </c:pt>
+                <c:pt idx="5">
+                  <c:v>0.8414709848078965</c:v>
+                </c:pt>
+                <c:pt idx="6">
+                  <c:v>0.93203908596722629</c:v>
+                </c:pt>
+                <c:pt idx="7">
+                  <c:v>0.98544972998846014</c:v>
+                </c:pt>
+                <c:pt idx="8">
+                  <c:v>0.99957360304150511</c:v>
+                </c:pt>
+                <c:pt idx="9">
+                  <c:v>0.97384763087819515</c:v>
+                </c:pt>
+                <c:pt idx="10">
+                  <c:v>0.90929742682568171</c:v>
+                </c:pt>
+                <c:pt idx="11">
+                  <c:v>0.80849640381959009</c:v>
+                </c:pt>
+                <c:pt idx="12">
+                  <c:v>0.67546318055115095</c:v>
+                </c:pt>
+                <c:pt idx="13">
+                  <c:v>0.51550137182146416</c:v>
+                </c:pt>
+                <c:pt idx="14">
+                  <c:v>0.33498815015590511</c:v>
+                </c:pt>
+                <c:pt idx="15">
+                  <c:v>0.14112000805986721</c:v>
+                </c:pt>
+                <c:pt idx="16">
+                  <c:v>-5.8374143427580086E-2</c:v>
+                </c:pt>
+                <c:pt idx="17">
+                  <c:v>-0.25554110202683122</c:v>
+                </c:pt>
+                <c:pt idx="18">
+                  <c:v>-0.44252044329485246</c:v>
+                </c:pt>
+                <c:pt idx="19">
+                  <c:v>-0.61185789094271892</c:v>
+                </c:pt>
+                <c:pt idx="20">
+                  <c:v>-0.7568024953079282</c:v>
+                </c:pt>
+                <c:pt idx="21">
+                  <c:v>-0.87157577241358819</c:v>
+                </c:pt>
+                <c:pt idx="22">
+                  <c:v>-0.95160207388951601</c:v>
+                </c:pt>
+                <c:pt idx="23">
+                  <c:v>-0.99369100363346441</c:v>
+                </c:pt>
+                <c:pt idx="24">
+                  <c:v>-0.99616460883584068</c:v>
+                </c:pt>
+                <c:pt idx="25">
+                  <c:v>-0.95892427466313845</c:v>
+                </c:pt>
+                <c:pt idx="26">
+                  <c:v>-0.88345465572015314</c:v>
+                </c:pt>
+                <c:pt idx="27">
+                  <c:v>-0.77276448755598715</c:v>
+                </c:pt>
+                <c:pt idx="28">
+                  <c:v>-0.63126663787232162</c:v>
+                </c:pt>
+                <c:pt idx="29">
+                  <c:v>-0.46460217941375737</c:v>
+                </c:pt>
+                <c:pt idx="30">
+                  <c:v>-0.27941549819892586</c:v>
+                </c:pt>
+                <c:pt idx="31">
+                  <c:v>-8.3089402817496397E-2</c:v>
+                </c:pt>
+              </c:numCache>
+            </c:numRef>
+          </c:yVal>
+          <c:smooth val="1"/>
+          <c:extLst>
+            <c:ext xmlns:c16="http://schemas.microsoft.com/office/drawing/2014/chart" uri="{C3380CC4-5D6E-409C-BE32-E72D297353CC}">
+              <c16:uniqueId val="{00000000-286F-4ED7-9E78-38C1480A77F9}"/>
+            </c:ext>
+          </c:extLst>
+        </c:ser>
+        <c:dLbls>
+          <c:showLegendKey val="0"/>
+          <c:showVal val="0"/>
+          <c:showCatName val="0"/>
+          <c:showSerName val="0"/>
+          <c:showPercent val="0"/>
+          <c:showBubbleSize val="0"/>
+        </c:dLbls>
+        <c:axId val="1043246464"/>
+        <c:axId val="1043335744"/>
+      </c:scatterChart>
+      <c:valAx>
+        <c:axId val="1043246464"/>
+        <c:scaling>
+          <c:orientation val="minMax"/>
+        </c:scaling>
+        <c:delete val="1"/>
+        <c:axPos val="b"/>
+        <c:numFmt formatCode="General" sourceLinked="1"/>
+        <c:majorTickMark val="none"/>
+        <c:minorTickMark val="none"/>
+        <c:tickLblPos val="nextTo"/>
+        <c:crossAx val="1043335744"/>
+        <c:crosses val="autoZero"/>
+        <c:crossBetween val="midCat"/>
+      </c:valAx>
+      <c:valAx>
+        <c:axId val="1043335744"/>
+        <c:scaling>
+          <c:orientation val="minMax"/>
+        </c:scaling>
+        <c:delete val="1"/>
+        <c:axPos val="l"/>
+        <c:numFmt formatCode="General" sourceLinked="1"/>
+        <c:majorTickMark val="none"/>
+        <c:minorTickMark val="none"/>
+        <c:tickLblPos val="nextTo"/>
+        <c:crossAx val="1043246464"/>
+        <c:crosses val="autoZero"/>
+        <c:crossBetween val="midCat"/>
+      </c:valAx>
+      <c:spPr>
+        <a:noFill/>
+        <a:ln>
+          <a:noFill/>
+        </a:ln>
+        <a:effectLst/>
+      </c:spPr>
+    </c:plotArea>
+    <c:plotVisOnly val="1"/>
+    <c:dispBlanksAs val="gap"/>
+    <c:extLst>
+      <c:ext xmlns:c16r3="http://schemas.microsoft.com/office/drawing/2017/03/chart" uri="{56B9EC1D-385E-4148-901F-78D8002777C0}">
+        <c16r3:dataDisplayOptions16>
+          <c16r3:dispNaAsBlank val="1"/>
+        </c16r3:dataDisplayOptions16>
+      </c:ext>
+    </c:extLst>
+    <c:showDLblsOverMax val="0"/>
+  </c:chart>
+  <c:spPr>
+    <a:noFill/>
+    <a:ln>
+      <a:noFill/>
+    </a:ln>
+    <a:effectLst/>
+  </c:spPr>
+  <c:txPr>
+    <a:bodyPr/>
+    <a:lstStyle/>
+    <a:p>
+      <a:pPr>
+        <a:defRPr/>
+      </a:pPr>
+      <a:endParaRPr lang="de-DE"/>
+    </a:p>
+  </c:txPr>
+  <c:externalData r:id="rId3">
+    <c:autoUpdate val="0"/>
+  </c:externalData>
+</c:chartSpace>
+</file>
+
+<file path=ppt/charts/chart3.xml><?xml version="1.0" encoding="utf-8"?>
+<c:chartSpace xmlns:c="http://schemas.openxmlformats.org/drawingml/2006/chart" xmlns:a="http://schemas.openxmlformats.org/drawingml/2006/main" xmlns:r="http://schemas.openxmlformats.org/officeDocument/2006/relationships" xmlns:c16r2="http://schemas.microsoft.com/office/drawing/2015/06/chart">
+  <c:date1904 val="0"/>
+  <c:lang val="de-DE"/>
+  <c:roundedCorners val="0"/>
+  <mc:AlternateContent xmlns:mc="http://schemas.openxmlformats.org/markup-compatibility/2006">
+    <mc:Choice xmlns:c14="http://schemas.microsoft.com/office/drawing/2007/8/2/chart" Requires="c14">
+      <c14:style val="102"/>
+    </mc:Choice>
+    <mc:Fallback>
+      <c:style val="2"/>
+    </mc:Fallback>
+  </mc:AlternateContent>
+  <c:chart>
+    <c:autoTitleDeleted val="1"/>
+    <c:plotArea>
+      <c:layout>
+        <c:manualLayout>
+          <c:layoutTarget val="inner"/>
+          <c:xMode val="edge"/>
+          <c:yMode val="edge"/>
+          <c:x val="0"/>
+          <c:y val="0"/>
+          <c:w val="0.93841072332351083"/>
+          <c:h val="0.96159073686552321"/>
+        </c:manualLayout>
+      </c:layout>
+      <c:scatterChart>
+        <c:scatterStyle val="smoothMarker"/>
+        <c:varyColors val="0"/>
+        <c:ser>
+          <c:idx val="0"/>
+          <c:order val="0"/>
+          <c:tx>
+            <c:strRef>
+              <c:f>Tabelle1!$B$1</c:f>
+              <c:strCache>
+                <c:ptCount val="1"/>
+                <c:pt idx="0">
+                  <c:v>Spalte2</c:v>
+                </c:pt>
+              </c:strCache>
+            </c:strRef>
+          </c:tx>
+          <c:spPr>
+            <a:ln w="19050" cap="rnd">
+              <a:solidFill>
+                <a:schemeClr val="bg1">
+                  <a:lumMod val="50000"/>
+                </a:schemeClr>
+              </a:solidFill>
+              <a:prstDash val="dash"/>
+              <a:round/>
+            </a:ln>
+            <a:effectLst/>
+          </c:spPr>
+          <c:marker>
+            <c:symbol val="none"/>
+          </c:marker>
+          <c:xVal>
+            <c:numRef>
+              <c:f>Tabelle1!$A$2:$A$128</c:f>
+              <c:numCache>
+                <c:formatCode>General</c:formatCode>
+                <c:ptCount val="127"/>
+                <c:pt idx="0">
+                  <c:v>0</c:v>
+                </c:pt>
+                <c:pt idx="1">
+                  <c:v>0.1</c:v>
+                </c:pt>
+                <c:pt idx="2">
+                  <c:v>0.2</c:v>
+                </c:pt>
+                <c:pt idx="3">
+                  <c:v>0.3</c:v>
+                </c:pt>
+                <c:pt idx="4">
+                  <c:v>0.4</c:v>
+                </c:pt>
+                <c:pt idx="5">
+                  <c:v>0.5</c:v>
+                </c:pt>
+                <c:pt idx="6">
+                  <c:v>0.6</c:v>
+                </c:pt>
+                <c:pt idx="7">
+                  <c:v>0.7</c:v>
+                </c:pt>
+                <c:pt idx="8">
+                  <c:v>0.8</c:v>
+                </c:pt>
+                <c:pt idx="9">
+                  <c:v>0.9</c:v>
+                </c:pt>
+                <c:pt idx="10">
+                  <c:v>1</c:v>
+                </c:pt>
+                <c:pt idx="11">
+                  <c:v>1.1000000000000001</c:v>
+                </c:pt>
+                <c:pt idx="12">
+                  <c:v>1.2</c:v>
+                </c:pt>
+                <c:pt idx="13">
+                  <c:v>1.3</c:v>
+                </c:pt>
+                <c:pt idx="14">
+                  <c:v>1.4</c:v>
+                </c:pt>
+                <c:pt idx="15">
+                  <c:v>1.5</c:v>
+                </c:pt>
+                <c:pt idx="16">
+                  <c:v>1.6</c:v>
+                </c:pt>
+                <c:pt idx="17">
+                  <c:v>1.7</c:v>
+                </c:pt>
+                <c:pt idx="18">
+                  <c:v>1.8</c:v>
+                </c:pt>
+                <c:pt idx="19">
+                  <c:v>1.9</c:v>
+                </c:pt>
+                <c:pt idx="20">
+                  <c:v>2</c:v>
+                </c:pt>
+                <c:pt idx="21">
+                  <c:v>2.1</c:v>
+                </c:pt>
+                <c:pt idx="22">
+                  <c:v>2.2000000000000002</c:v>
+                </c:pt>
+                <c:pt idx="23">
+                  <c:v>2.2999999999999998</c:v>
+                </c:pt>
+                <c:pt idx="24">
+                  <c:v>2.4</c:v>
+                </c:pt>
+                <c:pt idx="25">
+                  <c:v>2.5</c:v>
+                </c:pt>
+                <c:pt idx="26">
+                  <c:v>2.6</c:v>
+                </c:pt>
+                <c:pt idx="27">
+                  <c:v>2.7</c:v>
+                </c:pt>
+                <c:pt idx="28">
+                  <c:v>2.8</c:v>
+                </c:pt>
+                <c:pt idx="29">
+                  <c:v>2.9</c:v>
+                </c:pt>
+                <c:pt idx="30">
+                  <c:v>3</c:v>
+                </c:pt>
+                <c:pt idx="31">
+                  <c:v>3.1</c:v>
+                </c:pt>
+                <c:pt idx="32">
+                  <c:v>3.2</c:v>
+                </c:pt>
+                <c:pt idx="33">
+                  <c:v>3.3</c:v>
+                </c:pt>
+                <c:pt idx="34">
+                  <c:v>3.4</c:v>
+                </c:pt>
+                <c:pt idx="35">
+                  <c:v>3.5</c:v>
+                </c:pt>
+                <c:pt idx="36">
+                  <c:v>3.6</c:v>
+                </c:pt>
+                <c:pt idx="37">
+                  <c:v>3.7</c:v>
+                </c:pt>
+                <c:pt idx="38">
+                  <c:v>3.8</c:v>
+                </c:pt>
+                <c:pt idx="39">
+                  <c:v>3.9</c:v>
+                </c:pt>
+                <c:pt idx="40">
+                  <c:v>4</c:v>
+                </c:pt>
+                <c:pt idx="41">
+                  <c:v>4.0999999999999996</c:v>
+                </c:pt>
+                <c:pt idx="42">
+                  <c:v>4.2</c:v>
+                </c:pt>
+                <c:pt idx="43">
+                  <c:v>4.3</c:v>
+                </c:pt>
+                <c:pt idx="44">
+                  <c:v>4.4000000000000004</c:v>
+                </c:pt>
+                <c:pt idx="45">
+                  <c:v>4.5</c:v>
+                </c:pt>
+                <c:pt idx="46">
+                  <c:v>4.5999999999999996</c:v>
+                </c:pt>
+                <c:pt idx="47">
+                  <c:v>4.7</c:v>
+                </c:pt>
+                <c:pt idx="48">
+                  <c:v>4.8</c:v>
+                </c:pt>
+                <c:pt idx="49">
+                  <c:v>4.9000000000000004</c:v>
+                </c:pt>
+                <c:pt idx="50">
+                  <c:v>5</c:v>
+                </c:pt>
+                <c:pt idx="51">
+                  <c:v>5.0999999999999996</c:v>
+                </c:pt>
+                <c:pt idx="52">
+                  <c:v>5.2</c:v>
+                </c:pt>
+                <c:pt idx="53">
+                  <c:v>5.3</c:v>
+                </c:pt>
+                <c:pt idx="54">
+                  <c:v>5.4</c:v>
+                </c:pt>
+                <c:pt idx="55">
+                  <c:v>5.5</c:v>
+                </c:pt>
+                <c:pt idx="56">
+                  <c:v>5.6</c:v>
+                </c:pt>
+                <c:pt idx="57">
+                  <c:v>5.7</c:v>
+                </c:pt>
+                <c:pt idx="58">
+                  <c:v>5.8</c:v>
+                </c:pt>
+                <c:pt idx="59">
+                  <c:v>5.9</c:v>
+                </c:pt>
+                <c:pt idx="60">
+                  <c:v>6</c:v>
+                </c:pt>
+                <c:pt idx="61">
+                  <c:v>6.1</c:v>
+                </c:pt>
+                <c:pt idx="62">
+                  <c:v>6.2</c:v>
+                </c:pt>
+                <c:pt idx="63">
+                  <c:v>6.3</c:v>
+                </c:pt>
+                <c:pt idx="64">
+                  <c:v>6.4</c:v>
+                </c:pt>
+                <c:pt idx="65">
+                  <c:v>6.5</c:v>
+                </c:pt>
+                <c:pt idx="66">
+                  <c:v>6.6</c:v>
+                </c:pt>
+                <c:pt idx="67">
+                  <c:v>6.7</c:v>
+                </c:pt>
+                <c:pt idx="68">
+                  <c:v>6.8</c:v>
+                </c:pt>
+                <c:pt idx="69">
+                  <c:v>6.9</c:v>
+                </c:pt>
+                <c:pt idx="70">
+                  <c:v>7</c:v>
+                </c:pt>
+                <c:pt idx="71">
+                  <c:v>7.1</c:v>
+                </c:pt>
+                <c:pt idx="72">
+                  <c:v>7.2</c:v>
+                </c:pt>
+                <c:pt idx="73">
+                  <c:v>7.3</c:v>
+                </c:pt>
+                <c:pt idx="74">
+                  <c:v>7.4</c:v>
+                </c:pt>
+                <c:pt idx="75">
+                  <c:v>7.5</c:v>
+                </c:pt>
+                <c:pt idx="76">
+                  <c:v>7.6</c:v>
+                </c:pt>
+                <c:pt idx="77">
+                  <c:v>7.7</c:v>
+                </c:pt>
+                <c:pt idx="78">
+                  <c:v>7.8</c:v>
+                </c:pt>
+                <c:pt idx="79">
+                  <c:v>7.9</c:v>
+                </c:pt>
+                <c:pt idx="80">
+                  <c:v>8</c:v>
+                </c:pt>
+                <c:pt idx="81">
+                  <c:v>8.1</c:v>
+                </c:pt>
+                <c:pt idx="82">
+                  <c:v>8.1999999999999993</c:v>
+                </c:pt>
+                <c:pt idx="83">
+                  <c:v>8.3000000000000007</c:v>
+                </c:pt>
+                <c:pt idx="84">
+                  <c:v>8.4</c:v>
+                </c:pt>
+                <c:pt idx="85">
+                  <c:v>8.5</c:v>
+                </c:pt>
+                <c:pt idx="86">
+                  <c:v>8.6</c:v>
+                </c:pt>
+                <c:pt idx="87">
+                  <c:v>8.6999999999999993</c:v>
+                </c:pt>
+                <c:pt idx="88">
+                  <c:v>8.8000000000000007</c:v>
+                </c:pt>
+                <c:pt idx="89">
+                  <c:v>8.9</c:v>
+                </c:pt>
+                <c:pt idx="90">
+                  <c:v>9</c:v>
+                </c:pt>
+                <c:pt idx="91">
+                  <c:v>9.1</c:v>
+                </c:pt>
+                <c:pt idx="92">
+                  <c:v>9.1999999999999993</c:v>
+                </c:pt>
+                <c:pt idx="93">
+                  <c:v>9.3000000000000007</c:v>
+                </c:pt>
+                <c:pt idx="94">
+                  <c:v>9.4</c:v>
+                </c:pt>
+                <c:pt idx="95">
+                  <c:v>9.5</c:v>
+                </c:pt>
+                <c:pt idx="96">
+                  <c:v>9.6</c:v>
+                </c:pt>
+                <c:pt idx="97">
+                  <c:v>9.6999999999999993</c:v>
+                </c:pt>
+                <c:pt idx="98">
+                  <c:v>9.8000000000000007</c:v>
+                </c:pt>
+                <c:pt idx="99">
+                  <c:v>9.9</c:v>
+                </c:pt>
+                <c:pt idx="100">
+                  <c:v>10</c:v>
+                </c:pt>
+                <c:pt idx="101">
+                  <c:v>10.1</c:v>
+                </c:pt>
+                <c:pt idx="102">
+                  <c:v>10.199999999999999</c:v>
+                </c:pt>
+                <c:pt idx="103">
+                  <c:v>10.3</c:v>
+                </c:pt>
+                <c:pt idx="104">
+                  <c:v>10.4</c:v>
+                </c:pt>
+                <c:pt idx="105">
+                  <c:v>10.5</c:v>
+                </c:pt>
+                <c:pt idx="106">
+                  <c:v>10.6</c:v>
+                </c:pt>
+                <c:pt idx="107">
+                  <c:v>10.7</c:v>
+                </c:pt>
+                <c:pt idx="108">
+                  <c:v>10.8</c:v>
+                </c:pt>
+                <c:pt idx="109">
+                  <c:v>10.9</c:v>
+                </c:pt>
+                <c:pt idx="110">
+                  <c:v>11</c:v>
+                </c:pt>
+                <c:pt idx="111">
+                  <c:v>11.1</c:v>
+                </c:pt>
+                <c:pt idx="112">
+                  <c:v>11.2</c:v>
+                </c:pt>
+                <c:pt idx="113">
+                  <c:v>11.3</c:v>
+                </c:pt>
+                <c:pt idx="114">
+                  <c:v>11.4</c:v>
+                </c:pt>
+                <c:pt idx="115">
+                  <c:v>11.5</c:v>
+                </c:pt>
+                <c:pt idx="116">
+                  <c:v>11.6</c:v>
+                </c:pt>
+                <c:pt idx="117">
+                  <c:v>11.7</c:v>
+                </c:pt>
+                <c:pt idx="118">
+                  <c:v>11.8</c:v>
+                </c:pt>
+                <c:pt idx="119">
+                  <c:v>11.9</c:v>
+                </c:pt>
+                <c:pt idx="120">
+                  <c:v>12</c:v>
+                </c:pt>
+                <c:pt idx="121">
+                  <c:v>12.1</c:v>
+                </c:pt>
+                <c:pt idx="122">
+                  <c:v>12.2</c:v>
+                </c:pt>
+                <c:pt idx="123">
+                  <c:v>12.3</c:v>
+                </c:pt>
+                <c:pt idx="124">
+                  <c:v>12.4</c:v>
+                </c:pt>
+                <c:pt idx="125">
+                  <c:v>12.5</c:v>
+                </c:pt>
+                <c:pt idx="126">
+                  <c:v>12.6</c:v>
+                </c:pt>
+              </c:numCache>
+            </c:numRef>
+          </c:xVal>
+          <c:yVal>
+            <c:numRef>
+              <c:f>Tabelle1!$B$2:$B$128</c:f>
+              <c:numCache>
+                <c:formatCode>General</c:formatCode>
+                <c:ptCount val="127"/>
+                <c:pt idx="0">
+                  <c:v>0</c:v>
+                </c:pt>
+                <c:pt idx="1">
+                  <c:v>9.9833416646828155E-2</c:v>
+                </c:pt>
+                <c:pt idx="2">
+                  <c:v>0.19866933079506122</c:v>
+                </c:pt>
+                <c:pt idx="3">
+                  <c:v>0.29552020666133955</c:v>
+                </c:pt>
+                <c:pt idx="4">
+                  <c:v>0.38941834230865052</c:v>
+                </c:pt>
+                <c:pt idx="5">
+                  <c:v>0.47942553860420301</c:v>
+                </c:pt>
+                <c:pt idx="6">
+                  <c:v>0.56464247339503537</c:v>
+                </c:pt>
+                <c:pt idx="7">
+                  <c:v>0.64421768723769102</c:v>
+                </c:pt>
+                <c:pt idx="8">
+                  <c:v>0.71735609089952279</c:v>
+                </c:pt>
+                <c:pt idx="9">
+                  <c:v>0.78332690962748341</c:v>
+                </c:pt>
+                <c:pt idx="10">
+                  <c:v>0.8414709848078965</c:v>
+                </c:pt>
+                <c:pt idx="11">
+                  <c:v>0.89120736006143542</c:v>
+                </c:pt>
+                <c:pt idx="12">
+                  <c:v>0.93203908596722629</c:v>
+                </c:pt>
+                <c:pt idx="13">
+                  <c:v>0.96355818541719296</c:v>
+                </c:pt>
+                <c:pt idx="14">
+                  <c:v>0.98544972998846014</c:v>
+                </c:pt>
+                <c:pt idx="15">
+                  <c:v>0.99749498660405445</c:v>
+                </c:pt>
+                <c:pt idx="16">
+                  <c:v>0.99957360304150511</c:v>
+                </c:pt>
+                <c:pt idx="17">
+                  <c:v>0.99166481045246857</c:v>
+                </c:pt>
+                <c:pt idx="18">
+                  <c:v>0.97384763087819515</c:v>
+                </c:pt>
+                <c:pt idx="19">
+                  <c:v>0.94630008768741447</c:v>
+                </c:pt>
+                <c:pt idx="20">
+                  <c:v>0.90929742682568171</c:v>
+                </c:pt>
+                <c:pt idx="21">
+                  <c:v>0.86320936664887371</c:v>
+                </c:pt>
+                <c:pt idx="22">
+                  <c:v>0.80849640381959009</c:v>
+                </c:pt>
+                <c:pt idx="23">
+                  <c:v>0.74570521217672026</c:v>
+                </c:pt>
+                <c:pt idx="24">
+                  <c:v>0.67546318055115095</c:v>
+                </c:pt>
+                <c:pt idx="25">
+                  <c:v>0.59847214410395655</c:v>
+                </c:pt>
+                <c:pt idx="26">
+                  <c:v>0.51550137182146416</c:v>
+                </c:pt>
+                <c:pt idx="27">
+                  <c:v>0.42737988023382978</c:v>
+                </c:pt>
+                <c:pt idx="28">
+                  <c:v>0.33498815015590511</c:v>
+                </c:pt>
+                <c:pt idx="29">
+                  <c:v>0.23924932921398243</c:v>
+                </c:pt>
+                <c:pt idx="30">
+                  <c:v>0.14112000805986721</c:v>
+                </c:pt>
+                <c:pt idx="31">
+                  <c:v>4.1580662433290491E-2</c:v>
+                </c:pt>
+                <c:pt idx="32">
+                  <c:v>5.8374143427580086E-2</c:v>
+                </c:pt>
+                <c:pt idx="33">
+                  <c:v>0.15774569414324821</c:v>
+                </c:pt>
+                <c:pt idx="34">
+                  <c:v>0.25554110202683122</c:v>
+                </c:pt>
+                <c:pt idx="35">
+                  <c:v>0.35078322768961984</c:v>
+                </c:pt>
+                <c:pt idx="36">
+                  <c:v>0.44252044329485246</c:v>
+                </c:pt>
+                <c:pt idx="37">
+                  <c:v>0.5298361409084934</c:v>
+                </c:pt>
+                <c:pt idx="38">
+                  <c:v>0.61185789094271892</c:v>
+                </c:pt>
+                <c:pt idx="39">
+                  <c:v>0.68776615918397377</c:v>
+                </c:pt>
+                <c:pt idx="40">
+                  <c:v>0.7568024953079282</c:v>
+                </c:pt>
+                <c:pt idx="41">
+                  <c:v>0.81827711106441026</c:v>
+                </c:pt>
+                <c:pt idx="42">
+                  <c:v>0.87157577241358819</c:v>
+                </c:pt>
+                <c:pt idx="43">
+                  <c:v>0.9161659367494549</c:v>
+                </c:pt>
+                <c:pt idx="44">
+                  <c:v>0.95160207388951601</c:v>
+                </c:pt>
+                <c:pt idx="45">
+                  <c:v>0.97753011766509701</c:v>
+                </c:pt>
+                <c:pt idx="46">
+                  <c:v>0.99369100363346441</c:v>
+                </c:pt>
+                <c:pt idx="47">
+                  <c:v>0.99992325756410083</c:v>
+                </c:pt>
+                <c:pt idx="48">
+                  <c:v>0.99616460883584068</c:v>
+                </c:pt>
+                <c:pt idx="49">
+                  <c:v>0.98245261262433248</c:v>
+                </c:pt>
+                <c:pt idx="50">
+                  <c:v>0.95892427466313845</c:v>
+                </c:pt>
+                <c:pt idx="51">
+                  <c:v>0.92581468232773245</c:v>
+                </c:pt>
+                <c:pt idx="52">
+                  <c:v>0.88345465572015314</c:v>
+                </c:pt>
+                <c:pt idx="53">
+                  <c:v>0.83226744222390125</c:v>
+                </c:pt>
+                <c:pt idx="54">
+                  <c:v>0.77276448755598715</c:v>
+                </c:pt>
+                <c:pt idx="55">
+                  <c:v>0.70554032557039192</c:v>
+                </c:pt>
+                <c:pt idx="56">
+                  <c:v>0.63126663787232162</c:v>
+                </c:pt>
+                <c:pt idx="57">
+                  <c:v>0.55068554259763758</c:v>
+                </c:pt>
+                <c:pt idx="58">
+                  <c:v>0.46460217941375737</c:v>
+                </c:pt>
+                <c:pt idx="59">
+                  <c:v>0.37387666483023602</c:v>
+                </c:pt>
+                <c:pt idx="60">
+                  <c:v>0.27941549819892586</c:v>
+                </c:pt>
+                <c:pt idx="61">
+                  <c:v>0.18216250427209588</c:v>
+                </c:pt>
+                <c:pt idx="62">
+                  <c:v>8.3089402817496397E-2</c:v>
+                </c:pt>
+                <c:pt idx="63">
+                  <c:v>1.6813900484349713E-2</c:v>
+                </c:pt>
+                <c:pt idx="64">
+                  <c:v>0.11654920485049364</c:v>
+                </c:pt>
+                <c:pt idx="65">
+                  <c:v>0.21511998808781552</c:v>
+                </c:pt>
+                <c:pt idx="66">
+                  <c:v>0.31154136351337786</c:v>
+                </c:pt>
+                <c:pt idx="67">
+                  <c:v>0.4048499206165983</c:v>
+                </c:pt>
+                <c:pt idx="68">
+                  <c:v>0.49411335113860816</c:v>
+                </c:pt>
+                <c:pt idx="69">
+                  <c:v>0.57843976438820011</c:v>
+                </c:pt>
+                <c:pt idx="70">
+                  <c:v>0.65698659871878906</c:v>
+                </c:pt>
+                <c:pt idx="71">
+                  <c:v>0.72896904012587593</c:v>
+                </c:pt>
+                <c:pt idx="72">
+                  <c:v>0.79366786384915311</c:v>
+                </c:pt>
+                <c:pt idx="73">
+                  <c:v>0.8504366206285644</c:v>
+                </c:pt>
+                <c:pt idx="74">
+                  <c:v>0.89870809581162692</c:v>
+                </c:pt>
+                <c:pt idx="75">
+                  <c:v>0.9379999767747389</c:v>
+                </c:pt>
+                <c:pt idx="76">
+                  <c:v>0.96791967203148632</c:v>
+                </c:pt>
+                <c:pt idx="77">
+                  <c:v>0.98816823387700037</c:v>
+                </c:pt>
+                <c:pt idx="78">
+                  <c:v>0.99854334537460498</c:v>
+                </c:pt>
+                <c:pt idx="79">
+                  <c:v>0.99894134183977201</c:v>
+                </c:pt>
+                <c:pt idx="80">
+                  <c:v>0.98935824662338179</c:v>
+                </c:pt>
+                <c:pt idx="81">
+                  <c:v>0.9698898108450863</c:v>
+                </c:pt>
+                <c:pt idx="82">
+                  <c:v>0.94073055667977312</c:v>
+                </c:pt>
+                <c:pt idx="83">
+                  <c:v>0.90217183375629328</c:v>
+                </c:pt>
+                <c:pt idx="84">
+                  <c:v>0.85459890808828043</c:v>
+                </c:pt>
+                <c:pt idx="85">
+                  <c:v>0.79848711262349026</c:v>
+                </c:pt>
+                <c:pt idx="86">
+                  <c:v>0.73439709787411334</c:v>
+                </c:pt>
+                <c:pt idx="87">
+                  <c:v>0.66296923008218334</c:v>
+                </c:pt>
+                <c:pt idx="88">
+                  <c:v>0.58491719289176169</c:v>
+                </c:pt>
+                <c:pt idx="89">
+                  <c:v>0.50102085645788463</c:v>
+                </c:pt>
+                <c:pt idx="90">
+                  <c:v>0.41211848524175659</c:v>
+                </c:pt>
+                <c:pt idx="91">
+                  <c:v>0.31909836234935213</c:v>
+                </c:pt>
+                <c:pt idx="92">
+                  <c:v>0.22288991410024764</c:v>
+                </c:pt>
+                <c:pt idx="93">
+                  <c:v>0.12445442350706171</c:v>
+                </c:pt>
+                <c:pt idx="94">
+                  <c:v>2.4775425453357765E-2</c:v>
+                </c:pt>
+                <c:pt idx="95">
+                  <c:v>7.5151120461809301E-2</c:v>
+                </c:pt>
+                <c:pt idx="96">
+                  <c:v>0.17432678122297965</c:v>
+                </c:pt>
+                <c:pt idx="97">
+                  <c:v>0.27176062641094245</c:v>
+                </c:pt>
+                <c:pt idx="98">
+                  <c:v>0.36647912925192838</c:v>
+                </c:pt>
+                <c:pt idx="99">
+                  <c:v>0.45753589377532133</c:v>
+                </c:pt>
+                <c:pt idx="100">
+                  <c:v>0.54402111088936977</c:v>
+                </c:pt>
+                <c:pt idx="101">
+                  <c:v>0.62507064889288211</c:v>
+                </c:pt>
+                <c:pt idx="102">
+                  <c:v>0.69987468759354232</c:v>
+                </c:pt>
+                <c:pt idx="103">
+                  <c:v>0.76768580976358247</c:v>
+                </c:pt>
+                <c:pt idx="104">
+                  <c:v>0.82782646908565372</c:v>
+                </c:pt>
+                <c:pt idx="105">
+                  <c:v>0.87969575997167004</c:v>
+                </c:pt>
+                <c:pt idx="106">
+                  <c:v>0.92277542161280657</c:v>
+                </c:pt>
+                <c:pt idx="107">
+                  <c:v>0.95663501627018788</c:v>
+                </c:pt>
+                <c:pt idx="108">
+                  <c:v>0.98093623006649155</c:v>
+                </c:pt>
+                <c:pt idx="109">
+                  <c:v>0.99543625330637742</c:v>
+                </c:pt>
+                <c:pt idx="110">
+                  <c:v>0.99999020655070348</c:v>
+                </c:pt>
+                <c:pt idx="111">
+                  <c:v>0.99455258820398917</c:v>
+                </c:pt>
+                <c:pt idx="112">
+                  <c:v>0.9791777291513174</c:v>
+                </c:pt>
+                <c:pt idx="113">
+                  <c:v>0.95401924990208897</c:v>
+                </c:pt>
+                <c:pt idx="114">
+                  <c:v>0.91932852566467571</c:v>
+                </c:pt>
+                <c:pt idx="115">
+                  <c:v>0.87545217468842851</c:v>
+                </c:pt>
+                <c:pt idx="116">
+                  <c:v>0.82282859496870886</c:v>
+                </c:pt>
+                <c:pt idx="117">
+                  <c:v>0.76198358391903331</c:v>
+                </c:pt>
+                <c:pt idx="118">
+                  <c:v>0.69352508477712238</c:v>
+                </c:pt>
+                <c:pt idx="119">
+                  <c:v>0.61813711223703327</c:v>
+                </c:pt>
+                <c:pt idx="120">
+                  <c:v>0.53657291800043494</c:v>
+                </c:pt>
+                <c:pt idx="121">
+                  <c:v>0.44964746453460147</c:v>
+                </c:pt>
+                <c:pt idx="122">
+                  <c:v>0.35822928223682871</c:v>
+                </c:pt>
+                <c:pt idx="123">
+                  <c:v>0.26323179136580094</c:v>
+                </c:pt>
+                <c:pt idx="124">
+                  <c:v>0.16560417544830941</c:v>
+                </c:pt>
+                <c:pt idx="125">
+                  <c:v>6.6321897351200684E-2</c:v>
+                </c:pt>
+                <c:pt idx="126">
+                  <c:v>3.3623047221136695E-2</c:v>
+                </c:pt>
+              </c:numCache>
+            </c:numRef>
+          </c:yVal>
+          <c:smooth val="1"/>
+          <c:extLst>
+            <c:ext xmlns:c16="http://schemas.microsoft.com/office/drawing/2014/chart" uri="{C3380CC4-5D6E-409C-BE32-E72D297353CC}">
+              <c16:uniqueId val="{00000000-D355-4693-90E6-DC285A455959}"/>
+            </c:ext>
+          </c:extLst>
+        </c:ser>
+        <c:ser>
+          <c:idx val="1"/>
+          <c:order val="1"/>
+          <c:tx>
+            <c:strRef>
+              <c:f>Tabelle1!$C$1</c:f>
+              <c:strCache>
+                <c:ptCount val="1"/>
+                <c:pt idx="0">
+                  <c:v>Spalte3</c:v>
+                </c:pt>
+              </c:strCache>
+            </c:strRef>
+          </c:tx>
+          <c:spPr>
+            <a:ln w="19050" cap="rnd">
+              <a:solidFill>
+                <a:srgbClr val="C00000"/>
+              </a:solidFill>
+              <a:prstDash val="solid"/>
+              <a:round/>
+            </a:ln>
+            <a:effectLst/>
+          </c:spPr>
+          <c:marker>
+            <c:symbol val="none"/>
+          </c:marker>
+          <c:xVal>
+            <c:numRef>
+              <c:f>Tabelle1!$A$2:$A$128</c:f>
+              <c:numCache>
+                <c:formatCode>General</c:formatCode>
+                <c:ptCount val="127"/>
+                <c:pt idx="0">
+                  <c:v>0</c:v>
+                </c:pt>
+                <c:pt idx="1">
+                  <c:v>0.1</c:v>
+                </c:pt>
+                <c:pt idx="2">
+                  <c:v>0.2</c:v>
+                </c:pt>
+                <c:pt idx="3">
+                  <c:v>0.3</c:v>
+                </c:pt>
+                <c:pt idx="4">
+                  <c:v>0.4</c:v>
+                </c:pt>
+                <c:pt idx="5">
+                  <c:v>0.5</c:v>
+                </c:pt>
+                <c:pt idx="6">
+                  <c:v>0.6</c:v>
+                </c:pt>
+                <c:pt idx="7">
+                  <c:v>0.7</c:v>
+                </c:pt>
+                <c:pt idx="8">
+                  <c:v>0.8</c:v>
+                </c:pt>
+                <c:pt idx="9">
+                  <c:v>0.9</c:v>
+                </c:pt>
+                <c:pt idx="10">
+                  <c:v>1</c:v>
+                </c:pt>
+                <c:pt idx="11">
+                  <c:v>1.1000000000000001</c:v>
+                </c:pt>
+                <c:pt idx="12">
+                  <c:v>1.2</c:v>
+                </c:pt>
+                <c:pt idx="13">
+                  <c:v>1.3</c:v>
+                </c:pt>
+                <c:pt idx="14">
+                  <c:v>1.4</c:v>
+                </c:pt>
+                <c:pt idx="15">
+                  <c:v>1.5</c:v>
+                </c:pt>
+                <c:pt idx="16">
+                  <c:v>1.6</c:v>
+                </c:pt>
+                <c:pt idx="17">
+                  <c:v>1.7</c:v>
+                </c:pt>
+                <c:pt idx="18">
+                  <c:v>1.8</c:v>
+                </c:pt>
+                <c:pt idx="19">
+                  <c:v>1.9</c:v>
+                </c:pt>
+                <c:pt idx="20">
+                  <c:v>2</c:v>
+                </c:pt>
+                <c:pt idx="21">
+                  <c:v>2.1</c:v>
+                </c:pt>
+                <c:pt idx="22">
+                  <c:v>2.2000000000000002</c:v>
+                </c:pt>
+                <c:pt idx="23">
+                  <c:v>2.2999999999999998</c:v>
+                </c:pt>
+                <c:pt idx="24">
+                  <c:v>2.4</c:v>
+                </c:pt>
+                <c:pt idx="25">
+                  <c:v>2.5</c:v>
+                </c:pt>
+                <c:pt idx="26">
+                  <c:v>2.6</c:v>
+                </c:pt>
+                <c:pt idx="27">
+                  <c:v>2.7</c:v>
+                </c:pt>
+                <c:pt idx="28">
+                  <c:v>2.8</c:v>
+                </c:pt>
+                <c:pt idx="29">
+                  <c:v>2.9</c:v>
+                </c:pt>
+                <c:pt idx="30">
+                  <c:v>3</c:v>
+                </c:pt>
+                <c:pt idx="31">
+                  <c:v>3.1</c:v>
+                </c:pt>
+                <c:pt idx="32">
+                  <c:v>3.2</c:v>
+                </c:pt>
+                <c:pt idx="33">
+                  <c:v>3.3</c:v>
+                </c:pt>
+                <c:pt idx="34">
+                  <c:v>3.4</c:v>
+                </c:pt>
+                <c:pt idx="35">
+                  <c:v>3.5</c:v>
+                </c:pt>
+                <c:pt idx="36">
+                  <c:v>3.6</c:v>
+                </c:pt>
+                <c:pt idx="37">
+                  <c:v>3.7</c:v>
+                </c:pt>
+                <c:pt idx="38">
+                  <c:v>3.8</c:v>
+                </c:pt>
+                <c:pt idx="39">
+                  <c:v>3.9</c:v>
+                </c:pt>
+                <c:pt idx="40">
+                  <c:v>4</c:v>
+                </c:pt>
+                <c:pt idx="41">
+                  <c:v>4.0999999999999996</c:v>
+                </c:pt>
+                <c:pt idx="42">
+                  <c:v>4.2</c:v>
+                </c:pt>
+                <c:pt idx="43">
+                  <c:v>4.3</c:v>
+                </c:pt>
+                <c:pt idx="44">
+                  <c:v>4.4000000000000004</c:v>
+                </c:pt>
+                <c:pt idx="45">
+                  <c:v>4.5</c:v>
+                </c:pt>
+                <c:pt idx="46">
+                  <c:v>4.5999999999999996</c:v>
+                </c:pt>
+                <c:pt idx="47">
+                  <c:v>4.7</c:v>
+                </c:pt>
+                <c:pt idx="48">
+                  <c:v>4.8</c:v>
+                </c:pt>
+                <c:pt idx="49">
+                  <c:v>4.9000000000000004</c:v>
+                </c:pt>
+                <c:pt idx="50">
+                  <c:v>5</c:v>
+                </c:pt>
+                <c:pt idx="51">
+                  <c:v>5.0999999999999996</c:v>
+                </c:pt>
+                <c:pt idx="52">
+                  <c:v>5.2</c:v>
+                </c:pt>
+                <c:pt idx="53">
+                  <c:v>5.3</c:v>
+                </c:pt>
+                <c:pt idx="54">
+                  <c:v>5.4</c:v>
+                </c:pt>
+                <c:pt idx="55">
+                  <c:v>5.5</c:v>
+                </c:pt>
+                <c:pt idx="56">
+                  <c:v>5.6</c:v>
+                </c:pt>
+                <c:pt idx="57">
+                  <c:v>5.7</c:v>
+                </c:pt>
+                <c:pt idx="58">
+                  <c:v>5.8</c:v>
+                </c:pt>
+                <c:pt idx="59">
+                  <c:v>5.9</c:v>
+                </c:pt>
+                <c:pt idx="60">
+                  <c:v>6</c:v>
+                </c:pt>
+                <c:pt idx="61">
+                  <c:v>6.1</c:v>
+                </c:pt>
+                <c:pt idx="62">
+                  <c:v>6.2</c:v>
+                </c:pt>
+                <c:pt idx="63">
+                  <c:v>6.3</c:v>
+                </c:pt>
+                <c:pt idx="64">
+                  <c:v>6.4</c:v>
+                </c:pt>
+                <c:pt idx="65">
+                  <c:v>6.5</c:v>
+                </c:pt>
+                <c:pt idx="66">
+                  <c:v>6.6</c:v>
+                </c:pt>
+                <c:pt idx="67">
+                  <c:v>6.7</c:v>
+                </c:pt>
+                <c:pt idx="68">
+                  <c:v>6.8</c:v>
+                </c:pt>
+                <c:pt idx="69">
+                  <c:v>6.9</c:v>
+                </c:pt>
+                <c:pt idx="70">
+                  <c:v>7</c:v>
+                </c:pt>
+                <c:pt idx="71">
+                  <c:v>7.1</c:v>
+                </c:pt>
+                <c:pt idx="72">
+                  <c:v>7.2</c:v>
+                </c:pt>
+                <c:pt idx="73">
+                  <c:v>7.3</c:v>
+                </c:pt>
+                <c:pt idx="74">
+                  <c:v>7.4</c:v>
+                </c:pt>
+                <c:pt idx="75">
+                  <c:v>7.5</c:v>
+                </c:pt>
+                <c:pt idx="76">
+                  <c:v>7.6</c:v>
+                </c:pt>
+                <c:pt idx="77">
+                  <c:v>7.7</c:v>
+                </c:pt>
+                <c:pt idx="78">
+                  <c:v>7.8</c:v>
+                </c:pt>
+                <c:pt idx="79">
+                  <c:v>7.9</c:v>
+                </c:pt>
+                <c:pt idx="80">
+                  <c:v>8</c:v>
+                </c:pt>
+                <c:pt idx="81">
+                  <c:v>8.1</c:v>
+                </c:pt>
+                <c:pt idx="82">
+                  <c:v>8.1999999999999993</c:v>
+                </c:pt>
+                <c:pt idx="83">
+                  <c:v>8.3000000000000007</c:v>
+                </c:pt>
+                <c:pt idx="84">
+                  <c:v>8.4</c:v>
+                </c:pt>
+                <c:pt idx="85">
+                  <c:v>8.5</c:v>
+                </c:pt>
+                <c:pt idx="86">
+                  <c:v>8.6</c:v>
+                </c:pt>
+                <c:pt idx="87">
+                  <c:v>8.6999999999999993</c:v>
+                </c:pt>
+                <c:pt idx="88">
+                  <c:v>8.8000000000000007</c:v>
+                </c:pt>
+                <c:pt idx="89">
+                  <c:v>8.9</c:v>
+                </c:pt>
+                <c:pt idx="90">
+                  <c:v>9</c:v>
+                </c:pt>
+                <c:pt idx="91">
+                  <c:v>9.1</c:v>
+                </c:pt>
+                <c:pt idx="92">
+                  <c:v>9.1999999999999993</c:v>
+                </c:pt>
+                <c:pt idx="93">
+                  <c:v>9.3000000000000007</c:v>
+                </c:pt>
+                <c:pt idx="94">
+                  <c:v>9.4</c:v>
+                </c:pt>
+                <c:pt idx="95">
+                  <c:v>9.5</c:v>
+                </c:pt>
+                <c:pt idx="96">
+                  <c:v>9.6</c:v>
+                </c:pt>
+                <c:pt idx="97">
+                  <c:v>9.6999999999999993</c:v>
+                </c:pt>
+                <c:pt idx="98">
+                  <c:v>9.8000000000000007</c:v>
+                </c:pt>
+                <c:pt idx="99">
+                  <c:v>9.9</c:v>
+                </c:pt>
+                <c:pt idx="100">
+                  <c:v>10</c:v>
+                </c:pt>
+                <c:pt idx="101">
+                  <c:v>10.1</c:v>
+                </c:pt>
+                <c:pt idx="102">
+                  <c:v>10.199999999999999</c:v>
+                </c:pt>
+                <c:pt idx="103">
+                  <c:v>10.3</c:v>
+                </c:pt>
+                <c:pt idx="104">
+                  <c:v>10.4</c:v>
+                </c:pt>
+                <c:pt idx="105">
+                  <c:v>10.5</c:v>
+                </c:pt>
+                <c:pt idx="106">
+                  <c:v>10.6</c:v>
+                </c:pt>
+                <c:pt idx="107">
+                  <c:v>10.7</c:v>
+                </c:pt>
+                <c:pt idx="108">
+                  <c:v>10.8</c:v>
+                </c:pt>
+                <c:pt idx="109">
+                  <c:v>10.9</c:v>
+                </c:pt>
+                <c:pt idx="110">
+                  <c:v>11</c:v>
+                </c:pt>
+                <c:pt idx="111">
+                  <c:v>11.1</c:v>
+                </c:pt>
+                <c:pt idx="112">
+                  <c:v>11.2</c:v>
+                </c:pt>
+                <c:pt idx="113">
+                  <c:v>11.3</c:v>
+                </c:pt>
+                <c:pt idx="114">
+                  <c:v>11.4</c:v>
+                </c:pt>
+                <c:pt idx="115">
+                  <c:v>11.5</c:v>
+                </c:pt>
+                <c:pt idx="116">
+                  <c:v>11.6</c:v>
+                </c:pt>
+                <c:pt idx="117">
+                  <c:v>11.7</c:v>
+                </c:pt>
+                <c:pt idx="118">
+                  <c:v>11.8</c:v>
+                </c:pt>
+                <c:pt idx="119">
+                  <c:v>11.9</c:v>
+                </c:pt>
+                <c:pt idx="120">
+                  <c:v>12</c:v>
+                </c:pt>
+                <c:pt idx="121">
+                  <c:v>12.1</c:v>
+                </c:pt>
+                <c:pt idx="122">
+                  <c:v>12.2</c:v>
+                </c:pt>
+                <c:pt idx="123">
+                  <c:v>12.3</c:v>
+                </c:pt>
+                <c:pt idx="124">
+                  <c:v>12.4</c:v>
+                </c:pt>
+                <c:pt idx="125">
+                  <c:v>12.5</c:v>
+                </c:pt>
+                <c:pt idx="126">
+                  <c:v>12.6</c:v>
+                </c:pt>
+              </c:numCache>
+            </c:numRef>
+          </c:xVal>
+          <c:yVal>
+            <c:numRef>
+              <c:f>Tabelle1!$C$2:$C$128</c:f>
+              <c:numCache>
+                <c:formatCode>General</c:formatCode>
+                <c:ptCount val="127"/>
+                <c:pt idx="0">
+                  <c:v>0</c:v>
+                </c:pt>
+                <c:pt idx="1">
+                  <c:v>9.9833416646828155E-2</c:v>
+                </c:pt>
+                <c:pt idx="2">
+                  <c:v>0.19866933079506122</c:v>
+                </c:pt>
+                <c:pt idx="3">
+                  <c:v>0.29552020666133955</c:v>
+                </c:pt>
+                <c:pt idx="4">
+                  <c:v>0.38941834230865052</c:v>
+                </c:pt>
+                <c:pt idx="5">
+                  <c:v>0.47942553860420301</c:v>
+                </c:pt>
+                <c:pt idx="6">
+                  <c:v>0.56464247339503537</c:v>
+                </c:pt>
+                <c:pt idx="7">
+                  <c:v>0.64421768723769102</c:v>
+                </c:pt>
+                <c:pt idx="8">
+                  <c:v>0.71735609089952279</c:v>
+                </c:pt>
+                <c:pt idx="9">
+                  <c:v>0.78332690962748341</c:v>
+                </c:pt>
+                <c:pt idx="10">
+                  <c:v>0.8414709848078965</c:v>
+                </c:pt>
+                <c:pt idx="11">
+                  <c:v>0.89120736006143542</c:v>
+                </c:pt>
+                <c:pt idx="12">
+                  <c:v>0.93203908596722629</c:v>
+                </c:pt>
+                <c:pt idx="13">
+                  <c:v>0.96355818541719296</c:v>
+                </c:pt>
+                <c:pt idx="14">
+                  <c:v>0.98544972998846014</c:v>
+                </c:pt>
+                <c:pt idx="15">
+                  <c:v>0.99749498660405445</c:v>
+                </c:pt>
+                <c:pt idx="16">
+                  <c:v>0.99957360304150511</c:v>
+                </c:pt>
+                <c:pt idx="17">
+                  <c:v>0.99657360304150511</c:v>
+                </c:pt>
+                <c:pt idx="18">
+                  <c:v>0.9935736030415051</c:v>
+                </c:pt>
+                <c:pt idx="19">
+                  <c:v>0.9905736030415051</c:v>
+                </c:pt>
+                <c:pt idx="20">
+                  <c:v>0.9875736030415051</c:v>
+                </c:pt>
+                <c:pt idx="21">
+                  <c:v>0.9845736030415051</c:v>
+                </c:pt>
+                <c:pt idx="22">
+                  <c:v>0.98157360304150509</c:v>
+                </c:pt>
+                <c:pt idx="23">
+                  <c:v>0.97857360304150509</c:v>
+                </c:pt>
+                <c:pt idx="24">
+                  <c:v>0.97557360304150509</c:v>
+                </c:pt>
+                <c:pt idx="25">
+                  <c:v>0.97257360304150509</c:v>
+                </c:pt>
+                <c:pt idx="26">
+                  <c:v>0.96957360304150508</c:v>
+                </c:pt>
+                <c:pt idx="27">
+                  <c:v>0.96657360304150508</c:v>
+                </c:pt>
+                <c:pt idx="28">
+                  <c:v>0.96357360304150508</c:v>
+                </c:pt>
+                <c:pt idx="29">
+                  <c:v>0.96057360304150508</c:v>
+                </c:pt>
+                <c:pt idx="30">
+                  <c:v>0.95757360304150507</c:v>
+                </c:pt>
+                <c:pt idx="31">
+                  <c:v>0.95457360304150507</c:v>
+                </c:pt>
+                <c:pt idx="32">
+                  <c:v>0.95157360304150507</c:v>
+                </c:pt>
+                <c:pt idx="33">
+                  <c:v>0.94857360304150506</c:v>
+                </c:pt>
+                <c:pt idx="34">
+                  <c:v>0.94557360304150506</c:v>
+                </c:pt>
+                <c:pt idx="35">
+                  <c:v>0.94257360304150506</c:v>
+                </c:pt>
+                <c:pt idx="36">
+                  <c:v>0.93957360304150506</c:v>
+                </c:pt>
+                <c:pt idx="37">
+                  <c:v>0.93657360304150505</c:v>
+                </c:pt>
+                <c:pt idx="38">
+                  <c:v>0.93357360304150505</c:v>
+                </c:pt>
+                <c:pt idx="39">
+                  <c:v>0.93057360304150505</c:v>
+                </c:pt>
+                <c:pt idx="40">
+                  <c:v>0.92757360304150505</c:v>
+                </c:pt>
+                <c:pt idx="41">
+                  <c:v>0.92457360304150504</c:v>
+                </c:pt>
+                <c:pt idx="42">
+                  <c:v>0.92157360304150504</c:v>
+                </c:pt>
+                <c:pt idx="43">
+                  <c:v>0.91857360304150504</c:v>
+                </c:pt>
+                <c:pt idx="44">
+                  <c:v>0.95160207388951601</c:v>
+                </c:pt>
+                <c:pt idx="45">
+                  <c:v>0.97753011766509701</c:v>
+                </c:pt>
+                <c:pt idx="46">
+                  <c:v>0.99369100363346441</c:v>
+                </c:pt>
+                <c:pt idx="47">
+                  <c:v>0.99992325756410083</c:v>
+                </c:pt>
+                <c:pt idx="48">
+                  <c:v>0.99692325756410083</c:v>
+                </c:pt>
+                <c:pt idx="49">
+                  <c:v>0.99392325756410083</c:v>
+                </c:pt>
+                <c:pt idx="50">
+                  <c:v>0.99092325756410082</c:v>
+                </c:pt>
+                <c:pt idx="51">
+                  <c:v>0.98792325756410082</c:v>
+                </c:pt>
+                <c:pt idx="52">
+                  <c:v>0.98492325756410082</c:v>
+                </c:pt>
+                <c:pt idx="53">
+                  <c:v>0.98192325756410082</c:v>
+                </c:pt>
+                <c:pt idx="54">
+                  <c:v>0.97892325756410081</c:v>
+                </c:pt>
+                <c:pt idx="55">
+                  <c:v>0.97592325756410081</c:v>
+                </c:pt>
+                <c:pt idx="56">
+                  <c:v>0.97292325756410081</c:v>
+                </c:pt>
+                <c:pt idx="57">
+                  <c:v>0.9699232575641008</c:v>
+                </c:pt>
+                <c:pt idx="58">
+                  <c:v>0.9669232575641008</c:v>
+                </c:pt>
+                <c:pt idx="59">
+                  <c:v>0.9639232575641008</c:v>
+                </c:pt>
+                <c:pt idx="60">
+                  <c:v>0.9609232575641008</c:v>
+                </c:pt>
+                <c:pt idx="61">
+                  <c:v>0.95792325756410079</c:v>
+                </c:pt>
+                <c:pt idx="62">
+                  <c:v>0.95492325756410079</c:v>
+                </c:pt>
+                <c:pt idx="63">
+                  <c:v>0.95192325756410079</c:v>
+                </c:pt>
+                <c:pt idx="64">
+                  <c:v>0.94892325756410079</c:v>
+                </c:pt>
+                <c:pt idx="65">
+                  <c:v>0.94592325756410078</c:v>
+                </c:pt>
+                <c:pt idx="66">
+                  <c:v>0.94292325756410078</c:v>
+                </c:pt>
+                <c:pt idx="67">
+                  <c:v>0.93992325756410078</c:v>
+                </c:pt>
+                <c:pt idx="68">
+                  <c:v>0.93692325756410078</c:v>
+                </c:pt>
+                <c:pt idx="69">
+                  <c:v>0.93392325756410077</c:v>
+                </c:pt>
+                <c:pt idx="70">
+                  <c:v>0.93092325756410077</c:v>
+                </c:pt>
+                <c:pt idx="71">
+                  <c:v>0.92792325756410077</c:v>
+                </c:pt>
+                <c:pt idx="72">
+                  <c:v>0.92492325756410076</c:v>
+                </c:pt>
+                <c:pt idx="73">
+                  <c:v>0.92192325756410076</c:v>
+                </c:pt>
+                <c:pt idx="74">
+                  <c:v>0.91892325756410076</c:v>
+                </c:pt>
+                <c:pt idx="75">
+                  <c:v>0.9379999767747389</c:v>
+                </c:pt>
+                <c:pt idx="76">
+                  <c:v>0.96791967203148632</c:v>
+                </c:pt>
+                <c:pt idx="77">
+                  <c:v>0.98816823387700037</c:v>
+                </c:pt>
+                <c:pt idx="78">
+                  <c:v>0.99854334537460498</c:v>
+                </c:pt>
+                <c:pt idx="79">
+                  <c:v>0.99894134183977201</c:v>
+                </c:pt>
+                <c:pt idx="80">
+                  <c:v>0.99594134183977201</c:v>
+                </c:pt>
+                <c:pt idx="81">
+                  <c:v>0.99294134183977201</c:v>
+                </c:pt>
+                <c:pt idx="82">
+                  <c:v>0.989941341839772</c:v>
+                </c:pt>
+                <c:pt idx="83">
+                  <c:v>0.986941341839772</c:v>
+                </c:pt>
+                <c:pt idx="84">
+                  <c:v>0.983941341839772</c:v>
+                </c:pt>
+                <c:pt idx="85">
+                  <c:v>0.980941341839772</c:v>
+                </c:pt>
+                <c:pt idx="86">
+                  <c:v>0.97794134183977199</c:v>
+                </c:pt>
+                <c:pt idx="87">
+                  <c:v>0.97494134183977199</c:v>
+                </c:pt>
+                <c:pt idx="88">
+                  <c:v>0.97194134183977199</c:v>
+                </c:pt>
+                <c:pt idx="89">
+                  <c:v>0.96894134183977199</c:v>
+                </c:pt>
+                <c:pt idx="90">
+                  <c:v>0.96594134183977198</c:v>
+                </c:pt>
+                <c:pt idx="91">
+                  <c:v>0.96294134183977198</c:v>
+                </c:pt>
+                <c:pt idx="92">
+                  <c:v>0.95994134183977198</c:v>
+                </c:pt>
+                <c:pt idx="93">
+                  <c:v>0.95694134183977198</c:v>
+                </c:pt>
+                <c:pt idx="94">
+                  <c:v>0.95394134183977197</c:v>
+                </c:pt>
+                <c:pt idx="95">
+                  <c:v>0.95094134183977197</c:v>
+                </c:pt>
+                <c:pt idx="96">
+                  <c:v>0.94794134183977197</c:v>
+                </c:pt>
+                <c:pt idx="97">
+                  <c:v>0.94494134183977196</c:v>
+                </c:pt>
+                <c:pt idx="98">
+                  <c:v>0.94194134183977196</c:v>
+                </c:pt>
+                <c:pt idx="99">
+                  <c:v>0.93894134183977196</c:v>
+                </c:pt>
+                <c:pt idx="100">
+                  <c:v>0.93594134183977196</c:v>
+                </c:pt>
+                <c:pt idx="101">
+                  <c:v>0.93294134183977195</c:v>
+                </c:pt>
+                <c:pt idx="102">
+                  <c:v>0.92994134183977195</c:v>
+                </c:pt>
+                <c:pt idx="103">
+                  <c:v>0.92694134183977195</c:v>
+                </c:pt>
+                <c:pt idx="104">
+                  <c:v>0.92394134183977195</c:v>
+                </c:pt>
+                <c:pt idx="105">
+                  <c:v>0.92094134183977194</c:v>
+                </c:pt>
+                <c:pt idx="106">
+                  <c:v>0.92277542161280657</c:v>
+                </c:pt>
+                <c:pt idx="107">
+                  <c:v>0.95663501627018788</c:v>
+                </c:pt>
+                <c:pt idx="108">
+                  <c:v>0.98093623006649155</c:v>
+                </c:pt>
+                <c:pt idx="109">
+                  <c:v>0.99543625330637742</c:v>
+                </c:pt>
+                <c:pt idx="110">
+                  <c:v>0.99999020655070348</c:v>
+                </c:pt>
+                <c:pt idx="111">
+                  <c:v>0.99699020655070347</c:v>
+                </c:pt>
+                <c:pt idx="112">
+                  <c:v>0.99399020655070347</c:v>
+                </c:pt>
+                <c:pt idx="113">
+                  <c:v>0.99099020655070347</c:v>
+                </c:pt>
+                <c:pt idx="114">
+                  <c:v>0.98799020655070346</c:v>
+                </c:pt>
+                <c:pt idx="115">
+                  <c:v>0.98499020655070346</c:v>
+                </c:pt>
+                <c:pt idx="116">
+                  <c:v>0.98199020655070346</c:v>
+                </c:pt>
+                <c:pt idx="117">
+                  <c:v>0.97899020655070346</c:v>
+                </c:pt>
+                <c:pt idx="118">
+                  <c:v>0.97599020655070345</c:v>
+                </c:pt>
+                <c:pt idx="119">
+                  <c:v>0.97299020655070345</c:v>
+                </c:pt>
+                <c:pt idx="120">
+                  <c:v>0.96999020655070345</c:v>
+                </c:pt>
+                <c:pt idx="121">
+                  <c:v>0.96699020655070345</c:v>
+                </c:pt>
+                <c:pt idx="122">
+                  <c:v>0.96399020655070344</c:v>
+                </c:pt>
+                <c:pt idx="123">
+                  <c:v>0.96099020655070344</c:v>
+                </c:pt>
+                <c:pt idx="124">
+                  <c:v>0.95799020655070344</c:v>
+                </c:pt>
+                <c:pt idx="125">
+                  <c:v>0.95499020655070344</c:v>
+                </c:pt>
+                <c:pt idx="126">
+                  <c:v>0.95199020655070343</c:v>
+                </c:pt>
+              </c:numCache>
+            </c:numRef>
+          </c:yVal>
+          <c:smooth val="1"/>
+          <c:extLst>
+            <c:ext xmlns:c16="http://schemas.microsoft.com/office/drawing/2014/chart" uri="{C3380CC4-5D6E-409C-BE32-E72D297353CC}">
+              <c16:uniqueId val="{00000002-D355-4693-90E6-DC285A455959}"/>
+            </c:ext>
+          </c:extLst>
+        </c:ser>
+        <c:dLbls>
+          <c:showLegendKey val="0"/>
+          <c:showVal val="0"/>
+          <c:showCatName val="0"/>
+          <c:showSerName val="0"/>
+          <c:showPercent val="0"/>
+          <c:showBubbleSize val="0"/>
+        </c:dLbls>
+        <c:axId val="1043976720"/>
+        <c:axId val="1043978160"/>
+      </c:scatterChart>
+      <c:valAx>
+        <c:axId val="1043976720"/>
+        <c:scaling>
+          <c:orientation val="minMax"/>
+          <c:max val="12.5"/>
+        </c:scaling>
+        <c:delete val="1"/>
+        <c:axPos val="b"/>
+        <c:numFmt formatCode="General" sourceLinked="1"/>
+        <c:majorTickMark val="out"/>
+        <c:minorTickMark val="none"/>
+        <c:tickLblPos val="nextTo"/>
+        <c:crossAx val="1043978160"/>
+        <c:crosses val="autoZero"/>
+        <c:crossBetween val="midCat"/>
+      </c:valAx>
+      <c:valAx>
+        <c:axId val="1043978160"/>
+        <c:scaling>
+          <c:orientation val="minMax"/>
+        </c:scaling>
+        <c:delete val="1"/>
+        <c:axPos val="l"/>
+        <c:numFmt formatCode="General" sourceLinked="1"/>
+        <c:majorTickMark val="out"/>
+        <c:minorTickMark val="none"/>
+        <c:tickLblPos val="nextTo"/>
+        <c:crossAx val="1043976720"/>
+        <c:crosses val="autoZero"/>
+        <c:crossBetween val="midCat"/>
+      </c:valAx>
+      <c:spPr>
+        <a:noFill/>
+        <a:ln>
+          <a:noFill/>
+        </a:ln>
+        <a:effectLst/>
+      </c:spPr>
+    </c:plotArea>
+    <c:plotVisOnly val="1"/>
+    <c:dispBlanksAs val="gap"/>
+    <c:extLst>
+      <c:ext xmlns:c16r3="http://schemas.microsoft.com/office/drawing/2017/03/chart" uri="{56B9EC1D-385E-4148-901F-78D8002777C0}">
+        <c16r3:dataDisplayOptions16>
+          <c16r3:dispNaAsBlank val="1"/>
+        </c16r3:dataDisplayOptions16>
+      </c:ext>
+    </c:extLst>
+    <c:showDLblsOverMax val="0"/>
+  </c:chart>
+  <c:spPr>
+    <a:noFill/>
+    <a:ln>
+      <a:noFill/>
+      <a:prstDash val="solid"/>
+    </a:ln>
+    <a:effectLst/>
+  </c:spPr>
+  <c:txPr>
+    <a:bodyPr/>
+    <a:lstStyle/>
+    <a:p>
+      <a:pPr>
+        <a:defRPr/>
+      </a:pPr>
+      <a:endParaRPr lang="de-DE"/>
+    </a:p>
+  </c:txPr>
+  <c:externalData r:id="rId3">
+    <c:autoUpdate val="0"/>
+  </c:externalData>
+</c:chartSpace>
+</file>
+
+<file path=ppt/charts/chart4.xml><?xml version="1.0" encoding="utf-8"?>
+<c:chartSpace xmlns:c="http://schemas.openxmlformats.org/drawingml/2006/chart" xmlns:a="http://schemas.openxmlformats.org/drawingml/2006/main" xmlns:r="http://schemas.openxmlformats.org/officeDocument/2006/relationships" xmlns:c16r2="http://schemas.microsoft.com/office/drawing/2015/06/chart">
+  <c:date1904 val="0"/>
+  <c:lang val="de-DE"/>
+  <c:roundedCorners val="0"/>
+  <mc:AlternateContent xmlns:mc="http://schemas.openxmlformats.org/markup-compatibility/2006">
+    <mc:Choice xmlns:c14="http://schemas.microsoft.com/office/drawing/2007/8/2/chart" Requires="c14">
+      <c14:style val="102"/>
+    </mc:Choice>
+    <mc:Fallback>
+      <c:style val="2"/>
+    </mc:Fallback>
+  </mc:AlternateContent>
+  <c:chart>
+    <c:autoTitleDeleted val="1"/>
+    <c:plotArea>
+      <c:layout>
+        <c:manualLayout>
+          <c:layoutTarget val="inner"/>
+          <c:xMode val="edge"/>
+          <c:yMode val="edge"/>
+          <c:x val="6.1589331701869754E-2"/>
+          <c:y val="7.6552049772247527E-2"/>
+          <c:w val="0.93841072332351083"/>
+          <c:h val="0.9174441610506634"/>
+        </c:manualLayout>
+      </c:layout>
+      <c:scatterChart>
+        <c:scatterStyle val="smoothMarker"/>
+        <c:varyColors val="0"/>
+        <c:ser>
+          <c:idx val="0"/>
+          <c:order val="0"/>
+          <c:tx>
+            <c:strRef>
+              <c:f>Tabelle1!$B$1</c:f>
+              <c:strCache>
+                <c:ptCount val="1"/>
+                <c:pt idx="0">
+                  <c:v>Spalte2</c:v>
+                </c:pt>
+              </c:strCache>
+            </c:strRef>
+          </c:tx>
+          <c:spPr>
+            <a:ln w="19050" cap="rnd">
+              <a:solidFill>
+                <a:schemeClr val="accent1"/>
+              </a:solidFill>
+              <a:round/>
+            </a:ln>
+            <a:effectLst/>
+          </c:spPr>
+          <c:marker>
+            <c:symbol val="none"/>
+          </c:marker>
+          <c:xVal>
+            <c:numRef>
+              <c:f>Tabelle1!$A$2:$A$65</c:f>
+              <c:numCache>
+                <c:formatCode>General</c:formatCode>
+                <c:ptCount val="64"/>
+                <c:pt idx="0">
+                  <c:v>0</c:v>
+                </c:pt>
+                <c:pt idx="1">
+                  <c:v>0.2</c:v>
+                </c:pt>
+                <c:pt idx="2">
+                  <c:v>0.4</c:v>
+                </c:pt>
+                <c:pt idx="3">
+                  <c:v>0.6</c:v>
+                </c:pt>
+                <c:pt idx="4">
+                  <c:v>0.8</c:v>
+                </c:pt>
+                <c:pt idx="5">
+                  <c:v>1</c:v>
+                </c:pt>
+                <c:pt idx="6">
+                  <c:v>1.2</c:v>
+                </c:pt>
+                <c:pt idx="7">
+                  <c:v>1.4</c:v>
+                </c:pt>
+                <c:pt idx="8">
+                  <c:v>1.6</c:v>
+                </c:pt>
+                <c:pt idx="9">
+                  <c:v>1.8</c:v>
+                </c:pt>
+                <c:pt idx="10">
+                  <c:v>2</c:v>
+                </c:pt>
+                <c:pt idx="11">
+                  <c:v>2.2000000000000002</c:v>
+                </c:pt>
+                <c:pt idx="12">
+                  <c:v>2.4</c:v>
+                </c:pt>
+                <c:pt idx="13">
+                  <c:v>2.6</c:v>
+                </c:pt>
+                <c:pt idx="14">
+                  <c:v>2.8</c:v>
+                </c:pt>
+                <c:pt idx="15">
+                  <c:v>3</c:v>
+                </c:pt>
+                <c:pt idx="16">
+                  <c:v>3.2</c:v>
+                </c:pt>
+                <c:pt idx="17">
+                  <c:v>3.4</c:v>
+                </c:pt>
+                <c:pt idx="18">
+                  <c:v>3.6</c:v>
+                </c:pt>
+                <c:pt idx="19">
+                  <c:v>3.8</c:v>
+                </c:pt>
+                <c:pt idx="20">
+                  <c:v>4</c:v>
+                </c:pt>
+                <c:pt idx="21">
+                  <c:v>4.2</c:v>
+                </c:pt>
+                <c:pt idx="22">
+                  <c:v>4.4000000000000004</c:v>
+                </c:pt>
+                <c:pt idx="23">
+                  <c:v>4.5999999999999996</c:v>
+                </c:pt>
+                <c:pt idx="24">
+                  <c:v>4.8</c:v>
+                </c:pt>
+                <c:pt idx="25">
+                  <c:v>5</c:v>
+                </c:pt>
+                <c:pt idx="26">
+                  <c:v>5.2</c:v>
+                </c:pt>
+                <c:pt idx="27">
+                  <c:v>5.4</c:v>
+                </c:pt>
+                <c:pt idx="28">
+                  <c:v>5.6</c:v>
+                </c:pt>
+                <c:pt idx="29">
+                  <c:v>5.8</c:v>
+                </c:pt>
+                <c:pt idx="30">
+                  <c:v>6</c:v>
+                </c:pt>
+                <c:pt idx="31">
+                  <c:v>6.2</c:v>
+                </c:pt>
+                <c:pt idx="32">
+                  <c:v>6.4</c:v>
+                </c:pt>
+                <c:pt idx="33">
+                  <c:v>6.6</c:v>
+                </c:pt>
+                <c:pt idx="34">
+                  <c:v>6.8</c:v>
+                </c:pt>
+                <c:pt idx="35">
+                  <c:v>7</c:v>
+                </c:pt>
+                <c:pt idx="36">
+                  <c:v>7.2</c:v>
+                </c:pt>
+                <c:pt idx="37">
+                  <c:v>7.4</c:v>
+                </c:pt>
+                <c:pt idx="38">
+                  <c:v>7.6</c:v>
+                </c:pt>
+                <c:pt idx="39">
+                  <c:v>7.8</c:v>
+                </c:pt>
+                <c:pt idx="40">
+                  <c:v>8</c:v>
+                </c:pt>
+                <c:pt idx="41">
+                  <c:v>8.1999999999999993</c:v>
+                </c:pt>
+                <c:pt idx="42">
+                  <c:v>8.4</c:v>
+                </c:pt>
+                <c:pt idx="43">
+                  <c:v>8.6</c:v>
+                </c:pt>
+                <c:pt idx="44">
+                  <c:v>8.8000000000000007</c:v>
+                </c:pt>
+                <c:pt idx="45">
+                  <c:v>9</c:v>
+                </c:pt>
+                <c:pt idx="46">
+                  <c:v>9.1999999999999993</c:v>
+                </c:pt>
+                <c:pt idx="47">
+                  <c:v>9.4</c:v>
+                </c:pt>
+                <c:pt idx="48">
+                  <c:v>9.6</c:v>
+                </c:pt>
+                <c:pt idx="49">
+                  <c:v>9.8000000000000007</c:v>
+                </c:pt>
+                <c:pt idx="50">
+                  <c:v>10</c:v>
+                </c:pt>
+                <c:pt idx="51">
+                  <c:v>10.199999999999999</c:v>
+                </c:pt>
+                <c:pt idx="52">
+                  <c:v>10.4</c:v>
+                </c:pt>
+                <c:pt idx="53">
+                  <c:v>10.6</c:v>
+                </c:pt>
+                <c:pt idx="54">
+                  <c:v>10.8</c:v>
+                </c:pt>
+                <c:pt idx="55">
+                  <c:v>11</c:v>
+                </c:pt>
+                <c:pt idx="56">
+                  <c:v>11.2</c:v>
+                </c:pt>
+                <c:pt idx="57">
+                  <c:v>11.4</c:v>
+                </c:pt>
+                <c:pt idx="58">
+                  <c:v>11.6</c:v>
+                </c:pt>
+                <c:pt idx="59">
+                  <c:v>11.8</c:v>
+                </c:pt>
+                <c:pt idx="60">
+                  <c:v>12</c:v>
+                </c:pt>
+                <c:pt idx="61">
+                  <c:v>12.2</c:v>
+                </c:pt>
+                <c:pt idx="62">
+                  <c:v>12.4</c:v>
+                </c:pt>
+                <c:pt idx="63">
+                  <c:v>12.6</c:v>
+                </c:pt>
+              </c:numCache>
+            </c:numRef>
+          </c:xVal>
+          <c:yVal>
+            <c:numRef>
+              <c:f>Tabelle1!$B$2:$B$65</c:f>
+              <c:numCache>
+                <c:formatCode>General</c:formatCode>
+                <c:ptCount val="64"/>
+                <c:pt idx="0">
+                  <c:v>0</c:v>
+                </c:pt>
+                <c:pt idx="1">
+                  <c:v>0.19866933079506122</c:v>
+                </c:pt>
+                <c:pt idx="2">
+                  <c:v>0.38941834230865052</c:v>
+                </c:pt>
+                <c:pt idx="3">
+                  <c:v>0.56464247339503537</c:v>
+                </c:pt>
+                <c:pt idx="4">
+                  <c:v>0.71735609089952279</c:v>
+                </c:pt>
+                <c:pt idx="5">
+                  <c:v>0.8414709848078965</c:v>
+                </c:pt>
+                <c:pt idx="6">
+                  <c:v>0.93203908596722629</c:v>
+                </c:pt>
+                <c:pt idx="7">
+                  <c:v>0.98544972998846014</c:v>
+                </c:pt>
+                <c:pt idx="8">
+                  <c:v>0.99957360304150511</c:v>
+                </c:pt>
+                <c:pt idx="9">
+                  <c:v>0.97384763087819515</c:v>
+                </c:pt>
+                <c:pt idx="10">
+                  <c:v>0.90929742682568171</c:v>
+                </c:pt>
+                <c:pt idx="11">
+                  <c:v>0.80849640381959009</c:v>
+                </c:pt>
+                <c:pt idx="12">
+                  <c:v>0.67546318055115095</c:v>
+                </c:pt>
+                <c:pt idx="13">
+                  <c:v>0.51550137182146416</c:v>
+                </c:pt>
+                <c:pt idx="14">
+                  <c:v>0.33498815015590511</c:v>
+                </c:pt>
+                <c:pt idx="15">
+                  <c:v>0.14112000805986721</c:v>
+                </c:pt>
+                <c:pt idx="16">
+                  <c:v>-5.8374143427580086E-2</c:v>
+                </c:pt>
+                <c:pt idx="17">
+                  <c:v>-0.25554110202683122</c:v>
+                </c:pt>
+                <c:pt idx="18">
+                  <c:v>-0.44252044329485246</c:v>
+                </c:pt>
+                <c:pt idx="19">
+                  <c:v>-0.61185789094271892</c:v>
+                </c:pt>
+                <c:pt idx="20">
+                  <c:v>-0.7568024953079282</c:v>
+                </c:pt>
+                <c:pt idx="21">
+                  <c:v>-0.87157577241358819</c:v>
+                </c:pt>
+                <c:pt idx="22">
+                  <c:v>-0.95160207388951601</c:v>
+                </c:pt>
+                <c:pt idx="23">
+                  <c:v>-0.99369100363346441</c:v>
+                </c:pt>
+                <c:pt idx="24">
+                  <c:v>-0.99616460883584068</c:v>
+                </c:pt>
+                <c:pt idx="25">
+                  <c:v>-0.95892427466313845</c:v>
+                </c:pt>
+                <c:pt idx="26">
+                  <c:v>-0.88345465572015314</c:v>
+                </c:pt>
+                <c:pt idx="27">
+                  <c:v>-0.77276448755598715</c:v>
+                </c:pt>
+                <c:pt idx="28">
+                  <c:v>-0.63126663787232162</c:v>
+                </c:pt>
+                <c:pt idx="29">
+                  <c:v>-0.46460217941375737</c:v>
+                </c:pt>
+                <c:pt idx="30">
+                  <c:v>-0.27941549819892586</c:v>
+                </c:pt>
+                <c:pt idx="31">
+                  <c:v>-8.3089402817496397E-2</c:v>
+                </c:pt>
+                <c:pt idx="32">
+                  <c:v>0.11654920485049364</c:v>
+                </c:pt>
+                <c:pt idx="33">
+                  <c:v>0.31154136351337786</c:v>
+                </c:pt>
+                <c:pt idx="34">
+                  <c:v>0.49411335113860816</c:v>
+                </c:pt>
+                <c:pt idx="35">
+                  <c:v>0.65698659871878906</c:v>
+                </c:pt>
+                <c:pt idx="36">
+                  <c:v>0.79366786384915311</c:v>
+                </c:pt>
+                <c:pt idx="37">
+                  <c:v>0.89870809581162692</c:v>
+                </c:pt>
+                <c:pt idx="38">
+                  <c:v>0.96791967203148632</c:v>
+                </c:pt>
+                <c:pt idx="39">
+                  <c:v>0.99854334537460498</c:v>
+                </c:pt>
+                <c:pt idx="40">
+                  <c:v>0.98935824662338179</c:v>
+                </c:pt>
+                <c:pt idx="41">
+                  <c:v>0.94073055667977312</c:v>
+                </c:pt>
+                <c:pt idx="42">
+                  <c:v>0.85459890808828043</c:v>
+                </c:pt>
+                <c:pt idx="43">
+                  <c:v>0.73439709787411334</c:v>
+                </c:pt>
+                <c:pt idx="44">
+                  <c:v>0.58491719289176169</c:v>
+                </c:pt>
+                <c:pt idx="45">
+                  <c:v>0.41211848524175659</c:v>
+                </c:pt>
+                <c:pt idx="46">
+                  <c:v>0.22288991410024764</c:v>
+                </c:pt>
+                <c:pt idx="47">
+                  <c:v>2.4775425453357765E-2</c:v>
+                </c:pt>
+                <c:pt idx="48">
+                  <c:v>-0.17432678122297965</c:v>
+                </c:pt>
+                <c:pt idx="49">
+                  <c:v>-0.36647912925192838</c:v>
+                </c:pt>
+                <c:pt idx="50">
+                  <c:v>-0.54402111088936977</c:v>
+                </c:pt>
+                <c:pt idx="51">
+                  <c:v>-0.69987468759354232</c:v>
+                </c:pt>
+                <c:pt idx="52">
+                  <c:v>-0.82782646908565372</c:v>
+                </c:pt>
+                <c:pt idx="53">
+                  <c:v>-0.92277542161280657</c:v>
+                </c:pt>
+                <c:pt idx="54">
+                  <c:v>-0.98093623006649155</c:v>
+                </c:pt>
+                <c:pt idx="55">
+                  <c:v>-0.99999020655070348</c:v>
+                </c:pt>
+                <c:pt idx="56">
+                  <c:v>-0.9791777291513174</c:v>
+                </c:pt>
+                <c:pt idx="57">
+                  <c:v>-0.91932852566467571</c:v>
+                </c:pt>
+                <c:pt idx="58">
+                  <c:v>-0.82282859496870886</c:v>
+                </c:pt>
+                <c:pt idx="59">
+                  <c:v>-0.69352508477712238</c:v>
+                </c:pt>
+                <c:pt idx="60">
+                  <c:v>-0.53657291800043494</c:v>
+                </c:pt>
+                <c:pt idx="61">
+                  <c:v>-0.35822928223682871</c:v>
+                </c:pt>
+                <c:pt idx="62">
+                  <c:v>-0.16560417544830941</c:v>
+                </c:pt>
+                <c:pt idx="63">
+                  <c:v>3.3623047221136695E-2</c:v>
+                </c:pt>
+              </c:numCache>
+            </c:numRef>
+          </c:yVal>
+          <c:smooth val="1"/>
+          <c:extLst>
+            <c:ext xmlns:c16="http://schemas.microsoft.com/office/drawing/2014/chart" uri="{C3380CC4-5D6E-409C-BE32-E72D297353CC}">
+              <c16:uniqueId val="{00000000-6B06-451D-88E0-CC6F36CE1B85}"/>
+            </c:ext>
+          </c:extLst>
+        </c:ser>
+        <c:dLbls>
+          <c:showLegendKey val="0"/>
+          <c:showVal val="0"/>
+          <c:showCatName val="0"/>
+          <c:showSerName val="0"/>
+          <c:showPercent val="0"/>
+          <c:showBubbleSize val="0"/>
+        </c:dLbls>
+        <c:axId val="1043976720"/>
+        <c:axId val="1043978160"/>
+      </c:scatterChart>
+      <c:valAx>
+        <c:axId val="1043976720"/>
+        <c:scaling>
+          <c:orientation val="minMax"/>
+          <c:max val="12.5"/>
+          <c:min val="0"/>
+        </c:scaling>
+        <c:delete val="1"/>
+        <c:axPos val="b"/>
+        <c:numFmt formatCode="General" sourceLinked="1"/>
+        <c:majorTickMark val="out"/>
+        <c:minorTickMark val="none"/>
+        <c:tickLblPos val="nextTo"/>
+        <c:crossAx val="1043978160"/>
+        <c:crosses val="autoZero"/>
+        <c:crossBetween val="midCat"/>
+      </c:valAx>
+      <c:valAx>
+        <c:axId val="1043978160"/>
+        <c:scaling>
+          <c:orientation val="minMax"/>
+        </c:scaling>
+        <c:delete val="1"/>
+        <c:axPos val="l"/>
+        <c:numFmt formatCode="General" sourceLinked="1"/>
+        <c:majorTickMark val="out"/>
+        <c:minorTickMark val="none"/>
+        <c:tickLblPos val="nextTo"/>
+        <c:crossAx val="1043976720"/>
+        <c:crosses val="autoZero"/>
+        <c:crossBetween val="midCat"/>
+      </c:valAx>
+      <c:spPr>
+        <a:noFill/>
+        <a:ln>
+          <a:noFill/>
+        </a:ln>
+        <a:effectLst/>
+      </c:spPr>
+    </c:plotArea>
+    <c:plotVisOnly val="1"/>
+    <c:dispBlanksAs val="gap"/>
+    <c:extLst>
+      <c:ext xmlns:c16r3="http://schemas.microsoft.com/office/drawing/2017/03/chart" uri="{56B9EC1D-385E-4148-901F-78D8002777C0}">
+        <c16r3:dataDisplayOptions16>
+          <c16r3:dispNaAsBlank val="1"/>
+        </c16r3:dataDisplayOptions16>
+      </c:ext>
+    </c:extLst>
+    <c:showDLblsOverMax val="0"/>
+  </c:chart>
+  <c:spPr>
+    <a:noFill/>
+    <a:ln>
+      <a:noFill/>
+    </a:ln>
+    <a:effectLst/>
+  </c:spPr>
+  <c:txPr>
+    <a:bodyPr/>
+    <a:lstStyle/>
+    <a:p>
+      <a:pPr>
+        <a:defRPr/>
+      </a:pPr>
+      <a:endParaRPr lang="de-DE"/>
+    </a:p>
+  </c:txPr>
+  <c:externalData r:id="rId3">
+    <c:autoUpdate val="0"/>
+  </c:externalData>
+</c:chartSpace>
+</file>
+
+<file path=ppt/charts/colors1.xml><?xml version="1.0" encoding="utf-8"?>
+<cs:colorStyle xmlns:cs="http://schemas.microsoft.com/office/drawing/2012/chartStyle" xmlns:a="http://schemas.openxmlformats.org/drawingml/2006/main" meth="cycle" id="10">
+  <a:schemeClr val="accent1"/>
+  <a:schemeClr val="accent2"/>
+  <a:schemeClr val="accent3"/>
+  <a:schemeClr val="accent4"/>
+  <a:schemeClr val="accent5"/>
+  <a:schemeClr val="accent6"/>
+  <cs:variation/>
+  <cs:variation>
+    <a:lumMod val="60000"/>
+  </cs:variation>
+  <cs:variation>
+    <a:lumMod val="80000"/>
+    <a:lumOff val="20000"/>
+  </cs:variation>
+  <cs:variation>
+    <a:lumMod val="80000"/>
+  </cs:variation>
+  <cs:variation>
+    <a:lumMod val="60000"/>
+    <a:lumOff val="40000"/>
+  </cs:variation>
+  <cs:variation>
+    <a:lumMod val="50000"/>
+  </cs:variation>
+  <cs:variation>
+    <a:lumMod val="70000"/>
+    <a:lumOff val="30000"/>
+  </cs:variation>
+  <cs:variation>
+    <a:lumMod val="70000"/>
+  </cs:variation>
+  <cs:variation>
+    <a:lumMod val="50000"/>
+    <a:lumOff val="50000"/>
+  </cs:variation>
+</cs:colorStyle>
+</file>
+
+<file path=ppt/charts/colors2.xml><?xml version="1.0" encoding="utf-8"?>
+<cs:colorStyle xmlns:cs="http://schemas.microsoft.com/office/drawing/2012/chartStyle" xmlns:a="http://schemas.openxmlformats.org/drawingml/2006/main" meth="cycle" id="10">
+  <a:schemeClr val="accent1"/>
+  <a:schemeClr val="accent2"/>
+  <a:schemeClr val="accent3"/>
+  <a:schemeClr val="accent4"/>
+  <a:schemeClr val="accent5"/>
+  <a:schemeClr val="accent6"/>
+  <cs:variation/>
+  <cs:variation>
+    <a:lumMod val="60000"/>
+  </cs:variation>
+  <cs:variation>
+    <a:lumMod val="80000"/>
+    <a:lumOff val="20000"/>
+  </cs:variation>
+  <cs:variation>
+    <a:lumMod val="80000"/>
+  </cs:variation>
+  <cs:variation>
+    <a:lumMod val="60000"/>
+    <a:lumOff val="40000"/>
+  </cs:variation>
+  <cs:variation>
+    <a:lumMod val="50000"/>
+  </cs:variation>
+  <cs:variation>
+    <a:lumMod val="70000"/>
+    <a:lumOff val="30000"/>
+  </cs:variation>
+  <cs:variation>
+    <a:lumMod val="70000"/>
+  </cs:variation>
+  <cs:variation>
+    <a:lumMod val="50000"/>
+    <a:lumOff val="50000"/>
+  </cs:variation>
+</cs:colorStyle>
+</file>
+
+<file path=ppt/charts/colors3.xml><?xml version="1.0" encoding="utf-8"?>
+<cs:colorStyle xmlns:cs="http://schemas.microsoft.com/office/drawing/2012/chartStyle" xmlns:a="http://schemas.openxmlformats.org/drawingml/2006/main" meth="cycle" id="10">
+  <a:schemeClr val="accent1"/>
+  <a:schemeClr val="accent2"/>
+  <a:schemeClr val="accent3"/>
+  <a:schemeClr val="accent4"/>
+  <a:schemeClr val="accent5"/>
+  <a:schemeClr val="accent6"/>
+  <cs:variation/>
+  <cs:variation>
+    <a:lumMod val="60000"/>
+  </cs:variation>
+  <cs:variation>
+    <a:lumMod val="80000"/>
+    <a:lumOff val="20000"/>
+  </cs:variation>
+  <cs:variation>
+    <a:lumMod val="80000"/>
+  </cs:variation>
+  <cs:variation>
+    <a:lumMod val="60000"/>
+    <a:lumOff val="40000"/>
+  </cs:variation>
+  <cs:variation>
+    <a:lumMod val="50000"/>
+  </cs:variation>
+  <cs:variation>
+    <a:lumMod val="70000"/>
+    <a:lumOff val="30000"/>
+  </cs:variation>
+  <cs:variation>
+    <a:lumMod val="70000"/>
+  </cs:variation>
+  <cs:variation>
+    <a:lumMod val="50000"/>
+    <a:lumOff val="50000"/>
+  </cs:variation>
+</cs:colorStyle>
+</file>
+
+<file path=ppt/charts/colors4.xml><?xml version="1.0" encoding="utf-8"?>
+<cs:colorStyle xmlns:cs="http://schemas.microsoft.com/office/drawing/2012/chartStyle" xmlns:a="http://schemas.openxmlformats.org/drawingml/2006/main" meth="cycle" id="10">
+  <a:schemeClr val="accent1"/>
+  <a:schemeClr val="accent2"/>
+  <a:schemeClr val="accent3"/>
+  <a:schemeClr val="accent4"/>
+  <a:schemeClr val="accent5"/>
+  <a:schemeClr val="accent6"/>
+  <cs:variation/>
+  <cs:variation>
+    <a:lumMod val="60000"/>
+  </cs:variation>
+  <cs:variation>
+    <a:lumMod val="80000"/>
+    <a:lumOff val="20000"/>
+  </cs:variation>
+  <cs:variation>
+    <a:lumMod val="80000"/>
+  </cs:variation>
+  <cs:variation>
+    <a:lumMod val="60000"/>
+    <a:lumOff val="40000"/>
+  </cs:variation>
+  <cs:variation>
+    <a:lumMod val="50000"/>
+  </cs:variation>
+  <cs:variation>
+    <a:lumMod val="70000"/>
+    <a:lumOff val="30000"/>
+  </cs:variation>
+  <cs:variation>
+    <a:lumMod val="70000"/>
+  </cs:variation>
+  <cs:variation>
+    <a:lumMod val="50000"/>
+    <a:lumOff val="50000"/>
+  </cs:variation>
+</cs:colorStyle>
+</file>
+
+<file path=ppt/charts/style1.xml><?xml version="1.0" encoding="utf-8"?>
+<cs:chartStyle xmlns:cs="http://schemas.microsoft.com/office/drawing/2012/chartStyle" xmlns:a="http://schemas.openxmlformats.org/drawingml/2006/main" id="240">
+  <cs:axisTitle>
+    <cs:lnRef idx="0"/>
+    <cs:fillRef idx="0"/>
+    <cs:effectRef idx="0"/>
+    <cs:fontRef idx="minor">
+      <a:schemeClr val="tx1">
+        <a:lumMod val="65000"/>
+        <a:lumOff val="35000"/>
+      </a:schemeClr>
+    </cs:fontRef>
+    <cs:defRPr sz="1330" kern="1200"/>
+  </cs:axisTitle>
+  <cs:categoryAxis>
+    <cs:lnRef idx="0"/>
+    <cs:fillRef idx="0"/>
+    <cs:effectRef idx="0"/>
+    <cs:fontRef idx="minor">
+      <a:schemeClr val="tx1">
+        <a:lumMod val="65000"/>
+        <a:lumOff val="35000"/>
+      </a:schemeClr>
+    </cs:fontRef>
+    <cs:spPr>
+      <a:ln w="9525" cap="flat" cmpd="sng" algn="ctr">
+        <a:solidFill>
+          <a:schemeClr val="tx1">
+            <a:lumMod val="25000"/>
+            <a:lumOff val="75000"/>
+          </a:schemeClr>
+        </a:solidFill>
+        <a:round/>
+      </a:ln>
+    </cs:spPr>
+    <cs:defRPr sz="1197" kern="1200"/>
+  </cs:categoryAxis>
+  <cs:chartArea mods="allowNoFillOverride allowNoLineOverride">
+    <cs:lnRef idx="0"/>
+    <cs:fillRef idx="0"/>
+    <cs:effectRef idx="0"/>
+    <cs:fontRef idx="minor">
+      <a:schemeClr val="tx1"/>
+    </cs:fontRef>
+    <cs:spPr>
+      <a:solidFill>
+        <a:schemeClr val="bg1"/>
+      </a:solidFill>
+      <a:ln w="9525" cap="flat" cmpd="sng" algn="ctr">
+        <a:solidFill>
+          <a:schemeClr val="tx1">
+            <a:lumMod val="15000"/>
+            <a:lumOff val="85000"/>
+          </a:schemeClr>
+        </a:solidFill>
+        <a:round/>
+      </a:ln>
+    </cs:spPr>
+    <cs:defRPr sz="1330" kern="1200"/>
+  </cs:chartArea>
+  <cs:dataLabel>
+    <cs:lnRef idx="0"/>
+    <cs:fillRef idx="0"/>
+    <cs:effectRef idx="0"/>
+    <cs:fontRef idx="minor">
+      <a:schemeClr val="tx1">
+        <a:lumMod val="75000"/>
+        <a:lumOff val="25000"/>
+      </a:schemeClr>
+    </cs:fontRef>
+    <cs:defRPr sz="1197" kern="1200"/>
+  </cs:dataLabel>
+  <cs:dataLabelCallout>
+    <cs:lnRef idx="0"/>
+    <cs:fillRef idx="0"/>
+    <cs:effectRef idx="0"/>
+    <cs:fontRef idx="minor">
+      <a:schemeClr val="dk1">
+        <a:lumMod val="65000"/>
+        <a:lumOff val="35000"/>
+      </a:schemeClr>
+    </cs:fontRef>
+    <cs:spPr>
+      <a:solidFill>
+        <a:schemeClr val="lt1"/>
+      </a:solidFill>
+      <a:ln>
+        <a:solidFill>
+          <a:schemeClr val="dk1">
+            <a:lumMod val="25000"/>
+            <a:lumOff val="75000"/>
+          </a:schemeClr>
+        </a:solidFill>
+      </a:ln>
+    </cs:spPr>
+    <cs:defRPr sz="1197" kern="1200"/>
+    <cs:bodyPr rot="0" spcFirstLastPara="1" vertOverflow="clip" horzOverflow="clip" vert="horz" wrap="square" lIns="36576" tIns="18288" rIns="36576" bIns="18288" anchor="ctr" anchorCtr="1">
+      <a:spAutoFit/>
+    </cs:bodyPr>
+  </cs:dataLabelCallout>
+  <cs:dataPoint>
+    <cs:lnRef idx="0"/>
+    <cs:fillRef idx="1">
+      <cs:styleClr val="auto"/>
+    </cs:fillRef>
+    <cs:effectRef idx="0"/>
+    <cs:fontRef idx="minor">
+      <a:schemeClr val="tx1"/>
+    </cs:fontRef>
+  </cs:dataPoint>
+  <cs:dataPoint3D>
+    <cs:lnRef idx="0"/>
+    <cs:fillRef idx="1">
+      <cs:styleClr val="auto"/>
+    </cs:fillRef>
+    <cs:effectRef idx="0"/>
+    <cs:fontRef idx="minor">
+      <a:schemeClr val="tx1"/>
+    </cs:fontRef>
+  </cs:dataPoint3D>
+  <cs:dataPointLine>
+    <cs:lnRef idx="0">
+      <cs:styleClr val="auto"/>
+    </cs:lnRef>
+    <cs:fillRef idx="1"/>
+    <cs:effectRef idx="0"/>
+    <cs:fontRef idx="minor">
+      <a:schemeClr val="tx1"/>
+    </cs:fontRef>
+    <cs:spPr>
+      <a:ln w="19050" cap="rnd">
+        <a:solidFill>
+          <a:schemeClr val="phClr"/>
+        </a:solidFill>
+        <a:round/>
+      </a:ln>
+    </cs:spPr>
+  </cs:dataPointLine>
+  <cs:dataPointMarker>
+    <cs:lnRef idx="0">
+      <cs:styleClr val="auto"/>
+    </cs:lnRef>
+    <cs:fillRef idx="1">
+      <cs:styleClr val="auto"/>
+    </cs:fillRef>
+    <cs:effectRef idx="0"/>
+    <cs:fontRef idx="minor">
+      <a:schemeClr val="tx1"/>
+    </cs:fontRef>
+    <cs:spPr>
+      <a:ln w="9525">
+        <a:solidFill>
+          <a:schemeClr val="phClr"/>
+        </a:solidFill>
+      </a:ln>
+    </cs:spPr>
+  </cs:dataPointMarker>
+  <cs:dataPointMarkerLayout symbol="circle" size="5"/>
+  <cs:dataPointWireframe>
+    <cs:lnRef idx="0">
+      <cs:styleClr val="auto"/>
+    </cs:lnRef>
+    <cs:fillRef idx="0"/>
+    <cs:effectRef idx="0"/>
+    <cs:fontRef idx="minor">
+      <a:schemeClr val="dk1"/>
+    </cs:fontRef>
+    <cs:spPr>
+      <a:ln w="9525" cap="rnd">
+        <a:solidFill>
+          <a:schemeClr val="phClr"/>
+        </a:solidFill>
+        <a:round/>
+      </a:ln>
+    </cs:spPr>
+  </cs:dataPointWireframe>
+  <cs:dataTable>
+    <cs:lnRef idx="0"/>
+    <cs:fillRef idx="0"/>
+    <cs:effectRef idx="0"/>
+    <cs:fontRef idx="minor">
+      <a:schemeClr val="tx1">
+        <a:lumMod val="65000"/>
+        <a:lumOff val="35000"/>
+      </a:schemeClr>
+    </cs:fontRef>
+    <cs:spPr>
+      <a:noFill/>
+      <a:ln w="9525" cap="flat" cmpd="sng" algn="ctr">
+        <a:solidFill>
+          <a:schemeClr val="tx1">
+            <a:lumMod val="15000"/>
+            <a:lumOff val="85000"/>
+          </a:schemeClr>
+        </a:solidFill>
+        <a:round/>
+      </a:ln>
+    </cs:spPr>
+    <cs:defRPr sz="1197" kern="1200"/>
+  </cs:dataTable>
+  <cs:downBar>
+    <cs:lnRef idx="0"/>
+    <cs:fillRef idx="0"/>
+    <cs:effectRef idx="0"/>
+    <cs:fontRef idx="minor">
+      <a:schemeClr val="tx1"/>
+    </cs:fontRef>
+    <cs:spPr>
+      <a:solidFill>
+        <a:schemeClr val="dk1">
+          <a:lumMod val="75000"/>
+          <a:lumOff val="25000"/>
+        </a:schemeClr>
+      </a:solidFill>
+      <a:ln w="9525" cap="flat" cmpd="sng" algn="ctr">
+        <a:solidFill>
+          <a:schemeClr val="tx1">
+            <a:lumMod val="65000"/>
+            <a:lumOff val="35000"/>
+          </a:schemeClr>
+        </a:solidFill>
+        <a:round/>
+      </a:ln>
+    </cs:spPr>
+  </cs:downBar>
+  <cs:dropLine>
+    <cs:lnRef idx="0"/>
+    <cs:fillRef idx="0"/>
+    <cs:effectRef idx="0"/>
+    <cs:fontRef idx="minor">
+      <a:schemeClr val="tx1"/>
+    </cs:fontRef>
+    <cs:spPr>
+      <a:ln w="9525" cap="flat" cmpd="sng" algn="ctr">
+        <a:solidFill>
+          <a:schemeClr val="tx1">
+            <a:lumMod val="35000"/>
+            <a:lumOff val="65000"/>
+          </a:schemeClr>
+        </a:solidFill>
+        <a:round/>
+      </a:ln>
+    </cs:spPr>
+  </cs:dropLine>
+  <cs:errorBar>
+    <cs:lnRef idx="0"/>
+    <cs:fillRef idx="0"/>
+    <cs:effectRef idx="0"/>
+    <cs:fontRef idx="minor">
+      <a:schemeClr val="tx1"/>
+    </cs:fontRef>
+    <cs:spPr>
+      <a:ln w="9525" cap="flat" cmpd="sng" algn="ctr">
+        <a:solidFill>
+          <a:schemeClr val="tx1">
+            <a:lumMod val="65000"/>
+            <a:lumOff val="35000"/>
+          </a:schemeClr>
+        </a:solidFill>
+        <a:round/>
+      </a:ln>
+    </cs:spPr>
+  </cs:errorBar>
+  <cs:floor>
+    <cs:lnRef idx="0"/>
+    <cs:fillRef idx="0"/>
+    <cs:effectRef idx="0"/>
+    <cs:fontRef idx="minor">
+      <a:schemeClr val="tx1"/>
+    </cs:fontRef>
+    <cs:spPr>
+      <a:noFill/>
+      <a:ln>
+        <a:noFill/>
+      </a:ln>
+    </cs:spPr>
+  </cs:floor>
+  <cs:gridlineMajor>
+    <cs:lnRef idx="0"/>
+    <cs:fillRef idx="0"/>
+    <cs:effectRef idx="0"/>
+    <cs:fontRef idx="minor">
+      <a:schemeClr val="tx1"/>
+    </cs:fontRef>
+    <cs:spPr>
+      <a:ln w="9525" cap="flat" cmpd="sng" algn="ctr">
+        <a:solidFill>
+          <a:schemeClr val="tx1">
+            <a:lumMod val="15000"/>
+            <a:lumOff val="85000"/>
+          </a:schemeClr>
+        </a:solidFill>
+        <a:round/>
+      </a:ln>
+    </cs:spPr>
+  </cs:gridlineMajor>
+  <cs:gridlineMinor>
+    <cs:lnRef idx="0"/>
+    <cs:fillRef idx="0"/>
+    <cs:effectRef idx="0"/>
+    <cs:fontRef idx="minor">
+      <a:schemeClr val="tx1"/>
+    </cs:fontRef>
+    <cs:spPr>
+      <a:ln w="9525" cap="flat" cmpd="sng" algn="ctr">
+        <a:solidFill>
+          <a:schemeClr val="tx1">
+            <a:lumMod val="5000"/>
+            <a:lumOff val="95000"/>
+          </a:schemeClr>
+        </a:solidFill>
+        <a:round/>
+      </a:ln>
+    </cs:spPr>
+  </cs:gridlineMinor>
+  <cs:hiLoLine>
+    <cs:lnRef idx="0"/>
+    <cs:fillRef idx="0"/>
+    <cs:effectRef idx="0"/>
+    <cs:fontRef idx="minor">
+      <a:schemeClr val="tx1"/>
+    </cs:fontRef>
+    <cs:spPr>
+      <a:ln w="9525" cap="flat" cmpd="sng" algn="ctr">
+        <a:solidFill>
+          <a:schemeClr val="tx1">
+            <a:lumMod val="50000"/>
+            <a:lumOff val="50000"/>
+          </a:schemeClr>
+        </a:solidFill>
+        <a:round/>
+      </a:ln>
+    </cs:spPr>
+  </cs:hiLoLine>
+  <cs:leaderLine>
+    <cs:lnRef idx="0"/>
+    <cs:fillRef idx="0"/>
+    <cs:effectRef idx="0"/>
+    <cs:fontRef idx="minor">
+      <a:schemeClr val="tx1"/>
+    </cs:fontRef>
+    <cs:spPr>
+      <a:ln w="9525" cap="flat" cmpd="sng" algn="ctr">
+        <a:solidFill>
+          <a:schemeClr val="tx1">
+            <a:lumMod val="35000"/>
+            <a:lumOff val="65000"/>
+          </a:schemeClr>
+        </a:solidFill>
+        <a:round/>
+      </a:ln>
+    </cs:spPr>
+  </cs:leaderLine>
+  <cs:legend>
+    <cs:lnRef idx="0"/>
+    <cs:fillRef idx="0"/>
+    <cs:effectRef idx="0"/>
+    <cs:fontRef idx="minor">
+      <a:schemeClr val="tx1">
+        <a:lumMod val="65000"/>
+        <a:lumOff val="35000"/>
+      </a:schemeClr>
+    </cs:fontRef>
+    <cs:defRPr sz="1197" kern="1200"/>
+  </cs:legend>
+  <cs:plotArea mods="allowNoFillOverride allowNoLineOverride">
+    <cs:lnRef idx="0"/>
+    <cs:fillRef idx="0"/>
+    <cs:effectRef idx="0"/>
+    <cs:fontRef idx="minor">
+      <a:schemeClr val="tx1"/>
+    </cs:fontRef>
+  </cs:plotArea>
+  <cs:plotArea3D mods="allowNoFillOverride allowNoLineOverride">
+    <cs:lnRef idx="0"/>
+    <cs:fillRef idx="0"/>
+    <cs:effectRef idx="0"/>
+    <cs:fontRef idx="minor">
+      <a:schemeClr val="tx1"/>
+    </cs:fontRef>
+  </cs:plotArea3D>
+  <cs:seriesAxis>
+    <cs:lnRef idx="0"/>
+    <cs:fillRef idx="0"/>
+    <cs:effectRef idx="0"/>
+    <cs:fontRef idx="minor">
+      <a:schemeClr val="tx1">
+        <a:lumMod val="65000"/>
+        <a:lumOff val="35000"/>
+      </a:schemeClr>
+    </cs:fontRef>
+    <cs:defRPr sz="1197" kern="1200"/>
+  </cs:seriesAxis>
+  <cs:seriesLine>
+    <cs:lnRef idx="0"/>
+    <cs:fillRef idx="0"/>
+    <cs:effectRef idx="0"/>
+    <cs:fontRef idx="minor">
+      <a:schemeClr val="tx1"/>
+    </cs:fontRef>
+    <cs:spPr>
+      <a:ln w="9525" cap="flat" cmpd="sng" algn="ctr">
+        <a:solidFill>
+          <a:schemeClr val="tx1">
+            <a:lumMod val="35000"/>
+            <a:lumOff val="65000"/>
+          </a:schemeClr>
+        </a:solidFill>
+        <a:round/>
+      </a:ln>
+    </cs:spPr>
+  </cs:seriesLine>
+  <cs:title>
+    <cs:lnRef idx="0"/>
+    <cs:fillRef idx="0"/>
+    <cs:effectRef idx="0"/>
+    <cs:fontRef idx="minor">
+      <a:schemeClr val="tx1">
+        <a:lumMod val="65000"/>
+        <a:lumOff val="35000"/>
+      </a:schemeClr>
+    </cs:fontRef>
+    <cs:defRPr sz="1862" b="0" kern="1200" spc="0" baseline="0"/>
+  </cs:title>
+  <cs:trendline>
+    <cs:lnRef idx="0">
+      <cs:styleClr val="auto"/>
+    </cs:lnRef>
+    <cs:fillRef idx="0"/>
+    <cs:effectRef idx="0"/>
+    <cs:fontRef idx="minor">
+      <a:schemeClr val="tx1"/>
+    </cs:fontRef>
+    <cs:spPr>
+      <a:ln w="19050" cap="rnd">
+        <a:solidFill>
+          <a:schemeClr val="phClr"/>
+        </a:solidFill>
+        <a:prstDash val="sysDot"/>
+      </a:ln>
+    </cs:spPr>
+  </cs:trendline>
+  <cs:trendlineLabel>
+    <cs:lnRef idx="0"/>
+    <cs:fillRef idx="0"/>
+    <cs:effectRef idx="0"/>
+    <cs:fontRef idx="minor">
+      <a:schemeClr val="tx1">
+        <a:lumMod val="65000"/>
+        <a:lumOff val="35000"/>
+      </a:schemeClr>
+    </cs:fontRef>
+    <cs:defRPr sz="1197" kern="1200"/>
+  </cs:trendlineLabel>
+  <cs:upBar>
+    <cs:lnRef idx="0"/>
+    <cs:fillRef idx="0"/>
+    <cs:effectRef idx="0"/>
+    <cs:fontRef idx="minor">
+      <a:schemeClr val="tx1"/>
+    </cs:fontRef>
+    <cs:spPr>
+      <a:solidFill>
+        <a:schemeClr val="lt1"/>
+      </a:solidFill>
+      <a:ln w="9525" cap="flat" cmpd="sng" algn="ctr">
+        <a:solidFill>
+          <a:schemeClr val="tx1">
+            <a:lumMod val="65000"/>
+            <a:lumOff val="35000"/>
+          </a:schemeClr>
+        </a:solidFill>
+        <a:round/>
+      </a:ln>
+    </cs:spPr>
+  </cs:upBar>
+  <cs:valueAxis>
+    <cs:lnRef idx="0"/>
+    <cs:fillRef idx="0"/>
+    <cs:effectRef idx="0"/>
+    <cs:fontRef idx="minor">
+      <a:schemeClr val="tx1">
+        <a:lumMod val="65000"/>
+        <a:lumOff val="35000"/>
+      </a:schemeClr>
+    </cs:fontRef>
+    <cs:spPr>
+      <a:ln w="9525" cap="flat" cmpd="sng" algn="ctr">
+        <a:solidFill>
+          <a:schemeClr val="tx1">
+            <a:lumMod val="25000"/>
+            <a:lumOff val="75000"/>
+          </a:schemeClr>
+        </a:solidFill>
+        <a:round/>
+      </a:ln>
+    </cs:spPr>
+    <cs:defRPr sz="1197" kern="1200"/>
+  </cs:valueAxis>
+  <cs:wall>
+    <cs:lnRef idx="0"/>
+    <cs:fillRef idx="0"/>
+    <cs:effectRef idx="0"/>
+    <cs:fontRef idx="minor">
+      <a:schemeClr val="tx1"/>
+    </cs:fontRef>
+    <cs:spPr>
+      <a:noFill/>
+      <a:ln>
+        <a:noFill/>
+      </a:ln>
+    </cs:spPr>
+  </cs:wall>
+</cs:chartStyle>
+</file>
+
+<file path=ppt/charts/style2.xml><?xml version="1.0" encoding="utf-8"?>
+<cs:chartStyle xmlns:cs="http://schemas.microsoft.com/office/drawing/2012/chartStyle" xmlns:a="http://schemas.openxmlformats.org/drawingml/2006/main" id="240">
+  <cs:axisTitle>
+    <cs:lnRef idx="0"/>
+    <cs:fillRef idx="0"/>
+    <cs:effectRef idx="0"/>
+    <cs:fontRef idx="minor">
+      <a:schemeClr val="tx1">
+        <a:lumMod val="65000"/>
+        <a:lumOff val="35000"/>
+      </a:schemeClr>
+    </cs:fontRef>
+    <cs:defRPr sz="1330" kern="1200"/>
+  </cs:axisTitle>
+  <cs:categoryAxis>
+    <cs:lnRef idx="0"/>
+    <cs:fillRef idx="0"/>
+    <cs:effectRef idx="0"/>
+    <cs:fontRef idx="minor">
+      <a:schemeClr val="tx1">
+        <a:lumMod val="65000"/>
+        <a:lumOff val="35000"/>
+      </a:schemeClr>
+    </cs:fontRef>
+    <cs:spPr>
+      <a:ln w="9525" cap="flat" cmpd="sng" algn="ctr">
+        <a:solidFill>
+          <a:schemeClr val="tx1">
+            <a:lumMod val="25000"/>
+            <a:lumOff val="75000"/>
+          </a:schemeClr>
+        </a:solidFill>
+        <a:round/>
+      </a:ln>
+    </cs:spPr>
+    <cs:defRPr sz="1197" kern="1200"/>
+  </cs:categoryAxis>
+  <cs:chartArea mods="allowNoFillOverride allowNoLineOverride">
+    <cs:lnRef idx="0"/>
+    <cs:fillRef idx="0"/>
+    <cs:effectRef idx="0"/>
+    <cs:fontRef idx="minor">
+      <a:schemeClr val="tx1"/>
+    </cs:fontRef>
+    <cs:spPr>
+      <a:solidFill>
+        <a:schemeClr val="bg1"/>
+      </a:solidFill>
+      <a:ln w="9525" cap="flat" cmpd="sng" algn="ctr">
+        <a:solidFill>
+          <a:schemeClr val="tx1">
+            <a:lumMod val="15000"/>
+            <a:lumOff val="85000"/>
+          </a:schemeClr>
+        </a:solidFill>
+        <a:round/>
+      </a:ln>
+    </cs:spPr>
+    <cs:defRPr sz="1330" kern="1200"/>
+  </cs:chartArea>
+  <cs:dataLabel>
+    <cs:lnRef idx="0"/>
+    <cs:fillRef idx="0"/>
+    <cs:effectRef idx="0"/>
+    <cs:fontRef idx="minor">
+      <a:schemeClr val="tx1">
+        <a:lumMod val="75000"/>
+        <a:lumOff val="25000"/>
+      </a:schemeClr>
+    </cs:fontRef>
+    <cs:defRPr sz="1197" kern="1200"/>
+  </cs:dataLabel>
+  <cs:dataLabelCallout>
+    <cs:lnRef idx="0"/>
+    <cs:fillRef idx="0"/>
+    <cs:effectRef idx="0"/>
+    <cs:fontRef idx="minor">
+      <a:schemeClr val="dk1">
+        <a:lumMod val="65000"/>
+        <a:lumOff val="35000"/>
+      </a:schemeClr>
+    </cs:fontRef>
+    <cs:spPr>
+      <a:solidFill>
+        <a:schemeClr val="lt1"/>
+      </a:solidFill>
+      <a:ln>
+        <a:solidFill>
+          <a:schemeClr val="dk1">
+            <a:lumMod val="25000"/>
+            <a:lumOff val="75000"/>
+          </a:schemeClr>
+        </a:solidFill>
+      </a:ln>
+    </cs:spPr>
+    <cs:defRPr sz="1197" kern="1200"/>
+    <cs:bodyPr rot="0" spcFirstLastPara="1" vertOverflow="clip" horzOverflow="clip" vert="horz" wrap="square" lIns="36576" tIns="18288" rIns="36576" bIns="18288" anchor="ctr" anchorCtr="1">
+      <a:spAutoFit/>
+    </cs:bodyPr>
+  </cs:dataLabelCallout>
+  <cs:dataPoint>
+    <cs:lnRef idx="0"/>
+    <cs:fillRef idx="1">
+      <cs:styleClr val="auto"/>
+    </cs:fillRef>
+    <cs:effectRef idx="0"/>
+    <cs:fontRef idx="minor">
+      <a:schemeClr val="tx1"/>
+    </cs:fontRef>
+  </cs:dataPoint>
+  <cs:dataPoint3D>
+    <cs:lnRef idx="0"/>
+    <cs:fillRef idx="1">
+      <cs:styleClr val="auto"/>
+    </cs:fillRef>
+    <cs:effectRef idx="0"/>
+    <cs:fontRef idx="minor">
+      <a:schemeClr val="tx1"/>
+    </cs:fontRef>
+  </cs:dataPoint3D>
+  <cs:dataPointLine>
+    <cs:lnRef idx="0">
+      <cs:styleClr val="auto"/>
+    </cs:lnRef>
+    <cs:fillRef idx="1"/>
+    <cs:effectRef idx="0"/>
+    <cs:fontRef idx="minor">
+      <a:schemeClr val="tx1"/>
+    </cs:fontRef>
+    <cs:spPr>
+      <a:ln w="19050" cap="rnd">
+        <a:solidFill>
+          <a:schemeClr val="phClr"/>
+        </a:solidFill>
+        <a:round/>
+      </a:ln>
+    </cs:spPr>
+  </cs:dataPointLine>
+  <cs:dataPointMarker>
+    <cs:lnRef idx="0">
+      <cs:styleClr val="auto"/>
+    </cs:lnRef>
+    <cs:fillRef idx="1">
+      <cs:styleClr val="auto"/>
+    </cs:fillRef>
+    <cs:effectRef idx="0"/>
+    <cs:fontRef idx="minor">
+      <a:schemeClr val="tx1"/>
+    </cs:fontRef>
+    <cs:spPr>
+      <a:ln w="9525">
+        <a:solidFill>
+          <a:schemeClr val="phClr"/>
+        </a:solidFill>
+      </a:ln>
+    </cs:spPr>
+  </cs:dataPointMarker>
+  <cs:dataPointMarkerLayout symbol="circle" size="5"/>
+  <cs:dataPointWireframe>
+    <cs:lnRef idx="0">
+      <cs:styleClr val="auto"/>
+    </cs:lnRef>
+    <cs:fillRef idx="0"/>
+    <cs:effectRef idx="0"/>
+    <cs:fontRef idx="minor">
+      <a:schemeClr val="dk1"/>
+    </cs:fontRef>
+    <cs:spPr>
+      <a:ln w="9525" cap="rnd">
+        <a:solidFill>
+          <a:schemeClr val="phClr"/>
+        </a:solidFill>
+        <a:round/>
+      </a:ln>
+    </cs:spPr>
+  </cs:dataPointWireframe>
+  <cs:dataTable>
+    <cs:lnRef idx="0"/>
+    <cs:fillRef idx="0"/>
+    <cs:effectRef idx="0"/>
+    <cs:fontRef idx="minor">
+      <a:schemeClr val="tx1">
+        <a:lumMod val="65000"/>
+        <a:lumOff val="35000"/>
+      </a:schemeClr>
+    </cs:fontRef>
+    <cs:spPr>
+      <a:noFill/>
+      <a:ln w="9525" cap="flat" cmpd="sng" algn="ctr">
+        <a:solidFill>
+          <a:schemeClr val="tx1">
+            <a:lumMod val="15000"/>
+            <a:lumOff val="85000"/>
+          </a:schemeClr>
+        </a:solidFill>
+        <a:round/>
+      </a:ln>
+    </cs:spPr>
+    <cs:defRPr sz="1197" kern="1200"/>
+  </cs:dataTable>
+  <cs:downBar>
+    <cs:lnRef idx="0"/>
+    <cs:fillRef idx="0"/>
+    <cs:effectRef idx="0"/>
+    <cs:fontRef idx="minor">
+      <a:schemeClr val="tx1"/>
+    </cs:fontRef>
+    <cs:spPr>
+      <a:solidFill>
+        <a:schemeClr val="dk1">
+          <a:lumMod val="75000"/>
+          <a:lumOff val="25000"/>
+        </a:schemeClr>
+      </a:solidFill>
+      <a:ln w="9525" cap="flat" cmpd="sng" algn="ctr">
+        <a:solidFill>
+          <a:schemeClr val="tx1">
+            <a:lumMod val="65000"/>
+            <a:lumOff val="35000"/>
+          </a:schemeClr>
+        </a:solidFill>
+        <a:round/>
+      </a:ln>
+    </cs:spPr>
+  </cs:downBar>
+  <cs:dropLine>
+    <cs:lnRef idx="0"/>
+    <cs:fillRef idx="0"/>
+    <cs:effectRef idx="0"/>
+    <cs:fontRef idx="minor">
+      <a:schemeClr val="tx1"/>
+    </cs:fontRef>
+    <cs:spPr>
+      <a:ln w="9525" cap="flat" cmpd="sng" algn="ctr">
+        <a:solidFill>
+          <a:schemeClr val="tx1">
+            <a:lumMod val="35000"/>
+            <a:lumOff val="65000"/>
+          </a:schemeClr>
+        </a:solidFill>
+        <a:round/>
+      </a:ln>
+    </cs:spPr>
+  </cs:dropLine>
+  <cs:errorBar>
+    <cs:lnRef idx="0"/>
+    <cs:fillRef idx="0"/>
+    <cs:effectRef idx="0"/>
+    <cs:fontRef idx="minor">
+      <a:schemeClr val="tx1"/>
+    </cs:fontRef>
+    <cs:spPr>
+      <a:ln w="9525" cap="flat" cmpd="sng" algn="ctr">
+        <a:solidFill>
+          <a:schemeClr val="tx1">
+            <a:lumMod val="65000"/>
+            <a:lumOff val="35000"/>
+          </a:schemeClr>
+        </a:solidFill>
+        <a:round/>
+      </a:ln>
+    </cs:spPr>
+  </cs:errorBar>
+  <cs:floor>
+    <cs:lnRef idx="0"/>
+    <cs:fillRef idx="0"/>
+    <cs:effectRef idx="0"/>
+    <cs:fontRef idx="minor">
+      <a:schemeClr val="tx1"/>
+    </cs:fontRef>
+    <cs:spPr>
+      <a:noFill/>
+      <a:ln>
+        <a:noFill/>
+      </a:ln>
+    </cs:spPr>
+  </cs:floor>
+  <cs:gridlineMajor>
+    <cs:lnRef idx="0"/>
+    <cs:fillRef idx="0"/>
+    <cs:effectRef idx="0"/>
+    <cs:fontRef idx="minor">
+      <a:schemeClr val="tx1"/>
+    </cs:fontRef>
+    <cs:spPr>
+      <a:ln w="9525" cap="flat" cmpd="sng" algn="ctr">
+        <a:solidFill>
+          <a:schemeClr val="tx1">
+            <a:lumMod val="15000"/>
+            <a:lumOff val="85000"/>
+          </a:schemeClr>
+        </a:solidFill>
+        <a:round/>
+      </a:ln>
+    </cs:spPr>
+  </cs:gridlineMajor>
+  <cs:gridlineMinor>
+    <cs:lnRef idx="0"/>
+    <cs:fillRef idx="0"/>
+    <cs:effectRef idx="0"/>
+    <cs:fontRef idx="minor">
+      <a:schemeClr val="tx1"/>
+    </cs:fontRef>
+    <cs:spPr>
+      <a:ln w="9525" cap="flat" cmpd="sng" algn="ctr">
+        <a:solidFill>
+          <a:schemeClr val="tx1">
+            <a:lumMod val="5000"/>
+            <a:lumOff val="95000"/>
+          </a:schemeClr>
+        </a:solidFill>
+        <a:round/>
+      </a:ln>
+    </cs:spPr>
+  </cs:gridlineMinor>
+  <cs:hiLoLine>
+    <cs:lnRef idx="0"/>
+    <cs:fillRef idx="0"/>
+    <cs:effectRef idx="0"/>
+    <cs:fontRef idx="minor">
+      <a:schemeClr val="tx1"/>
+    </cs:fontRef>
+    <cs:spPr>
+      <a:ln w="9525" cap="flat" cmpd="sng" algn="ctr">
+        <a:solidFill>
+          <a:schemeClr val="tx1">
+            <a:lumMod val="50000"/>
+            <a:lumOff val="50000"/>
+          </a:schemeClr>
+        </a:solidFill>
+        <a:round/>
+      </a:ln>
+    </cs:spPr>
+  </cs:hiLoLine>
+  <cs:leaderLine>
+    <cs:lnRef idx="0"/>
+    <cs:fillRef idx="0"/>
+    <cs:effectRef idx="0"/>
+    <cs:fontRef idx="minor">
+      <a:schemeClr val="tx1"/>
+    </cs:fontRef>
+    <cs:spPr>
+      <a:ln w="9525" cap="flat" cmpd="sng" algn="ctr">
+        <a:solidFill>
+          <a:schemeClr val="tx1">
+            <a:lumMod val="35000"/>
+            <a:lumOff val="65000"/>
+          </a:schemeClr>
+        </a:solidFill>
+        <a:round/>
+      </a:ln>
+    </cs:spPr>
+  </cs:leaderLine>
+  <cs:legend>
+    <cs:lnRef idx="0"/>
+    <cs:fillRef idx="0"/>
+    <cs:effectRef idx="0"/>
+    <cs:fontRef idx="minor">
+      <a:schemeClr val="tx1">
+        <a:lumMod val="65000"/>
+        <a:lumOff val="35000"/>
+      </a:schemeClr>
+    </cs:fontRef>
+    <cs:defRPr sz="1197" kern="1200"/>
+  </cs:legend>
+  <cs:plotArea mods="allowNoFillOverride allowNoLineOverride">
+    <cs:lnRef idx="0"/>
+    <cs:fillRef idx="0"/>
+    <cs:effectRef idx="0"/>
+    <cs:fontRef idx="minor">
+      <a:schemeClr val="tx1"/>
+    </cs:fontRef>
+  </cs:plotArea>
+  <cs:plotArea3D mods="allowNoFillOverride allowNoLineOverride">
+    <cs:lnRef idx="0"/>
+    <cs:fillRef idx="0"/>
+    <cs:effectRef idx="0"/>
+    <cs:fontRef idx="minor">
+      <a:schemeClr val="tx1"/>
+    </cs:fontRef>
+  </cs:plotArea3D>
+  <cs:seriesAxis>
+    <cs:lnRef idx="0"/>
+    <cs:fillRef idx="0"/>
+    <cs:effectRef idx="0"/>
+    <cs:fontRef idx="minor">
+      <a:schemeClr val="tx1">
+        <a:lumMod val="65000"/>
+        <a:lumOff val="35000"/>
+      </a:schemeClr>
+    </cs:fontRef>
+    <cs:defRPr sz="1197" kern="1200"/>
+  </cs:seriesAxis>
+  <cs:seriesLine>
+    <cs:lnRef idx="0"/>
+    <cs:fillRef idx="0"/>
+    <cs:effectRef idx="0"/>
+    <cs:fontRef idx="minor">
+      <a:schemeClr val="tx1"/>
+    </cs:fontRef>
+    <cs:spPr>
+      <a:ln w="9525" cap="flat" cmpd="sng" algn="ctr">
+        <a:solidFill>
+          <a:schemeClr val="tx1">
+            <a:lumMod val="35000"/>
+            <a:lumOff val="65000"/>
+          </a:schemeClr>
+        </a:solidFill>
+        <a:round/>
+      </a:ln>
+    </cs:spPr>
+  </cs:seriesLine>
+  <cs:title>
+    <cs:lnRef idx="0"/>
+    <cs:fillRef idx="0"/>
+    <cs:effectRef idx="0"/>
+    <cs:fontRef idx="minor">
+      <a:schemeClr val="tx1">
+        <a:lumMod val="65000"/>
+        <a:lumOff val="35000"/>
+      </a:schemeClr>
+    </cs:fontRef>
+    <cs:defRPr sz="1862" b="0" kern="1200" spc="0" baseline="0"/>
+  </cs:title>
+  <cs:trendline>
+    <cs:lnRef idx="0">
+      <cs:styleClr val="auto"/>
+    </cs:lnRef>
+    <cs:fillRef idx="0"/>
+    <cs:effectRef idx="0"/>
+    <cs:fontRef idx="minor">
+      <a:schemeClr val="tx1"/>
+    </cs:fontRef>
+    <cs:spPr>
+      <a:ln w="19050" cap="rnd">
+        <a:solidFill>
+          <a:schemeClr val="phClr"/>
+        </a:solidFill>
+        <a:prstDash val="sysDot"/>
+      </a:ln>
+    </cs:spPr>
+  </cs:trendline>
+  <cs:trendlineLabel>
+    <cs:lnRef idx="0"/>
+    <cs:fillRef idx="0"/>
+    <cs:effectRef idx="0"/>
+    <cs:fontRef idx="minor">
+      <a:schemeClr val="tx1">
+        <a:lumMod val="65000"/>
+        <a:lumOff val="35000"/>
+      </a:schemeClr>
+    </cs:fontRef>
+    <cs:defRPr sz="1197" kern="1200"/>
+  </cs:trendlineLabel>
+  <cs:upBar>
+    <cs:lnRef idx="0"/>
+    <cs:fillRef idx="0"/>
+    <cs:effectRef idx="0"/>
+    <cs:fontRef idx="minor">
+      <a:schemeClr val="tx1"/>
+    </cs:fontRef>
+    <cs:spPr>
+      <a:solidFill>
+        <a:schemeClr val="lt1"/>
+      </a:solidFill>
+      <a:ln w="9525" cap="flat" cmpd="sng" algn="ctr">
+        <a:solidFill>
+          <a:schemeClr val="tx1">
+            <a:lumMod val="65000"/>
+            <a:lumOff val="35000"/>
+          </a:schemeClr>
+        </a:solidFill>
+        <a:round/>
+      </a:ln>
+    </cs:spPr>
+  </cs:upBar>
+  <cs:valueAxis>
+    <cs:lnRef idx="0"/>
+    <cs:fillRef idx="0"/>
+    <cs:effectRef idx="0"/>
+    <cs:fontRef idx="minor">
+      <a:schemeClr val="tx1">
+        <a:lumMod val="65000"/>
+        <a:lumOff val="35000"/>
+      </a:schemeClr>
+    </cs:fontRef>
+    <cs:spPr>
+      <a:ln w="9525" cap="flat" cmpd="sng" algn="ctr">
+        <a:solidFill>
+          <a:schemeClr val="tx1">
+            <a:lumMod val="25000"/>
+            <a:lumOff val="75000"/>
+          </a:schemeClr>
+        </a:solidFill>
+        <a:round/>
+      </a:ln>
+    </cs:spPr>
+    <cs:defRPr sz="1197" kern="1200"/>
+  </cs:valueAxis>
+  <cs:wall>
+    <cs:lnRef idx="0"/>
+    <cs:fillRef idx="0"/>
+    <cs:effectRef idx="0"/>
+    <cs:fontRef idx="minor">
+      <a:schemeClr val="tx1"/>
+    </cs:fontRef>
+    <cs:spPr>
+      <a:noFill/>
+      <a:ln>
+        <a:noFill/>
+      </a:ln>
+    </cs:spPr>
+  </cs:wall>
+</cs:chartStyle>
+</file>
+
+<file path=ppt/charts/style3.xml><?xml version="1.0" encoding="utf-8"?>
+<cs:chartStyle xmlns:cs="http://schemas.microsoft.com/office/drawing/2012/chartStyle" xmlns:a="http://schemas.openxmlformats.org/drawingml/2006/main" id="240">
+  <cs:axisTitle>
+    <cs:lnRef idx="0"/>
+    <cs:fillRef idx="0"/>
+    <cs:effectRef idx="0"/>
+    <cs:fontRef idx="minor">
+      <a:schemeClr val="tx1">
+        <a:lumMod val="65000"/>
+        <a:lumOff val="35000"/>
+      </a:schemeClr>
+    </cs:fontRef>
+    <cs:defRPr sz="1330" kern="1200"/>
+  </cs:axisTitle>
+  <cs:categoryAxis>
+    <cs:lnRef idx="0"/>
+    <cs:fillRef idx="0"/>
+    <cs:effectRef idx="0"/>
+    <cs:fontRef idx="minor">
+      <a:schemeClr val="tx1">
+        <a:lumMod val="65000"/>
+        <a:lumOff val="35000"/>
+      </a:schemeClr>
+    </cs:fontRef>
+    <cs:spPr>
+      <a:ln w="9525" cap="flat" cmpd="sng" algn="ctr">
+        <a:solidFill>
+          <a:schemeClr val="tx1">
+            <a:lumMod val="25000"/>
+            <a:lumOff val="75000"/>
+          </a:schemeClr>
+        </a:solidFill>
+        <a:round/>
+      </a:ln>
+    </cs:spPr>
+    <cs:defRPr sz="1197" kern="1200"/>
+  </cs:categoryAxis>
+  <cs:chartArea mods="allowNoFillOverride allowNoLineOverride">
+    <cs:lnRef idx="0"/>
+    <cs:fillRef idx="0"/>
+    <cs:effectRef idx="0"/>
+    <cs:fontRef idx="minor">
+      <a:schemeClr val="tx1"/>
+    </cs:fontRef>
+    <cs:spPr>
+      <a:solidFill>
+        <a:schemeClr val="bg1"/>
+      </a:solidFill>
+      <a:ln w="9525" cap="flat" cmpd="sng" algn="ctr">
+        <a:solidFill>
+          <a:schemeClr val="tx1">
+            <a:lumMod val="15000"/>
+            <a:lumOff val="85000"/>
+          </a:schemeClr>
+        </a:solidFill>
+        <a:round/>
+      </a:ln>
+    </cs:spPr>
+    <cs:defRPr sz="1330" kern="1200"/>
+  </cs:chartArea>
+  <cs:dataLabel>
+    <cs:lnRef idx="0"/>
+    <cs:fillRef idx="0"/>
+    <cs:effectRef idx="0"/>
+    <cs:fontRef idx="minor">
+      <a:schemeClr val="tx1">
+        <a:lumMod val="75000"/>
+        <a:lumOff val="25000"/>
+      </a:schemeClr>
+    </cs:fontRef>
+    <cs:defRPr sz="1197" kern="1200"/>
+  </cs:dataLabel>
+  <cs:dataLabelCallout>
+    <cs:lnRef idx="0"/>
+    <cs:fillRef idx="0"/>
+    <cs:effectRef idx="0"/>
+    <cs:fontRef idx="minor">
+      <a:schemeClr val="dk1">
+        <a:lumMod val="65000"/>
+        <a:lumOff val="35000"/>
+      </a:schemeClr>
+    </cs:fontRef>
+    <cs:spPr>
+      <a:solidFill>
+        <a:schemeClr val="lt1"/>
+      </a:solidFill>
+      <a:ln>
+        <a:solidFill>
+          <a:schemeClr val="dk1">
+            <a:lumMod val="25000"/>
+            <a:lumOff val="75000"/>
+          </a:schemeClr>
+        </a:solidFill>
+      </a:ln>
+    </cs:spPr>
+    <cs:defRPr sz="1197" kern="1200"/>
+    <cs:bodyPr rot="0" spcFirstLastPara="1" vertOverflow="clip" horzOverflow="clip" vert="horz" wrap="square" lIns="36576" tIns="18288" rIns="36576" bIns="18288" anchor="ctr" anchorCtr="1">
+      <a:spAutoFit/>
+    </cs:bodyPr>
+  </cs:dataLabelCallout>
+  <cs:dataPoint>
+    <cs:lnRef idx="0"/>
+    <cs:fillRef idx="1">
+      <cs:styleClr val="auto"/>
+    </cs:fillRef>
+    <cs:effectRef idx="0"/>
+    <cs:fontRef idx="minor">
+      <a:schemeClr val="tx1"/>
+    </cs:fontRef>
+  </cs:dataPoint>
+  <cs:dataPoint3D>
+    <cs:lnRef idx="0"/>
+    <cs:fillRef idx="1">
+      <cs:styleClr val="auto"/>
+    </cs:fillRef>
+    <cs:effectRef idx="0"/>
+    <cs:fontRef idx="minor">
+      <a:schemeClr val="tx1"/>
+    </cs:fontRef>
+  </cs:dataPoint3D>
+  <cs:dataPointLine>
+    <cs:lnRef idx="0">
+      <cs:styleClr val="auto"/>
+    </cs:lnRef>
+    <cs:fillRef idx="1"/>
+    <cs:effectRef idx="0"/>
+    <cs:fontRef idx="minor">
+      <a:schemeClr val="tx1"/>
+    </cs:fontRef>
+    <cs:spPr>
+      <a:ln w="19050" cap="rnd">
+        <a:solidFill>
+          <a:schemeClr val="phClr"/>
+        </a:solidFill>
+        <a:round/>
+      </a:ln>
+    </cs:spPr>
+  </cs:dataPointLine>
+  <cs:dataPointMarker>
+    <cs:lnRef idx="0">
+      <cs:styleClr val="auto"/>
+    </cs:lnRef>
+    <cs:fillRef idx="1">
+      <cs:styleClr val="auto"/>
+    </cs:fillRef>
+    <cs:effectRef idx="0"/>
+    <cs:fontRef idx="minor">
+      <a:schemeClr val="tx1"/>
+    </cs:fontRef>
+    <cs:spPr>
+      <a:ln w="9525">
+        <a:solidFill>
+          <a:schemeClr val="phClr"/>
+        </a:solidFill>
+      </a:ln>
+    </cs:spPr>
+  </cs:dataPointMarker>
+  <cs:dataPointMarkerLayout symbol="circle" size="5"/>
+  <cs:dataPointWireframe>
+    <cs:lnRef idx="0">
+      <cs:styleClr val="auto"/>
+    </cs:lnRef>
+    <cs:fillRef idx="0"/>
+    <cs:effectRef idx="0"/>
+    <cs:fontRef idx="minor">
+      <a:schemeClr val="dk1"/>
+    </cs:fontRef>
+    <cs:spPr>
+      <a:ln w="9525" cap="rnd">
+        <a:solidFill>
+          <a:schemeClr val="phClr"/>
+        </a:solidFill>
+        <a:round/>
+      </a:ln>
+    </cs:spPr>
+  </cs:dataPointWireframe>
+  <cs:dataTable>
+    <cs:lnRef idx="0"/>
+    <cs:fillRef idx="0"/>
+    <cs:effectRef idx="0"/>
+    <cs:fontRef idx="minor">
+      <a:schemeClr val="tx1">
+        <a:lumMod val="65000"/>
+        <a:lumOff val="35000"/>
+      </a:schemeClr>
+    </cs:fontRef>
+    <cs:spPr>
+      <a:noFill/>
+      <a:ln w="9525" cap="flat" cmpd="sng" algn="ctr">
+        <a:solidFill>
+          <a:schemeClr val="tx1">
+            <a:lumMod val="15000"/>
+            <a:lumOff val="85000"/>
+          </a:schemeClr>
+        </a:solidFill>
+        <a:round/>
+      </a:ln>
+    </cs:spPr>
+    <cs:defRPr sz="1197" kern="1200"/>
+  </cs:dataTable>
+  <cs:downBar>
+    <cs:lnRef idx="0"/>
+    <cs:fillRef idx="0"/>
+    <cs:effectRef idx="0"/>
+    <cs:fontRef idx="minor">
+      <a:schemeClr val="tx1"/>
+    </cs:fontRef>
+    <cs:spPr>
+      <a:solidFill>
+        <a:schemeClr val="dk1">
+          <a:lumMod val="75000"/>
+          <a:lumOff val="25000"/>
+        </a:schemeClr>
+      </a:solidFill>
+      <a:ln w="9525" cap="flat" cmpd="sng" algn="ctr">
+        <a:solidFill>
+          <a:schemeClr val="tx1">
+            <a:lumMod val="65000"/>
+            <a:lumOff val="35000"/>
+          </a:schemeClr>
+        </a:solidFill>
+        <a:round/>
+      </a:ln>
+    </cs:spPr>
+  </cs:downBar>
+  <cs:dropLine>
+    <cs:lnRef idx="0"/>
+    <cs:fillRef idx="0"/>
+    <cs:effectRef idx="0"/>
+    <cs:fontRef idx="minor">
+      <a:schemeClr val="tx1"/>
+    </cs:fontRef>
+    <cs:spPr>
+      <a:ln w="9525" cap="flat" cmpd="sng" algn="ctr">
+        <a:solidFill>
+          <a:schemeClr val="tx1">
+            <a:lumMod val="35000"/>
+            <a:lumOff val="65000"/>
+          </a:schemeClr>
+        </a:solidFill>
+        <a:round/>
+      </a:ln>
+    </cs:spPr>
+  </cs:dropLine>
+  <cs:errorBar>
+    <cs:lnRef idx="0"/>
+    <cs:fillRef idx="0"/>
+    <cs:effectRef idx="0"/>
+    <cs:fontRef idx="minor">
+      <a:schemeClr val="tx1"/>
+    </cs:fontRef>
+    <cs:spPr>
+      <a:ln w="9525" cap="flat" cmpd="sng" algn="ctr">
+        <a:solidFill>
+          <a:schemeClr val="tx1">
+            <a:lumMod val="65000"/>
+            <a:lumOff val="35000"/>
+          </a:schemeClr>
+        </a:solidFill>
+        <a:round/>
+      </a:ln>
+    </cs:spPr>
+  </cs:errorBar>
+  <cs:floor>
+    <cs:lnRef idx="0"/>
+    <cs:fillRef idx="0"/>
+    <cs:effectRef idx="0"/>
+    <cs:fontRef idx="minor">
+      <a:schemeClr val="tx1"/>
+    </cs:fontRef>
+    <cs:spPr>
+      <a:noFill/>
+      <a:ln>
+        <a:noFill/>
+      </a:ln>
+    </cs:spPr>
+  </cs:floor>
+  <cs:gridlineMajor>
+    <cs:lnRef idx="0"/>
+    <cs:fillRef idx="0"/>
+    <cs:effectRef idx="0"/>
+    <cs:fontRef idx="minor">
+      <a:schemeClr val="tx1"/>
+    </cs:fontRef>
+    <cs:spPr>
+      <a:ln w="9525" cap="flat" cmpd="sng" algn="ctr">
+        <a:solidFill>
+          <a:schemeClr val="tx1">
+            <a:lumMod val="15000"/>
+            <a:lumOff val="85000"/>
+          </a:schemeClr>
+        </a:solidFill>
+        <a:round/>
+      </a:ln>
+    </cs:spPr>
+  </cs:gridlineMajor>
+  <cs:gridlineMinor>
+    <cs:lnRef idx="0"/>
+    <cs:fillRef idx="0"/>
+    <cs:effectRef idx="0"/>
+    <cs:fontRef idx="minor">
+      <a:schemeClr val="tx1"/>
+    </cs:fontRef>
+    <cs:spPr>
+      <a:ln w="9525" cap="flat" cmpd="sng" algn="ctr">
+        <a:solidFill>
+          <a:schemeClr val="tx1">
+            <a:lumMod val="5000"/>
+            <a:lumOff val="95000"/>
+          </a:schemeClr>
+        </a:solidFill>
+        <a:round/>
+      </a:ln>
+    </cs:spPr>
+  </cs:gridlineMinor>
+  <cs:hiLoLine>
+    <cs:lnRef idx="0"/>
+    <cs:fillRef idx="0"/>
+    <cs:effectRef idx="0"/>
+    <cs:fontRef idx="minor">
+      <a:schemeClr val="tx1"/>
+    </cs:fontRef>
+    <cs:spPr>
+      <a:ln w="9525" cap="flat" cmpd="sng" algn="ctr">
+        <a:solidFill>
+          <a:schemeClr val="tx1">
+            <a:lumMod val="50000"/>
+            <a:lumOff val="50000"/>
+          </a:schemeClr>
+        </a:solidFill>
+        <a:round/>
+      </a:ln>
+    </cs:spPr>
+  </cs:hiLoLine>
+  <cs:leaderLine>
+    <cs:lnRef idx="0"/>
+    <cs:fillRef idx="0"/>
+    <cs:effectRef idx="0"/>
+    <cs:fontRef idx="minor">
+      <a:schemeClr val="tx1"/>
+    </cs:fontRef>
+    <cs:spPr>
+      <a:ln w="9525" cap="flat" cmpd="sng" algn="ctr">
+        <a:solidFill>
+          <a:schemeClr val="tx1">
+            <a:lumMod val="35000"/>
+            <a:lumOff val="65000"/>
+          </a:schemeClr>
+        </a:solidFill>
+        <a:round/>
+      </a:ln>
+    </cs:spPr>
+  </cs:leaderLine>
+  <cs:legend>
+    <cs:lnRef idx="0"/>
+    <cs:fillRef idx="0"/>
+    <cs:effectRef idx="0"/>
+    <cs:fontRef idx="minor">
+      <a:schemeClr val="tx1">
+        <a:lumMod val="65000"/>
+        <a:lumOff val="35000"/>
+      </a:schemeClr>
+    </cs:fontRef>
+    <cs:defRPr sz="1197" kern="1200"/>
+  </cs:legend>
+  <cs:plotArea mods="allowNoFillOverride allowNoLineOverride">
+    <cs:lnRef idx="0"/>
+    <cs:fillRef idx="0"/>
+    <cs:effectRef idx="0"/>
+    <cs:fontRef idx="minor">
+      <a:schemeClr val="tx1"/>
+    </cs:fontRef>
+  </cs:plotArea>
+  <cs:plotArea3D mods="allowNoFillOverride allowNoLineOverride">
+    <cs:lnRef idx="0"/>
+    <cs:fillRef idx="0"/>
+    <cs:effectRef idx="0"/>
+    <cs:fontRef idx="minor">
+      <a:schemeClr val="tx1"/>
+    </cs:fontRef>
+  </cs:plotArea3D>
+  <cs:seriesAxis>
+    <cs:lnRef idx="0"/>
+    <cs:fillRef idx="0"/>
+    <cs:effectRef idx="0"/>
+    <cs:fontRef idx="minor">
+      <a:schemeClr val="tx1">
+        <a:lumMod val="65000"/>
+        <a:lumOff val="35000"/>
+      </a:schemeClr>
+    </cs:fontRef>
+    <cs:defRPr sz="1197" kern="1200"/>
+  </cs:seriesAxis>
+  <cs:seriesLine>
+    <cs:lnRef idx="0"/>
+    <cs:fillRef idx="0"/>
+    <cs:effectRef idx="0"/>
+    <cs:fontRef idx="minor">
+      <a:schemeClr val="tx1"/>
+    </cs:fontRef>
+    <cs:spPr>
+      <a:ln w="9525" cap="flat" cmpd="sng" algn="ctr">
+        <a:solidFill>
+          <a:schemeClr val="tx1">
+            <a:lumMod val="35000"/>
+            <a:lumOff val="65000"/>
+          </a:schemeClr>
+        </a:solidFill>
+        <a:round/>
+      </a:ln>
+    </cs:spPr>
+  </cs:seriesLine>
+  <cs:title>
+    <cs:lnRef idx="0"/>
+    <cs:fillRef idx="0"/>
+    <cs:effectRef idx="0"/>
+    <cs:fontRef idx="minor">
+      <a:schemeClr val="tx1">
+        <a:lumMod val="65000"/>
+        <a:lumOff val="35000"/>
+      </a:schemeClr>
+    </cs:fontRef>
+    <cs:defRPr sz="1862" b="0" kern="1200" spc="0" baseline="0"/>
+  </cs:title>
+  <cs:trendline>
+    <cs:lnRef idx="0">
+      <cs:styleClr val="auto"/>
+    </cs:lnRef>
+    <cs:fillRef idx="0"/>
+    <cs:effectRef idx="0"/>
+    <cs:fontRef idx="minor">
+      <a:schemeClr val="tx1"/>
+    </cs:fontRef>
+    <cs:spPr>
+      <a:ln w="19050" cap="rnd">
+        <a:solidFill>
+          <a:schemeClr val="phClr"/>
+        </a:solidFill>
+        <a:prstDash val="sysDot"/>
+      </a:ln>
+    </cs:spPr>
+  </cs:trendline>
+  <cs:trendlineLabel>
+    <cs:lnRef idx="0"/>
+    <cs:fillRef idx="0"/>
+    <cs:effectRef idx="0"/>
+    <cs:fontRef idx="minor">
+      <a:schemeClr val="tx1">
+        <a:lumMod val="65000"/>
+        <a:lumOff val="35000"/>
+      </a:schemeClr>
+    </cs:fontRef>
+    <cs:defRPr sz="1197" kern="1200"/>
+  </cs:trendlineLabel>
+  <cs:upBar>
+    <cs:lnRef idx="0"/>
+    <cs:fillRef idx="0"/>
+    <cs:effectRef idx="0"/>
+    <cs:fontRef idx="minor">
+      <a:schemeClr val="tx1"/>
+    </cs:fontRef>
+    <cs:spPr>
+      <a:solidFill>
+        <a:schemeClr val="lt1"/>
+      </a:solidFill>
+      <a:ln w="9525" cap="flat" cmpd="sng" algn="ctr">
+        <a:solidFill>
+          <a:schemeClr val="tx1">
+            <a:lumMod val="65000"/>
+            <a:lumOff val="35000"/>
+          </a:schemeClr>
+        </a:solidFill>
+        <a:round/>
+      </a:ln>
+    </cs:spPr>
+  </cs:upBar>
+  <cs:valueAxis>
+    <cs:lnRef idx="0"/>
+    <cs:fillRef idx="0"/>
+    <cs:effectRef idx="0"/>
+    <cs:fontRef idx="minor">
+      <a:schemeClr val="tx1">
+        <a:lumMod val="65000"/>
+        <a:lumOff val="35000"/>
+      </a:schemeClr>
+    </cs:fontRef>
+    <cs:spPr>
+      <a:ln w="9525" cap="flat" cmpd="sng" algn="ctr">
+        <a:solidFill>
+          <a:schemeClr val="tx1">
+            <a:lumMod val="25000"/>
+            <a:lumOff val="75000"/>
+          </a:schemeClr>
+        </a:solidFill>
+        <a:round/>
+      </a:ln>
+    </cs:spPr>
+    <cs:defRPr sz="1197" kern="1200"/>
+  </cs:valueAxis>
+  <cs:wall>
+    <cs:lnRef idx="0"/>
+    <cs:fillRef idx="0"/>
+    <cs:effectRef idx="0"/>
+    <cs:fontRef idx="minor">
+      <a:schemeClr val="tx1"/>
+    </cs:fontRef>
+    <cs:spPr>
+      <a:noFill/>
+      <a:ln>
+        <a:noFill/>
+      </a:ln>
+    </cs:spPr>
+  </cs:wall>
+</cs:chartStyle>
+</file>
+
+<file path=ppt/charts/style4.xml><?xml version="1.0" encoding="utf-8"?>
+<cs:chartStyle xmlns:cs="http://schemas.microsoft.com/office/drawing/2012/chartStyle" xmlns:a="http://schemas.openxmlformats.org/drawingml/2006/main" id="240">
+  <cs:axisTitle>
+    <cs:lnRef idx="0"/>
+    <cs:fillRef idx="0"/>
+    <cs:effectRef idx="0"/>
+    <cs:fontRef idx="minor">
+      <a:schemeClr val="tx1">
+        <a:lumMod val="65000"/>
+        <a:lumOff val="35000"/>
+      </a:schemeClr>
+    </cs:fontRef>
+    <cs:defRPr sz="1330" kern="1200"/>
+  </cs:axisTitle>
+  <cs:categoryAxis>
+    <cs:lnRef idx="0"/>
+    <cs:fillRef idx="0"/>
+    <cs:effectRef idx="0"/>
+    <cs:fontRef idx="minor">
+      <a:schemeClr val="tx1">
+        <a:lumMod val="65000"/>
+        <a:lumOff val="35000"/>
+      </a:schemeClr>
+    </cs:fontRef>
+    <cs:spPr>
+      <a:ln w="9525" cap="flat" cmpd="sng" algn="ctr">
+        <a:solidFill>
+          <a:schemeClr val="tx1">
+            <a:lumMod val="25000"/>
+            <a:lumOff val="75000"/>
+          </a:schemeClr>
+        </a:solidFill>
+        <a:round/>
+      </a:ln>
+    </cs:spPr>
+    <cs:defRPr sz="1197" kern="1200"/>
+  </cs:categoryAxis>
+  <cs:chartArea mods="allowNoFillOverride allowNoLineOverride">
+    <cs:lnRef idx="0"/>
+    <cs:fillRef idx="0"/>
+    <cs:effectRef idx="0"/>
+    <cs:fontRef idx="minor">
+      <a:schemeClr val="tx1"/>
+    </cs:fontRef>
+    <cs:spPr>
+      <a:solidFill>
+        <a:schemeClr val="bg1"/>
+      </a:solidFill>
+      <a:ln w="9525" cap="flat" cmpd="sng" algn="ctr">
+        <a:solidFill>
+          <a:schemeClr val="tx1">
+            <a:lumMod val="15000"/>
+            <a:lumOff val="85000"/>
+          </a:schemeClr>
+        </a:solidFill>
+        <a:round/>
+      </a:ln>
+    </cs:spPr>
+    <cs:defRPr sz="1330" kern="1200"/>
+  </cs:chartArea>
+  <cs:dataLabel>
+    <cs:lnRef idx="0"/>
+    <cs:fillRef idx="0"/>
+    <cs:effectRef idx="0"/>
+    <cs:fontRef idx="minor">
+      <a:schemeClr val="tx1">
+        <a:lumMod val="75000"/>
+        <a:lumOff val="25000"/>
+      </a:schemeClr>
+    </cs:fontRef>
+    <cs:defRPr sz="1197" kern="1200"/>
+  </cs:dataLabel>
+  <cs:dataLabelCallout>
+    <cs:lnRef idx="0"/>
+    <cs:fillRef idx="0"/>
+    <cs:effectRef idx="0"/>
+    <cs:fontRef idx="minor">
+      <a:schemeClr val="dk1">
+        <a:lumMod val="65000"/>
+        <a:lumOff val="35000"/>
+      </a:schemeClr>
+    </cs:fontRef>
+    <cs:spPr>
+      <a:solidFill>
+        <a:schemeClr val="lt1"/>
+      </a:solidFill>
+      <a:ln>
+        <a:solidFill>
+          <a:schemeClr val="dk1">
+            <a:lumMod val="25000"/>
+            <a:lumOff val="75000"/>
+          </a:schemeClr>
+        </a:solidFill>
+      </a:ln>
+    </cs:spPr>
+    <cs:defRPr sz="1197" kern="1200"/>
+    <cs:bodyPr rot="0" spcFirstLastPara="1" vertOverflow="clip" horzOverflow="clip" vert="horz" wrap="square" lIns="36576" tIns="18288" rIns="36576" bIns="18288" anchor="ctr" anchorCtr="1">
+      <a:spAutoFit/>
+    </cs:bodyPr>
+  </cs:dataLabelCallout>
+  <cs:dataPoint>
+    <cs:lnRef idx="0"/>
+    <cs:fillRef idx="1">
+      <cs:styleClr val="auto"/>
+    </cs:fillRef>
+    <cs:effectRef idx="0"/>
+    <cs:fontRef idx="minor">
+      <a:schemeClr val="tx1"/>
+    </cs:fontRef>
+  </cs:dataPoint>
+  <cs:dataPoint3D>
+    <cs:lnRef idx="0"/>
+    <cs:fillRef idx="1">
+      <cs:styleClr val="auto"/>
+    </cs:fillRef>
+    <cs:effectRef idx="0"/>
+    <cs:fontRef idx="minor">
+      <a:schemeClr val="tx1"/>
+    </cs:fontRef>
+  </cs:dataPoint3D>
+  <cs:dataPointLine>
+    <cs:lnRef idx="0">
+      <cs:styleClr val="auto"/>
+    </cs:lnRef>
+    <cs:fillRef idx="1"/>
+    <cs:effectRef idx="0"/>
+    <cs:fontRef idx="minor">
+      <a:schemeClr val="tx1"/>
+    </cs:fontRef>
+    <cs:spPr>
+      <a:ln w="19050" cap="rnd">
+        <a:solidFill>
+          <a:schemeClr val="phClr"/>
+        </a:solidFill>
+        <a:round/>
+      </a:ln>
+    </cs:spPr>
+  </cs:dataPointLine>
+  <cs:dataPointMarker>
+    <cs:lnRef idx="0">
+      <cs:styleClr val="auto"/>
+    </cs:lnRef>
+    <cs:fillRef idx="1">
+      <cs:styleClr val="auto"/>
+    </cs:fillRef>
+    <cs:effectRef idx="0"/>
+    <cs:fontRef idx="minor">
+      <a:schemeClr val="tx1"/>
+    </cs:fontRef>
+    <cs:spPr>
+      <a:ln w="9525">
+        <a:solidFill>
+          <a:schemeClr val="phClr"/>
+        </a:solidFill>
+      </a:ln>
+    </cs:spPr>
+  </cs:dataPointMarker>
+  <cs:dataPointMarkerLayout symbol="circle" size="5"/>
+  <cs:dataPointWireframe>
+    <cs:lnRef idx="0">
+      <cs:styleClr val="auto"/>
+    </cs:lnRef>
+    <cs:fillRef idx="0"/>
+    <cs:effectRef idx="0"/>
+    <cs:fontRef idx="minor">
+      <a:schemeClr val="dk1"/>
+    </cs:fontRef>
+    <cs:spPr>
+      <a:ln w="9525" cap="rnd">
+        <a:solidFill>
+          <a:schemeClr val="phClr"/>
+        </a:solidFill>
+        <a:round/>
+      </a:ln>
+    </cs:spPr>
+  </cs:dataPointWireframe>
+  <cs:dataTable>
+    <cs:lnRef idx="0"/>
+    <cs:fillRef idx="0"/>
+    <cs:effectRef idx="0"/>
+    <cs:fontRef idx="minor">
+      <a:schemeClr val="tx1">
+        <a:lumMod val="65000"/>
+        <a:lumOff val="35000"/>
+      </a:schemeClr>
+    </cs:fontRef>
+    <cs:spPr>
+      <a:noFill/>
+      <a:ln w="9525" cap="flat" cmpd="sng" algn="ctr">
+        <a:solidFill>
+          <a:schemeClr val="tx1">
+            <a:lumMod val="15000"/>
+            <a:lumOff val="85000"/>
+          </a:schemeClr>
+        </a:solidFill>
+        <a:round/>
+      </a:ln>
+    </cs:spPr>
+    <cs:defRPr sz="1197" kern="1200"/>
+  </cs:dataTable>
+  <cs:downBar>
+    <cs:lnRef idx="0"/>
+    <cs:fillRef idx="0"/>
+    <cs:effectRef idx="0"/>
+    <cs:fontRef idx="minor">
+      <a:schemeClr val="tx1"/>
+    </cs:fontRef>
+    <cs:spPr>
+      <a:solidFill>
+        <a:schemeClr val="dk1">
+          <a:lumMod val="75000"/>
+          <a:lumOff val="25000"/>
+        </a:schemeClr>
+      </a:solidFill>
+      <a:ln w="9525" cap="flat" cmpd="sng" algn="ctr">
+        <a:solidFill>
+          <a:schemeClr val="tx1">
+            <a:lumMod val="65000"/>
+            <a:lumOff val="35000"/>
+          </a:schemeClr>
+        </a:solidFill>
+        <a:round/>
+      </a:ln>
+    </cs:spPr>
+  </cs:downBar>
+  <cs:dropLine>
+    <cs:lnRef idx="0"/>
+    <cs:fillRef idx="0"/>
+    <cs:effectRef idx="0"/>
+    <cs:fontRef idx="minor">
+      <a:schemeClr val="tx1"/>
+    </cs:fontRef>
+    <cs:spPr>
+      <a:ln w="9525" cap="flat" cmpd="sng" algn="ctr">
+        <a:solidFill>
+          <a:schemeClr val="tx1">
+            <a:lumMod val="35000"/>
+            <a:lumOff val="65000"/>
+          </a:schemeClr>
+        </a:solidFill>
+        <a:round/>
+      </a:ln>
+    </cs:spPr>
+  </cs:dropLine>
+  <cs:errorBar>
+    <cs:lnRef idx="0"/>
+    <cs:fillRef idx="0"/>
+    <cs:effectRef idx="0"/>
+    <cs:fontRef idx="minor">
+      <a:schemeClr val="tx1"/>
+    </cs:fontRef>
+    <cs:spPr>
+      <a:ln w="9525" cap="flat" cmpd="sng" algn="ctr">
+        <a:solidFill>
+          <a:schemeClr val="tx1">
+            <a:lumMod val="65000"/>
+            <a:lumOff val="35000"/>
+          </a:schemeClr>
+        </a:solidFill>
+        <a:round/>
+      </a:ln>
+    </cs:spPr>
+  </cs:errorBar>
+  <cs:floor>
+    <cs:lnRef idx="0"/>
+    <cs:fillRef idx="0"/>
+    <cs:effectRef idx="0"/>
+    <cs:fontRef idx="minor">
+      <a:schemeClr val="tx1"/>
+    </cs:fontRef>
+    <cs:spPr>
+      <a:noFill/>
+      <a:ln>
+        <a:noFill/>
+      </a:ln>
+    </cs:spPr>
+  </cs:floor>
+  <cs:gridlineMajor>
+    <cs:lnRef idx="0"/>
+    <cs:fillRef idx="0"/>
+    <cs:effectRef idx="0"/>
+    <cs:fontRef idx="minor">
+      <a:schemeClr val="tx1"/>
+    </cs:fontRef>
+    <cs:spPr>
+      <a:ln w="9525" cap="flat" cmpd="sng" algn="ctr">
+        <a:solidFill>
+          <a:schemeClr val="tx1">
+            <a:lumMod val="15000"/>
+            <a:lumOff val="85000"/>
+          </a:schemeClr>
+        </a:solidFill>
+        <a:round/>
+      </a:ln>
+    </cs:spPr>
+  </cs:gridlineMajor>
+  <cs:gridlineMinor>
+    <cs:lnRef idx="0"/>
+    <cs:fillRef idx="0"/>
+    <cs:effectRef idx="0"/>
+    <cs:fontRef idx="minor">
+      <a:schemeClr val="tx1"/>
+    </cs:fontRef>
+    <cs:spPr>
+      <a:ln w="9525" cap="flat" cmpd="sng" algn="ctr">
+        <a:solidFill>
+          <a:schemeClr val="tx1">
+            <a:lumMod val="5000"/>
+            <a:lumOff val="95000"/>
+          </a:schemeClr>
+        </a:solidFill>
+        <a:round/>
+      </a:ln>
+    </cs:spPr>
+  </cs:gridlineMinor>
+  <cs:hiLoLine>
+    <cs:lnRef idx="0"/>
+    <cs:fillRef idx="0"/>
+    <cs:effectRef idx="0"/>
+    <cs:fontRef idx="minor">
+      <a:schemeClr val="tx1"/>
+    </cs:fontRef>
+    <cs:spPr>
+      <a:ln w="9525" cap="flat" cmpd="sng" algn="ctr">
+        <a:solidFill>
+          <a:schemeClr val="tx1">
+            <a:lumMod val="50000"/>
+            <a:lumOff val="50000"/>
+          </a:schemeClr>
+        </a:solidFill>
+        <a:round/>
+      </a:ln>
+    </cs:spPr>
+  </cs:hiLoLine>
+  <cs:leaderLine>
+    <cs:lnRef idx="0"/>
+    <cs:fillRef idx="0"/>
+    <cs:effectRef idx="0"/>
+    <cs:fontRef idx="minor">
+      <a:schemeClr val="tx1"/>
+    </cs:fontRef>
+    <cs:spPr>
+      <a:ln w="9525" cap="flat" cmpd="sng" algn="ctr">
+        <a:solidFill>
+          <a:schemeClr val="tx1">
+            <a:lumMod val="35000"/>
+            <a:lumOff val="65000"/>
+          </a:schemeClr>
+        </a:solidFill>
+        <a:round/>
+      </a:ln>
+    </cs:spPr>
+  </cs:leaderLine>
+  <cs:legend>
+    <cs:lnRef idx="0"/>
+    <cs:fillRef idx="0"/>
+    <cs:effectRef idx="0"/>
+    <cs:fontRef idx="minor">
+      <a:schemeClr val="tx1">
+        <a:lumMod val="65000"/>
+        <a:lumOff val="35000"/>
+      </a:schemeClr>
+    </cs:fontRef>
+    <cs:defRPr sz="1197" kern="1200"/>
+  </cs:legend>
+  <cs:plotArea mods="allowNoFillOverride allowNoLineOverride">
+    <cs:lnRef idx="0"/>
+    <cs:fillRef idx="0"/>
+    <cs:effectRef idx="0"/>
+    <cs:fontRef idx="minor">
+      <a:schemeClr val="tx1"/>
+    </cs:fontRef>
+  </cs:plotArea>
+  <cs:plotArea3D mods="allowNoFillOverride allowNoLineOverride">
+    <cs:lnRef idx="0"/>
+    <cs:fillRef idx="0"/>
+    <cs:effectRef idx="0"/>
+    <cs:fontRef idx="minor">
+      <a:schemeClr val="tx1"/>
+    </cs:fontRef>
+  </cs:plotArea3D>
+  <cs:seriesAxis>
+    <cs:lnRef idx="0"/>
+    <cs:fillRef idx="0"/>
+    <cs:effectRef idx="0"/>
+    <cs:fontRef idx="minor">
+      <a:schemeClr val="tx1">
+        <a:lumMod val="65000"/>
+        <a:lumOff val="35000"/>
+      </a:schemeClr>
+    </cs:fontRef>
+    <cs:defRPr sz="1197" kern="1200"/>
+  </cs:seriesAxis>
+  <cs:seriesLine>
+    <cs:lnRef idx="0"/>
+    <cs:fillRef idx="0"/>
+    <cs:effectRef idx="0"/>
+    <cs:fontRef idx="minor">
+      <a:schemeClr val="tx1"/>
+    </cs:fontRef>
+    <cs:spPr>
+      <a:ln w="9525" cap="flat" cmpd="sng" algn="ctr">
+        <a:solidFill>
+          <a:schemeClr val="tx1">
+            <a:lumMod val="35000"/>
+            <a:lumOff val="65000"/>
+          </a:schemeClr>
+        </a:solidFill>
+        <a:round/>
+      </a:ln>
+    </cs:spPr>
+  </cs:seriesLine>
+  <cs:title>
+    <cs:lnRef idx="0"/>
+    <cs:fillRef idx="0"/>
+    <cs:effectRef idx="0"/>
+    <cs:fontRef idx="minor">
+      <a:schemeClr val="tx1">
+        <a:lumMod val="65000"/>
+        <a:lumOff val="35000"/>
+      </a:schemeClr>
+    </cs:fontRef>
+    <cs:defRPr sz="1862" b="0" kern="1200" spc="0" baseline="0"/>
+  </cs:title>
+  <cs:trendline>
+    <cs:lnRef idx="0">
+      <cs:styleClr val="auto"/>
+    </cs:lnRef>
+    <cs:fillRef idx="0"/>
+    <cs:effectRef idx="0"/>
+    <cs:fontRef idx="minor">
+      <a:schemeClr val="tx1"/>
+    </cs:fontRef>
+    <cs:spPr>
+      <a:ln w="19050" cap="rnd">
+        <a:solidFill>
+          <a:schemeClr val="phClr"/>
+        </a:solidFill>
+        <a:prstDash val="sysDot"/>
+      </a:ln>
+    </cs:spPr>
+  </cs:trendline>
+  <cs:trendlineLabel>
+    <cs:lnRef idx="0"/>
+    <cs:fillRef idx="0"/>
+    <cs:effectRef idx="0"/>
+    <cs:fontRef idx="minor">
+      <a:schemeClr val="tx1">
+        <a:lumMod val="65000"/>
+        <a:lumOff val="35000"/>
+      </a:schemeClr>
+    </cs:fontRef>
+    <cs:defRPr sz="1197" kern="1200"/>
+  </cs:trendlineLabel>
+  <cs:upBar>
+    <cs:lnRef idx="0"/>
+    <cs:fillRef idx="0"/>
+    <cs:effectRef idx="0"/>
+    <cs:fontRef idx="minor">
+      <a:schemeClr val="tx1"/>
+    </cs:fontRef>
+    <cs:spPr>
+      <a:solidFill>
+        <a:schemeClr val="lt1"/>
+      </a:solidFill>
+      <a:ln w="9525" cap="flat" cmpd="sng" algn="ctr">
+        <a:solidFill>
+          <a:schemeClr val="tx1">
+            <a:lumMod val="65000"/>
+            <a:lumOff val="35000"/>
+          </a:schemeClr>
+        </a:solidFill>
+        <a:round/>
+      </a:ln>
+    </cs:spPr>
+  </cs:upBar>
+  <cs:valueAxis>
+    <cs:lnRef idx="0"/>
+    <cs:fillRef idx="0"/>
+    <cs:effectRef idx="0"/>
+    <cs:fontRef idx="minor">
+      <a:schemeClr val="tx1">
+        <a:lumMod val="65000"/>
+        <a:lumOff val="35000"/>
+      </a:schemeClr>
+    </cs:fontRef>
+    <cs:spPr>
+      <a:ln w="9525" cap="flat" cmpd="sng" algn="ctr">
+        <a:solidFill>
+          <a:schemeClr val="tx1">
+            <a:lumMod val="25000"/>
+            <a:lumOff val="75000"/>
+          </a:schemeClr>
+        </a:solidFill>
+        <a:round/>
+      </a:ln>
+    </cs:spPr>
+    <cs:defRPr sz="1197" kern="1200"/>
+  </cs:valueAxis>
+  <cs:wall>
+    <cs:lnRef idx="0"/>
+    <cs:fillRef idx="0"/>
+    <cs:effectRef idx="0"/>
+    <cs:fontRef idx="minor">
+      <a:schemeClr val="tx1"/>
+    </cs:fontRef>
+    <cs:spPr>
+      <a:noFill/>
+      <a:ln>
+        <a:noFill/>
+      </a:ln>
+    </cs:spPr>
+  </cs:wall>
+</cs:chartStyle>
 </file>
 
 <file path=ppt/slideLayouts/slideLayout1.xml><?xml version="1.0" encoding="utf-8"?>
@@ -303,7 +5536,7 @@
             <a:fld id="{26A4EE3E-C51C-46FF-A86D-714B8E2F6002}" type="datetimeFigureOut">
               <a:rPr lang="de-DE" smtClean="0"/>
               <a:pPr/>
-              <a:t>24.02.2026</a:t>
+              <a:t>25.02.2026</a:t>
             </a:fld>
             <a:endParaRPr lang="de-DE"/>
           </a:p>
@@ -468,7 +5701,7 @@
             <a:fld id="{26A4EE3E-C51C-46FF-A86D-714B8E2F6002}" type="datetimeFigureOut">
               <a:rPr lang="de-DE" smtClean="0"/>
               <a:pPr/>
-              <a:t>24.02.2026</a:t>
+              <a:t>25.02.2026</a:t>
             </a:fld>
             <a:endParaRPr lang="de-DE"/>
           </a:p>
@@ -643,7 +5876,7 @@
             <a:fld id="{26A4EE3E-C51C-46FF-A86D-714B8E2F6002}" type="datetimeFigureOut">
               <a:rPr lang="de-DE" smtClean="0"/>
               <a:pPr/>
-              <a:t>24.02.2026</a:t>
+              <a:t>25.02.2026</a:t>
             </a:fld>
             <a:endParaRPr lang="de-DE"/>
           </a:p>
@@ -808,7 +6041,7 @@
             <a:fld id="{26A4EE3E-C51C-46FF-A86D-714B8E2F6002}" type="datetimeFigureOut">
               <a:rPr lang="de-DE" smtClean="0"/>
               <a:pPr/>
-              <a:t>24.02.2026</a:t>
+              <a:t>25.02.2026</a:t>
             </a:fld>
             <a:endParaRPr lang="de-DE"/>
           </a:p>
@@ -1050,7 +6283,7 @@
             <a:fld id="{26A4EE3E-C51C-46FF-A86D-714B8E2F6002}" type="datetimeFigureOut">
               <a:rPr lang="de-DE" smtClean="0"/>
               <a:pPr/>
-              <a:t>24.02.2026</a:t>
+              <a:t>25.02.2026</a:t>
             </a:fld>
             <a:endParaRPr lang="de-DE"/>
           </a:p>
@@ -1332,7 +6565,7 @@
             <a:fld id="{26A4EE3E-C51C-46FF-A86D-714B8E2F6002}" type="datetimeFigureOut">
               <a:rPr lang="de-DE" smtClean="0"/>
               <a:pPr/>
-              <a:t>24.02.2026</a:t>
+              <a:t>25.02.2026</a:t>
             </a:fld>
             <a:endParaRPr lang="de-DE"/>
           </a:p>
@@ -1748,7 +6981,7 @@
             <a:fld id="{26A4EE3E-C51C-46FF-A86D-714B8E2F6002}" type="datetimeFigureOut">
               <a:rPr lang="de-DE" smtClean="0"/>
               <a:pPr/>
-              <a:t>24.02.2026</a:t>
+              <a:t>25.02.2026</a:t>
             </a:fld>
             <a:endParaRPr lang="de-DE"/>
           </a:p>
@@ -1862,7 +7095,7 @@
             <a:fld id="{26A4EE3E-C51C-46FF-A86D-714B8E2F6002}" type="datetimeFigureOut">
               <a:rPr lang="de-DE" smtClean="0"/>
               <a:pPr/>
-              <a:t>24.02.2026</a:t>
+              <a:t>25.02.2026</a:t>
             </a:fld>
             <a:endParaRPr lang="de-DE"/>
           </a:p>
@@ -1954,7 +7187,7 @@
             <a:fld id="{26A4EE3E-C51C-46FF-A86D-714B8E2F6002}" type="datetimeFigureOut">
               <a:rPr lang="de-DE" smtClean="0"/>
               <a:pPr/>
-              <a:t>24.02.2026</a:t>
+              <a:t>25.02.2026</a:t>
             </a:fld>
             <a:endParaRPr lang="de-DE"/>
           </a:p>
@@ -2226,7 +7459,7 @@
             <a:fld id="{26A4EE3E-C51C-46FF-A86D-714B8E2F6002}" type="datetimeFigureOut">
               <a:rPr lang="de-DE" smtClean="0"/>
               <a:pPr/>
-              <a:t>24.02.2026</a:t>
+              <a:t>25.02.2026</a:t>
             </a:fld>
             <a:endParaRPr lang="de-DE"/>
           </a:p>
@@ -2475,7 +7708,7 @@
             <a:fld id="{26A4EE3E-C51C-46FF-A86D-714B8E2F6002}" type="datetimeFigureOut">
               <a:rPr lang="de-DE" smtClean="0"/>
               <a:pPr/>
-              <a:t>24.02.2026</a:t>
+              <a:t>25.02.2026</a:t>
             </a:fld>
             <a:endParaRPr lang="de-DE"/>
           </a:p>
@@ -2683,7 +7916,7 @@
             <a:fld id="{26A4EE3E-C51C-46FF-A86D-714B8E2F6002}" type="datetimeFigureOut">
               <a:rPr lang="de-DE" smtClean="0"/>
               <a:pPr/>
-              <a:t>24.02.2026</a:t>
+              <a:t>25.02.2026</a:t>
             </a:fld>
             <a:endParaRPr lang="de-DE"/>
           </a:p>
@@ -3528,6 +8761,1094 @@
 </p:sld>
 </file>
 
+<file path=ppt/slides/slide2.xml><?xml version="1.0" encoding="utf-8"?>
+<p:sld xmlns:a="http://schemas.openxmlformats.org/drawingml/2006/main" xmlns:r="http://schemas.openxmlformats.org/officeDocument/2006/relationships" xmlns:p="http://schemas.openxmlformats.org/presentationml/2006/main">
+  <p:cSld>
+    <p:spTree>
+      <p:nvGrpSpPr>
+        <p:cNvPr id="1" name=""/>
+        <p:cNvGrpSpPr/>
+        <p:nvPr/>
+      </p:nvGrpSpPr>
+      <p:grpSpPr>
+        <a:xfrm>
+          <a:off x="0" y="0"/>
+          <a:ext cx="0" cy="0"/>
+          <a:chOff x="0" y="0"/>
+          <a:chExt cx="0" cy="0"/>
+        </a:xfrm>
+      </p:grpSpPr>
+      <p:grpSp>
+        <p:nvGrpSpPr>
+          <p:cNvPr id="30" name="Gruppieren 29">
+            <a:extLst>
+              <a:ext uri="{FF2B5EF4-FFF2-40B4-BE49-F238E27FC236}">
+                <a16:creationId xmlns:a16="http://schemas.microsoft.com/office/drawing/2014/main" id="{DB2C4E49-CBB7-AB6C-884F-5F4CDB5366BF}"/>
+              </a:ext>
+            </a:extLst>
+          </p:cNvPr>
+          <p:cNvGrpSpPr/>
+          <p:nvPr/>
+        </p:nvGrpSpPr>
+        <p:grpSpPr>
+          <a:xfrm>
+            <a:off x="1147798" y="1916832"/>
+            <a:ext cx="7040925" cy="2590800"/>
+            <a:chOff x="1147798" y="1916832"/>
+            <a:chExt cx="7040925" cy="2590800"/>
+          </a:xfrm>
+        </p:grpSpPr>
+        <p:grpSp>
+          <p:nvGrpSpPr>
+            <p:cNvPr id="25" name="Gruppieren 24">
+              <a:extLst>
+                <a:ext uri="{FF2B5EF4-FFF2-40B4-BE49-F238E27FC236}">
+                  <a16:creationId xmlns:a16="http://schemas.microsoft.com/office/drawing/2014/main" id="{32EBD660-6A18-27B0-4C56-D976B2670CA4}"/>
+                </a:ext>
+              </a:extLst>
+            </p:cNvPr>
+            <p:cNvGrpSpPr/>
+            <p:nvPr/>
+          </p:nvGrpSpPr>
+          <p:grpSpPr>
+            <a:xfrm>
+              <a:off x="1779098" y="1916832"/>
+              <a:ext cx="5911450" cy="2590800"/>
+              <a:chOff x="1779098" y="1916832"/>
+              <a:chExt cx="5911450" cy="2590800"/>
+            </a:xfrm>
+          </p:grpSpPr>
+          <p:pic>
+            <p:nvPicPr>
+              <p:cNvPr id="5" name="Grafik 4">
+                <a:extLst>
+                  <a:ext uri="{FF2B5EF4-FFF2-40B4-BE49-F238E27FC236}">
+                    <a16:creationId xmlns:a16="http://schemas.microsoft.com/office/drawing/2014/main" id="{A9D38787-13E3-586C-D1A6-E7C5C622FC18}"/>
+                  </a:ext>
+                </a:extLst>
+              </p:cNvPr>
+              <p:cNvPicPr>
+                <a:picLocks noChangeAspect="1"/>
+              </p:cNvPicPr>
+              <p:nvPr/>
+            </p:nvPicPr>
+            <p:blipFill>
+              <a:blip r:embed="rId2">
+                <a:extLst>
+                  <a:ext uri="{28A0092B-C50C-407E-A947-70E740481C1C}">
+                    <a14:useLocalDpi xmlns:a14="http://schemas.microsoft.com/office/drawing/2010/main" val="0"/>
+                  </a:ext>
+                </a:extLst>
+              </a:blip>
+              <a:stretch>
+                <a:fillRect/>
+              </a:stretch>
+            </p:blipFill>
+            <p:spPr>
+              <a:xfrm>
+                <a:off x="2085975" y="1916832"/>
+                <a:ext cx="4972050" cy="2590800"/>
+              </a:xfrm>
+              <a:prstGeom prst="rect">
+                <a:avLst/>
+              </a:prstGeom>
+            </p:spPr>
+          </p:pic>
+          <p:sp>
+            <p:nvSpPr>
+              <p:cNvPr id="6" name="Textfeld 5">
+                <a:extLst>
+                  <a:ext uri="{FF2B5EF4-FFF2-40B4-BE49-F238E27FC236}">
+                    <a16:creationId xmlns:a16="http://schemas.microsoft.com/office/drawing/2014/main" id="{AEE32407-C9C5-40B1-D612-FEFCBF48B467}"/>
+                  </a:ext>
+                </a:extLst>
+              </p:cNvPr>
+              <p:cNvSpPr txBox="1"/>
+              <p:nvPr/>
+            </p:nvSpPr>
+            <p:spPr>
+              <a:xfrm>
+                <a:off x="1779098" y="2924445"/>
+                <a:ext cx="385042" cy="369332"/>
+              </a:xfrm>
+              <a:prstGeom prst="rect">
+                <a:avLst/>
+              </a:prstGeom>
+              <a:noFill/>
+            </p:spPr>
+            <p:txBody>
+              <a:bodyPr wrap="none" rtlCol="0">
+                <a:spAutoFit/>
+              </a:bodyPr>
+              <a:lstStyle/>
+              <a:p>
+                <a:r>
+                  <a:rPr lang="de-DE" dirty="0">
+                    <a:solidFill>
+                      <a:schemeClr val="tx2">
+                        <a:lumMod val="60000"/>
+                        <a:lumOff val="40000"/>
+                      </a:schemeClr>
+                    </a:solidFill>
+                  </a:rPr>
+                  <a:t>u</a:t>
+                </a:r>
+                <a:r>
+                  <a:rPr lang="de-DE" baseline="-25000" dirty="0">
+                    <a:solidFill>
+                      <a:schemeClr val="tx2">
+                        <a:lumMod val="60000"/>
+                        <a:lumOff val="40000"/>
+                      </a:schemeClr>
+                    </a:solidFill>
+                  </a:rPr>
+                  <a:t>1</a:t>
+                </a:r>
+              </a:p>
+            </p:txBody>
+          </p:sp>
+          <p:sp>
+            <p:nvSpPr>
+              <p:cNvPr id="7" name="Textfeld 6">
+                <a:extLst>
+                  <a:ext uri="{FF2B5EF4-FFF2-40B4-BE49-F238E27FC236}">
+                    <a16:creationId xmlns:a16="http://schemas.microsoft.com/office/drawing/2014/main" id="{3D10BB01-DE59-B3C6-CA5D-BA94CCBB13C7}"/>
+                  </a:ext>
+                </a:extLst>
+              </p:cNvPr>
+              <p:cNvSpPr txBox="1"/>
+              <p:nvPr/>
+            </p:nvSpPr>
+            <p:spPr>
+              <a:xfrm>
+                <a:off x="7305506" y="2924445"/>
+                <a:ext cx="385042" cy="369332"/>
+              </a:xfrm>
+              <a:prstGeom prst="rect">
+                <a:avLst/>
+              </a:prstGeom>
+              <a:noFill/>
+            </p:spPr>
+            <p:txBody>
+              <a:bodyPr wrap="none" rtlCol="0">
+                <a:spAutoFit/>
+              </a:bodyPr>
+              <a:lstStyle/>
+              <a:p>
+                <a:r>
+                  <a:rPr lang="de-DE" dirty="0">
+                    <a:solidFill>
+                      <a:schemeClr val="tx2">
+                        <a:lumMod val="60000"/>
+                        <a:lumOff val="40000"/>
+                      </a:schemeClr>
+                    </a:solidFill>
+                  </a:rPr>
+                  <a:t>u</a:t>
+                </a:r>
+                <a:r>
+                  <a:rPr lang="de-DE" baseline="-25000" dirty="0">
+                    <a:solidFill>
+                      <a:schemeClr val="tx2">
+                        <a:lumMod val="60000"/>
+                        <a:lumOff val="40000"/>
+                      </a:schemeClr>
+                    </a:solidFill>
+                  </a:rPr>
+                  <a:t>2</a:t>
+                </a:r>
+              </a:p>
+            </p:txBody>
+          </p:sp>
+          <p:cxnSp>
+            <p:nvCxnSpPr>
+              <p:cNvPr id="11" name="Gerade Verbindung mit Pfeil 10">
+                <a:extLst>
+                  <a:ext uri="{FF2B5EF4-FFF2-40B4-BE49-F238E27FC236}">
+                    <a16:creationId xmlns:a16="http://schemas.microsoft.com/office/drawing/2014/main" id="{00E22E7E-753B-A82C-68D5-E5F955537066}"/>
+                  </a:ext>
+                </a:extLst>
+              </p:cNvPr>
+              <p:cNvCxnSpPr/>
+              <p:nvPr/>
+            </p:nvCxnSpPr>
+            <p:spPr>
+              <a:xfrm>
+                <a:off x="2411760" y="2708920"/>
+                <a:ext cx="360040" cy="0"/>
+              </a:xfrm>
+              <a:prstGeom prst="straightConnector1">
+                <a:avLst/>
+              </a:prstGeom>
+              <a:ln>
+                <a:solidFill>
+                  <a:srgbClr val="FF0000"/>
+                </a:solidFill>
+                <a:tailEnd type="triangle"/>
+              </a:ln>
+            </p:spPr>
+            <p:style>
+              <a:lnRef idx="1">
+                <a:schemeClr val="accent1"/>
+              </a:lnRef>
+              <a:fillRef idx="0">
+                <a:schemeClr val="accent1"/>
+              </a:fillRef>
+              <a:effectRef idx="0">
+                <a:schemeClr val="accent1"/>
+              </a:effectRef>
+              <a:fontRef idx="minor">
+                <a:schemeClr val="tx1"/>
+              </a:fontRef>
+            </p:style>
+          </p:cxnSp>
+          <p:cxnSp>
+            <p:nvCxnSpPr>
+              <p:cNvPr id="12" name="Gerade Verbindung mit Pfeil 11">
+                <a:extLst>
+                  <a:ext uri="{FF2B5EF4-FFF2-40B4-BE49-F238E27FC236}">
+                    <a16:creationId xmlns:a16="http://schemas.microsoft.com/office/drawing/2014/main" id="{CCCC3D4E-9A2F-D2C2-C088-94CB3F983C1E}"/>
+                  </a:ext>
+                </a:extLst>
+              </p:cNvPr>
+              <p:cNvCxnSpPr/>
+              <p:nvPr/>
+            </p:nvCxnSpPr>
+            <p:spPr>
+              <a:xfrm>
+                <a:off x="6300192" y="2636912"/>
+                <a:ext cx="360040" cy="0"/>
+              </a:xfrm>
+              <a:prstGeom prst="straightConnector1">
+                <a:avLst/>
+              </a:prstGeom>
+              <a:ln>
+                <a:solidFill>
+                  <a:srgbClr val="FF0000"/>
+                </a:solidFill>
+                <a:tailEnd type="triangle"/>
+              </a:ln>
+            </p:spPr>
+            <p:style>
+              <a:lnRef idx="1">
+                <a:schemeClr val="accent1"/>
+              </a:lnRef>
+              <a:fillRef idx="0">
+                <a:schemeClr val="accent1"/>
+              </a:fillRef>
+              <a:effectRef idx="0">
+                <a:schemeClr val="accent1"/>
+              </a:effectRef>
+              <a:fontRef idx="minor">
+                <a:schemeClr val="tx1"/>
+              </a:fontRef>
+            </p:style>
+          </p:cxnSp>
+          <p:sp>
+            <p:nvSpPr>
+              <p:cNvPr id="13" name="Textfeld 12">
+                <a:extLst>
+                  <a:ext uri="{FF2B5EF4-FFF2-40B4-BE49-F238E27FC236}">
+                    <a16:creationId xmlns:a16="http://schemas.microsoft.com/office/drawing/2014/main" id="{BFCA14B1-28E1-F2C2-0DCE-EE98F86D2D80}"/>
+                  </a:ext>
+                </a:extLst>
+              </p:cNvPr>
+              <p:cNvSpPr txBox="1"/>
+              <p:nvPr/>
+            </p:nvSpPr>
+            <p:spPr>
+              <a:xfrm>
+                <a:off x="2411760" y="2339588"/>
+                <a:ext cx="316112" cy="369332"/>
+              </a:xfrm>
+              <a:prstGeom prst="rect">
+                <a:avLst/>
+              </a:prstGeom>
+              <a:noFill/>
+            </p:spPr>
+            <p:txBody>
+              <a:bodyPr wrap="none" rtlCol="0">
+                <a:spAutoFit/>
+              </a:bodyPr>
+              <a:lstStyle/>
+              <a:p>
+                <a:r>
+                  <a:rPr lang="de-DE" dirty="0">
+                    <a:solidFill>
+                      <a:srgbClr val="FF0000"/>
+                    </a:solidFill>
+                  </a:rPr>
+                  <a:t>i</a:t>
+                </a:r>
+                <a:r>
+                  <a:rPr lang="de-DE" baseline="-25000" dirty="0">
+                    <a:solidFill>
+                      <a:srgbClr val="FF0000"/>
+                    </a:solidFill>
+                  </a:rPr>
+                  <a:t>1</a:t>
+                </a:r>
+              </a:p>
+            </p:txBody>
+          </p:sp>
+          <p:sp>
+            <p:nvSpPr>
+              <p:cNvPr id="14" name="Textfeld 13">
+                <a:extLst>
+                  <a:ext uri="{FF2B5EF4-FFF2-40B4-BE49-F238E27FC236}">
+                    <a16:creationId xmlns:a16="http://schemas.microsoft.com/office/drawing/2014/main" id="{76727ACA-808A-1200-79D6-38B6DEC4049F}"/>
+                  </a:ext>
+                </a:extLst>
+              </p:cNvPr>
+              <p:cNvSpPr txBox="1"/>
+              <p:nvPr/>
+            </p:nvSpPr>
+            <p:spPr>
+              <a:xfrm>
+                <a:off x="6323705" y="2267580"/>
+                <a:ext cx="316112" cy="369332"/>
+              </a:xfrm>
+              <a:prstGeom prst="rect">
+                <a:avLst/>
+              </a:prstGeom>
+              <a:noFill/>
+            </p:spPr>
+            <p:txBody>
+              <a:bodyPr wrap="none" rtlCol="0">
+                <a:spAutoFit/>
+              </a:bodyPr>
+              <a:lstStyle/>
+              <a:p>
+                <a:r>
+                  <a:rPr lang="de-DE" dirty="0">
+                    <a:solidFill>
+                      <a:srgbClr val="FF0000"/>
+                    </a:solidFill>
+                  </a:rPr>
+                  <a:t>i</a:t>
+                </a:r>
+                <a:r>
+                  <a:rPr lang="de-DE" baseline="-25000" dirty="0">
+                    <a:solidFill>
+                      <a:srgbClr val="FF0000"/>
+                    </a:solidFill>
+                  </a:rPr>
+                  <a:t>2</a:t>
+                </a:r>
+              </a:p>
+            </p:txBody>
+          </p:sp>
+          <p:sp>
+            <p:nvSpPr>
+              <p:cNvPr id="16" name="Textfeld 15">
+                <a:extLst>
+                  <a:ext uri="{FF2B5EF4-FFF2-40B4-BE49-F238E27FC236}">
+                    <a16:creationId xmlns:a16="http://schemas.microsoft.com/office/drawing/2014/main" id="{5864A2B3-3D3F-CDC5-B5AC-D43F19B8F0FE}"/>
+                  </a:ext>
+                </a:extLst>
+              </p:cNvPr>
+              <p:cNvSpPr txBox="1"/>
+              <p:nvPr/>
+            </p:nvSpPr>
+            <p:spPr>
+              <a:xfrm>
+                <a:off x="2591780" y="3134991"/>
+                <a:ext cx="432048" cy="369332"/>
+              </a:xfrm>
+              <a:prstGeom prst="rect">
+                <a:avLst/>
+              </a:prstGeom>
+              <a:noFill/>
+            </p:spPr>
+            <p:txBody>
+              <a:bodyPr wrap="square">
+                <a:spAutoFit/>
+              </a:bodyPr>
+              <a:lstStyle/>
+              <a:p>
+                <a:r>
+                  <a:rPr lang="de-DE" dirty="0"/>
+                  <a:t>N</a:t>
+                </a:r>
+                <a:r>
+                  <a:rPr lang="de-DE" baseline="-25000" dirty="0"/>
+                  <a:t>1</a:t>
+                </a:r>
+              </a:p>
+            </p:txBody>
+          </p:sp>
+          <p:sp>
+            <p:nvSpPr>
+              <p:cNvPr id="17" name="Textfeld 16">
+                <a:extLst>
+                  <a:ext uri="{FF2B5EF4-FFF2-40B4-BE49-F238E27FC236}">
+                    <a16:creationId xmlns:a16="http://schemas.microsoft.com/office/drawing/2014/main" id="{C6FA19F2-65DF-9F2D-1A9F-9F4D3955F3D2}"/>
+                  </a:ext>
+                </a:extLst>
+              </p:cNvPr>
+              <p:cNvSpPr txBox="1"/>
+              <p:nvPr/>
+            </p:nvSpPr>
+            <p:spPr>
+              <a:xfrm>
+                <a:off x="6248064" y="3037613"/>
+                <a:ext cx="432048" cy="369332"/>
+              </a:xfrm>
+              <a:prstGeom prst="rect">
+                <a:avLst/>
+              </a:prstGeom>
+              <a:noFill/>
+            </p:spPr>
+            <p:txBody>
+              <a:bodyPr wrap="square">
+                <a:spAutoFit/>
+              </a:bodyPr>
+              <a:lstStyle/>
+              <a:p>
+                <a:r>
+                  <a:rPr lang="de-DE" dirty="0"/>
+                  <a:t>N</a:t>
+                </a:r>
+                <a:r>
+                  <a:rPr lang="de-DE" baseline="-25000" dirty="0"/>
+                  <a:t>2</a:t>
+                </a:r>
+              </a:p>
+            </p:txBody>
+          </p:sp>
+          <mc:AlternateContent xmlns:mc="http://schemas.openxmlformats.org/markup-compatibility/2006">
+            <mc:Choice xmlns:a14="http://schemas.microsoft.com/office/drawing/2010/main" Requires="a14">
+              <p:sp>
+                <p:nvSpPr>
+                  <p:cNvPr id="22" name="Textfeld 21">
+                    <a:extLst>
+                      <a:ext uri="{FF2B5EF4-FFF2-40B4-BE49-F238E27FC236}">
+                        <a16:creationId xmlns:a16="http://schemas.microsoft.com/office/drawing/2014/main" id="{582A74F8-71A8-6B06-4AD6-DAE1294AC062}"/>
+                      </a:ext>
+                    </a:extLst>
+                  </p:cNvPr>
+                  <p:cNvSpPr txBox="1"/>
+                  <p:nvPr/>
+                </p:nvSpPr>
+                <p:spPr>
+                  <a:xfrm>
+                    <a:off x="4301833" y="2924445"/>
+                    <a:ext cx="492443" cy="614142"/>
+                  </a:xfrm>
+                  <a:prstGeom prst="rect">
+                    <a:avLst/>
+                  </a:prstGeom>
+                  <a:noFill/>
+                </p:spPr>
+                <p:txBody>
+                  <a:bodyPr wrap="none" rtlCol="0">
+                    <a:spAutoFit/>
+                  </a:bodyPr>
+                  <a:lstStyle/>
+                  <a:p>
+                    <a14:m>
+                      <m:oMathPara xmlns:m="http://schemas.openxmlformats.org/officeDocument/2006/math">
+                        <m:oMathParaPr>
+                          <m:jc m:val="centerGroup"/>
+                        </m:oMathParaPr>
+                        <m:oMath xmlns:m="http://schemas.openxmlformats.org/officeDocument/2006/math">
+                          <m:f>
+                            <m:fPr>
+                              <m:ctrlPr>
+                                <a:rPr lang="el-GR" smtClean="0">
+                                  <a:solidFill>
+                                    <a:schemeClr val="accent6">
+                                      <a:lumMod val="75000"/>
+                                    </a:schemeClr>
+                                  </a:solidFill>
+                                  <a:latin typeface="Cambria Math" panose="02040503050406030204" pitchFamily="18" charset="0"/>
+                                </a:rPr>
+                              </m:ctrlPr>
+                            </m:fPr>
+                            <m:num>
+                              <m:r>
+                                <m:rPr>
+                                  <m:nor/>
+                                </m:rPr>
+                                <a:rPr lang="de-DE" dirty="0">
+                                  <a:solidFill>
+                                    <a:schemeClr val="accent6">
+                                      <a:lumMod val="75000"/>
+                                    </a:schemeClr>
+                                  </a:solidFill>
+                                </a:rPr>
+                                <m:t>d</m:t>
+                              </m:r>
+                              <m:r>
+                                <m:rPr>
+                                  <m:nor/>
+                                </m:rPr>
+                                <a:rPr lang="el-GR" dirty="0">
+                                  <a:solidFill>
+                                    <a:schemeClr val="accent6">
+                                      <a:lumMod val="75000"/>
+                                    </a:schemeClr>
+                                  </a:solidFill>
+                                </a:rPr>
+                                <m:t>φ</m:t>
+                              </m:r>
+                            </m:num>
+                            <m:den>
+                              <m:r>
+                                <m:rPr>
+                                  <m:sty m:val="p"/>
+                                </m:rPr>
+                                <a:rPr lang="de-DE" b="0" i="0" smtClean="0">
+                                  <a:solidFill>
+                                    <a:schemeClr val="accent6">
+                                      <a:lumMod val="75000"/>
+                                    </a:schemeClr>
+                                  </a:solidFill>
+                                  <a:latin typeface="Cambria Math" panose="02040503050406030204" pitchFamily="18" charset="0"/>
+                                </a:rPr>
+                                <m:t>dt</m:t>
+                              </m:r>
+                            </m:den>
+                          </m:f>
+                        </m:oMath>
+                      </m:oMathPara>
+                    </a14:m>
+                    <a:endParaRPr lang="de-DE" baseline="-25000" dirty="0">
+                      <a:solidFill>
+                        <a:schemeClr val="accent6">
+                          <a:lumMod val="75000"/>
+                        </a:schemeClr>
+                      </a:solidFill>
+                    </a:endParaRPr>
+                  </a:p>
+                </p:txBody>
+              </p:sp>
+            </mc:Choice>
+            <mc:Fallback>
+              <p:sp>
+                <p:nvSpPr>
+                  <p:cNvPr id="22" name="Textfeld 21">
+                    <a:extLst>
+                      <a:ext uri="{FF2B5EF4-FFF2-40B4-BE49-F238E27FC236}">
+                        <a16:creationId xmlns:a16="http://schemas.microsoft.com/office/drawing/2014/main" id="{582A74F8-71A8-6B06-4AD6-DAE1294AC062}"/>
+                      </a:ext>
+                    </a:extLst>
+                  </p:cNvPr>
+                  <p:cNvSpPr txBox="1">
+                    <a:spLocks noRot="1" noChangeAspect="1" noMove="1" noResize="1" noEditPoints="1" noAdjustHandles="1" noChangeArrowheads="1" noChangeShapeType="1" noTextEdit="1"/>
+                  </p:cNvSpPr>
+                  <p:nvPr/>
+                </p:nvSpPr>
+                <p:spPr>
+                  <a:xfrm>
+                    <a:off x="4301833" y="2924445"/>
+                    <a:ext cx="492443" cy="614142"/>
+                  </a:xfrm>
+                  <a:prstGeom prst="rect">
+                    <a:avLst/>
+                  </a:prstGeom>
+                  <a:blipFill>
+                    <a:blip r:embed="rId3"/>
+                    <a:stretch>
+                      <a:fillRect/>
+                    </a:stretch>
+                  </a:blipFill>
+                </p:spPr>
+                <p:txBody>
+                  <a:bodyPr/>
+                  <a:lstStyle/>
+                  <a:p>
+                    <a:r>
+                      <a:rPr lang="de-DE">
+                        <a:noFill/>
+                      </a:rPr>
+                      <a:t> </a:t>
+                    </a:r>
+                  </a:p>
+                </p:txBody>
+              </p:sp>
+            </mc:Fallback>
+          </mc:AlternateContent>
+          <p:sp>
+            <p:nvSpPr>
+              <p:cNvPr id="23" name="Bogen 22">
+                <a:extLst>
+                  <a:ext uri="{FF2B5EF4-FFF2-40B4-BE49-F238E27FC236}">
+                    <a16:creationId xmlns:a16="http://schemas.microsoft.com/office/drawing/2014/main" id="{A9F285DC-1145-BE9A-B34B-9B600C1BEA35}"/>
+                  </a:ext>
+                </a:extLst>
+              </p:cNvPr>
+              <p:cNvSpPr/>
+              <p:nvPr/>
+            </p:nvSpPr>
+            <p:spPr>
+              <a:xfrm>
+                <a:off x="2984736" y="2553625"/>
+                <a:ext cx="3058591" cy="741640"/>
+              </a:xfrm>
+              <a:prstGeom prst="arc">
+                <a:avLst>
+                  <a:gd name="adj1" fmla="val 11512555"/>
+                  <a:gd name="adj2" fmla="val 20760159"/>
+                </a:avLst>
+              </a:prstGeom>
+              <a:ln>
+                <a:solidFill>
+                  <a:schemeClr val="accent6">
+                    <a:lumMod val="75000"/>
+                  </a:schemeClr>
+                </a:solidFill>
+                <a:tailEnd type="triangle"/>
+              </a:ln>
+            </p:spPr>
+            <p:style>
+              <a:lnRef idx="1">
+                <a:schemeClr val="accent1"/>
+              </a:lnRef>
+              <a:fillRef idx="0">
+                <a:schemeClr val="accent1"/>
+              </a:fillRef>
+              <a:effectRef idx="0">
+                <a:schemeClr val="accent1"/>
+              </a:effectRef>
+              <a:fontRef idx="minor">
+                <a:schemeClr val="tx1"/>
+              </a:fontRef>
+            </p:style>
+            <p:txBody>
+              <a:bodyPr rtlCol="0" anchor="ctr"/>
+              <a:lstStyle/>
+              <a:p>
+                <a:pPr algn="ctr"/>
+                <a:endParaRPr lang="de-DE"/>
+              </a:p>
+            </p:txBody>
+          </p:sp>
+          <p:sp>
+            <p:nvSpPr>
+              <p:cNvPr id="24" name="Bogen 23">
+                <a:extLst>
+                  <a:ext uri="{FF2B5EF4-FFF2-40B4-BE49-F238E27FC236}">
+                    <a16:creationId xmlns:a16="http://schemas.microsoft.com/office/drawing/2014/main" id="{4A2AEA3C-6906-4264-D727-69E05856E2C2}"/>
+                  </a:ext>
+                </a:extLst>
+              </p:cNvPr>
+              <p:cNvSpPr/>
+              <p:nvPr/>
+            </p:nvSpPr>
+            <p:spPr>
+              <a:xfrm rot="10800000">
+                <a:off x="2915816" y="3504323"/>
+                <a:ext cx="3058591" cy="741640"/>
+              </a:xfrm>
+              <a:prstGeom prst="arc">
+                <a:avLst>
+                  <a:gd name="adj1" fmla="val 11512555"/>
+                  <a:gd name="adj2" fmla="val 20760159"/>
+                </a:avLst>
+              </a:prstGeom>
+              <a:ln>
+                <a:solidFill>
+                  <a:schemeClr val="accent6">
+                    <a:lumMod val="75000"/>
+                  </a:schemeClr>
+                </a:solidFill>
+                <a:tailEnd type="triangle"/>
+              </a:ln>
+            </p:spPr>
+            <p:style>
+              <a:lnRef idx="1">
+                <a:schemeClr val="accent1"/>
+              </a:lnRef>
+              <a:fillRef idx="0">
+                <a:schemeClr val="accent1"/>
+              </a:fillRef>
+              <a:effectRef idx="0">
+                <a:schemeClr val="accent1"/>
+              </a:effectRef>
+              <a:fontRef idx="minor">
+                <a:schemeClr val="tx1"/>
+              </a:fontRef>
+            </p:style>
+            <p:txBody>
+              <a:bodyPr rtlCol="0" anchor="ctr"/>
+              <a:lstStyle/>
+              <a:p>
+                <a:pPr algn="ctr"/>
+                <a:endParaRPr lang="de-DE"/>
+              </a:p>
+            </p:txBody>
+          </p:sp>
+        </p:grpSp>
+        <mc:AlternateContent xmlns:mc="http://schemas.openxmlformats.org/markup-compatibility/2006">
+          <mc:Choice xmlns:a14="http://schemas.microsoft.com/office/drawing/2010/main" Requires="a14">
+            <p:graphicFrame>
+              <p:nvGraphicFramePr>
+                <p:cNvPr id="28" name="Diagramm 27">
+                  <a:extLst>
+                    <a:ext uri="{FF2B5EF4-FFF2-40B4-BE49-F238E27FC236}">
+                      <a16:creationId xmlns:a16="http://schemas.microsoft.com/office/drawing/2014/main" id="{22D0C0BE-B0B0-E15D-D776-0A254CCD08FD}"/>
+                    </a:ext>
+                  </a:extLst>
+                </p:cNvPr>
+                <p:cNvGraphicFramePr/>
+                <p:nvPr>
+                  <p:extLst>
+                    <p:ext uri="{D42A27DB-BD31-4B8C-83A1-F6EECF244321}">
+                      <p14:modId xmlns:p14="http://schemas.microsoft.com/office/powerpoint/2010/main" val="1559987264"/>
+                    </p:ext>
+                  </p:extLst>
+                </p:nvPr>
+              </p:nvGraphicFramePr>
+              <p:xfrm>
+                <a:off x="1147798" y="2771736"/>
+                <a:ext cx="1508109" cy="1196949"/>
+              </p:xfrm>
+              <a:graphic>
+                <a:graphicData uri="http://schemas.openxmlformats.org/drawingml/2006/chart">
+                  <c:chart xmlns:c="http://schemas.openxmlformats.org/drawingml/2006/chart" xmlns:r="http://schemas.openxmlformats.org/officeDocument/2006/relationships" r:id="rId4"/>
+                </a:graphicData>
+              </a:graphic>
+            </p:graphicFrame>
+          </mc:Choice>
+          <mc:Fallback>
+            <p:graphicFrame>
+              <p:nvGraphicFramePr>
+                <p:cNvPr id="28" name="Diagramm 27">
+                  <a:extLst>
+                    <a:ext uri="{FF2B5EF4-FFF2-40B4-BE49-F238E27FC236}">
+                      <a16:creationId xmlns:a16="http://schemas.microsoft.com/office/drawing/2014/main" id="{22D0C0BE-B0B0-E15D-D776-0A254CCD08FD}"/>
+                    </a:ext>
+                  </a:extLst>
+                </p:cNvPr>
+                <p:cNvGraphicFramePr/>
+                <p:nvPr>
+                  <p:extLst>
+                    <p:ext uri="{D42A27DB-BD31-4B8C-83A1-F6EECF244321}">
+                      <p14:modId xmlns:p14="http://schemas.microsoft.com/office/powerpoint/2010/main" val="1559987264"/>
+                    </p:ext>
+                  </p:extLst>
+                </p:nvPr>
+              </p:nvGraphicFramePr>
+              <p:xfrm>
+                <a:off x="1147798" y="2771736"/>
+                <a:ext cx="1508109" cy="1196949"/>
+              </p:xfrm>
+              <a:graphic>
+                <a:graphicData uri="http://schemas.openxmlformats.org/drawingml/2006/chart">
+                  <c:chart xmlns:c="http://schemas.openxmlformats.org/drawingml/2006/chart" xmlns:r="http://schemas.openxmlformats.org/officeDocument/2006/relationships" r:id="rId4"/>
+                </a:graphicData>
+              </a:graphic>
+            </p:graphicFrame>
+          </mc:Fallback>
+        </mc:AlternateContent>
+        <mc:AlternateContent xmlns:mc="http://schemas.openxmlformats.org/markup-compatibility/2006">
+          <mc:Choice xmlns:a14="http://schemas.microsoft.com/office/drawing/2010/main" Requires="a14">
+            <p:graphicFrame>
+              <p:nvGraphicFramePr>
+                <p:cNvPr id="29" name="Diagramm 28">
+                  <a:extLst>
+                    <a:ext uri="{FF2B5EF4-FFF2-40B4-BE49-F238E27FC236}">
+                      <a16:creationId xmlns:a16="http://schemas.microsoft.com/office/drawing/2014/main" id="{AB2D630A-1FBB-2711-471F-FC4F8A7B62BE}"/>
+                    </a:ext>
+                  </a:extLst>
+                </p:cNvPr>
+                <p:cNvGraphicFramePr/>
+                <p:nvPr>
+                  <p:extLst>
+                    <p:ext uri="{D42A27DB-BD31-4B8C-83A1-F6EECF244321}">
+                      <p14:modId xmlns:p14="http://schemas.microsoft.com/office/powerpoint/2010/main" val="22580397"/>
+                    </p:ext>
+                  </p:extLst>
+                </p:nvPr>
+              </p:nvGraphicFramePr>
+              <p:xfrm>
+                <a:off x="6680614" y="2795062"/>
+                <a:ext cx="1508109" cy="1049189"/>
+              </p:xfrm>
+              <a:graphic>
+                <a:graphicData uri="http://schemas.openxmlformats.org/drawingml/2006/chart">
+                  <c:chart xmlns:c="http://schemas.openxmlformats.org/drawingml/2006/chart" xmlns:r="http://schemas.openxmlformats.org/officeDocument/2006/relationships" r:id="rId5"/>
+                </a:graphicData>
+              </a:graphic>
+            </p:graphicFrame>
+          </mc:Choice>
+          <mc:Fallback>
+            <p:graphicFrame>
+              <p:nvGraphicFramePr>
+                <p:cNvPr id="29" name="Diagramm 28">
+                  <a:extLst>
+                    <a:ext uri="{FF2B5EF4-FFF2-40B4-BE49-F238E27FC236}">
+                      <a16:creationId xmlns:a16="http://schemas.microsoft.com/office/drawing/2014/main" id="{AB2D630A-1FBB-2711-471F-FC4F8A7B62BE}"/>
+                    </a:ext>
+                  </a:extLst>
+                </p:cNvPr>
+                <p:cNvGraphicFramePr/>
+                <p:nvPr>
+                  <p:extLst>
+                    <p:ext uri="{D42A27DB-BD31-4B8C-83A1-F6EECF244321}">
+                      <p14:modId xmlns:p14="http://schemas.microsoft.com/office/powerpoint/2010/main" val="22580397"/>
+                    </p:ext>
+                  </p:extLst>
+                </p:nvPr>
+              </p:nvGraphicFramePr>
+              <p:xfrm>
+                <a:off x="6680614" y="2795062"/>
+                <a:ext cx="1508109" cy="1049189"/>
+              </p:xfrm>
+              <a:graphic>
+                <a:graphicData uri="http://schemas.openxmlformats.org/drawingml/2006/chart">
+                  <c:chart xmlns:c="http://schemas.openxmlformats.org/drawingml/2006/chart" xmlns:r="http://schemas.openxmlformats.org/officeDocument/2006/relationships" r:id="rId5"/>
+                </a:graphicData>
+              </a:graphic>
+            </p:graphicFrame>
+          </mc:Fallback>
+        </mc:AlternateContent>
+      </p:grpSp>
+    </p:spTree>
+    <p:extLst>
+      <p:ext uri="{BB962C8B-B14F-4D97-AF65-F5344CB8AC3E}">
+        <p14:creationId xmlns:p14="http://schemas.microsoft.com/office/powerpoint/2010/main" val="3022740043"/>
+      </p:ext>
+    </p:extLst>
+  </p:cSld>
+  <p:clrMapOvr>
+    <a:masterClrMapping/>
+  </p:clrMapOvr>
+</p:sld>
+</file>
+
+<file path=ppt/slides/slide3.xml><?xml version="1.0" encoding="utf-8"?>
+<p:sld xmlns:a="http://schemas.openxmlformats.org/drawingml/2006/main" xmlns:r="http://schemas.openxmlformats.org/officeDocument/2006/relationships" xmlns:p="http://schemas.openxmlformats.org/presentationml/2006/main">
+  <p:cSld>
+    <p:spTree>
+      <p:nvGrpSpPr>
+        <p:cNvPr id="1" name=""/>
+        <p:cNvGrpSpPr/>
+        <p:nvPr/>
+      </p:nvGrpSpPr>
+      <p:grpSpPr>
+        <a:xfrm>
+          <a:off x="0" y="0"/>
+          <a:ext cx="0" cy="0"/>
+          <a:chOff x="0" y="0"/>
+          <a:chExt cx="0" cy="0"/>
+        </a:xfrm>
+      </p:grpSpPr>
+      <p:grpSp>
+        <p:nvGrpSpPr>
+          <p:cNvPr id="17" name="Gruppieren 16">
+            <a:extLst>
+              <a:ext uri="{FF2B5EF4-FFF2-40B4-BE49-F238E27FC236}">
+                <a16:creationId xmlns:a16="http://schemas.microsoft.com/office/drawing/2014/main" id="{CA68B292-1061-B37E-FF96-81CACE3D8D52}"/>
+              </a:ext>
+            </a:extLst>
+          </p:cNvPr>
+          <p:cNvGrpSpPr/>
+          <p:nvPr/>
+        </p:nvGrpSpPr>
+        <p:grpSpPr>
+          <a:xfrm>
+            <a:off x="773149" y="2219803"/>
+            <a:ext cx="7669760" cy="1702523"/>
+            <a:chOff x="773149" y="2219803"/>
+            <a:chExt cx="7669760" cy="1702523"/>
+          </a:xfrm>
+        </p:grpSpPr>
+        <p:pic>
+          <p:nvPicPr>
+            <p:cNvPr id="7" name="Grafik 6">
+              <a:extLst>
+                <a:ext uri="{FF2B5EF4-FFF2-40B4-BE49-F238E27FC236}">
+                  <a16:creationId xmlns:a16="http://schemas.microsoft.com/office/drawing/2014/main" id="{B3EF7D70-E26F-06C2-C3AF-83E9211BFDD4}"/>
+                </a:ext>
+              </a:extLst>
+            </p:cNvPr>
+            <p:cNvPicPr>
+              <a:picLocks noChangeAspect="1"/>
+            </p:cNvPicPr>
+            <p:nvPr/>
+          </p:nvPicPr>
+          <p:blipFill>
+            <a:blip r:embed="rId2"/>
+            <a:stretch>
+              <a:fillRect/>
+            </a:stretch>
+          </p:blipFill>
+          <p:spPr>
+            <a:xfrm>
+              <a:off x="3843908" y="2331651"/>
+              <a:ext cx="1600200" cy="1590675"/>
+            </a:xfrm>
+            <a:prstGeom prst="rect">
+              <a:avLst/>
+            </a:prstGeom>
+          </p:spPr>
+        </p:pic>
+        <p:graphicFrame>
+          <p:nvGraphicFramePr>
+            <p:cNvPr id="10" name="Diagramm 9">
+              <a:extLst>
+                <a:ext uri="{FF2B5EF4-FFF2-40B4-BE49-F238E27FC236}">
+                  <a16:creationId xmlns:a16="http://schemas.microsoft.com/office/drawing/2014/main" id="{44D797F7-F82D-D650-9DA8-1FDBA5950371}"/>
+                </a:ext>
+              </a:extLst>
+            </p:cNvPr>
+            <p:cNvGraphicFramePr/>
+            <p:nvPr>
+              <p:extLst>
+                <p:ext uri="{D42A27DB-BD31-4B8C-83A1-F6EECF244321}">
+                  <p14:modId xmlns:p14="http://schemas.microsoft.com/office/powerpoint/2010/main" val="1008831600"/>
+                </p:ext>
+              </p:extLst>
+            </p:nvPr>
+          </p:nvGraphicFramePr>
+          <p:xfrm>
+            <a:off x="4860032" y="2331651"/>
+            <a:ext cx="3582877" cy="1006696"/>
+          </p:xfrm>
+          <a:graphic>
+            <a:graphicData uri="http://schemas.openxmlformats.org/drawingml/2006/chart">
+              <c:chart xmlns:c="http://schemas.openxmlformats.org/drawingml/2006/chart" xmlns:r="http://schemas.openxmlformats.org/officeDocument/2006/relationships" r:id="rId3"/>
+            </a:graphicData>
+          </a:graphic>
+        </p:graphicFrame>
+        <p:graphicFrame>
+          <p:nvGraphicFramePr>
+            <p:cNvPr id="12" name="Diagramm 11">
+              <a:extLst>
+                <a:ext uri="{FF2B5EF4-FFF2-40B4-BE49-F238E27FC236}">
+                  <a16:creationId xmlns:a16="http://schemas.microsoft.com/office/drawing/2014/main" id="{82EBE0DF-2EC7-0F2A-DD72-FB41236BF4CE}"/>
+                </a:ext>
+              </a:extLst>
+            </p:cNvPr>
+            <p:cNvGraphicFramePr/>
+            <p:nvPr>
+              <p:extLst>
+                <p:ext uri="{D42A27DB-BD31-4B8C-83A1-F6EECF244321}">
+                  <p14:modId xmlns:p14="http://schemas.microsoft.com/office/powerpoint/2010/main" val="4116134004"/>
+                </p:ext>
+              </p:extLst>
+            </p:nvPr>
+          </p:nvGraphicFramePr>
+          <p:xfrm>
+            <a:off x="773149" y="2420888"/>
+            <a:ext cx="2584276" cy="1201423"/>
+          </p:xfrm>
+          <a:graphic>
+            <a:graphicData uri="http://schemas.openxmlformats.org/drawingml/2006/chart">
+              <c:chart xmlns:c="http://schemas.openxmlformats.org/drawingml/2006/chart" xmlns:r="http://schemas.openxmlformats.org/officeDocument/2006/relationships" r:id="rId4"/>
+            </a:graphicData>
+          </a:graphic>
+        </p:graphicFrame>
+        <p:sp>
+          <p:nvSpPr>
+            <p:cNvPr id="14" name="Textfeld 13">
+              <a:extLst>
+                <a:ext uri="{FF2B5EF4-FFF2-40B4-BE49-F238E27FC236}">
+                  <a16:creationId xmlns:a16="http://schemas.microsoft.com/office/drawing/2014/main" id="{9648F62E-2B1C-EEC7-5C29-195DBFC4D4F6}"/>
+                </a:ext>
+              </a:extLst>
+            </p:cNvPr>
+            <p:cNvSpPr txBox="1"/>
+            <p:nvPr/>
+          </p:nvSpPr>
+          <p:spPr>
+            <a:xfrm>
+              <a:off x="3458866" y="2836933"/>
+              <a:ext cx="385042" cy="369332"/>
+            </a:xfrm>
+            <a:prstGeom prst="rect">
+              <a:avLst/>
+            </a:prstGeom>
+            <a:noFill/>
+          </p:spPr>
+          <p:txBody>
+            <a:bodyPr wrap="none" rtlCol="0">
+              <a:spAutoFit/>
+            </a:bodyPr>
+            <a:lstStyle/>
+            <a:p>
+              <a:r>
+                <a:rPr lang="de-DE" dirty="0">
+                  <a:solidFill>
+                    <a:srgbClr val="0070C0"/>
+                  </a:solidFill>
+                </a:rPr>
+                <a:t>u</a:t>
+              </a:r>
+              <a:r>
+                <a:rPr lang="de-DE" baseline="-25000" dirty="0">
+                  <a:solidFill>
+                    <a:srgbClr val="0070C0"/>
+                  </a:solidFill>
+                </a:rPr>
+                <a:t>1</a:t>
+              </a:r>
+            </a:p>
+          </p:txBody>
+        </p:sp>
+        <p:sp>
+          <p:nvSpPr>
+            <p:cNvPr id="15" name="Textfeld 14">
+              <a:extLst>
+                <a:ext uri="{FF2B5EF4-FFF2-40B4-BE49-F238E27FC236}">
+                  <a16:creationId xmlns:a16="http://schemas.microsoft.com/office/drawing/2014/main" id="{8E9A2FF0-666B-058F-57B0-D1C00060FCFB}"/>
+                </a:ext>
+              </a:extLst>
+            </p:cNvPr>
+            <p:cNvSpPr txBox="1"/>
+            <p:nvPr/>
+          </p:nvSpPr>
+          <p:spPr>
+            <a:xfrm>
+              <a:off x="5148064" y="2219803"/>
+              <a:ext cx="385042" cy="369332"/>
+            </a:xfrm>
+            <a:prstGeom prst="rect">
+              <a:avLst/>
+            </a:prstGeom>
+            <a:noFill/>
+          </p:spPr>
+          <p:txBody>
+            <a:bodyPr wrap="none" rtlCol="0">
+              <a:spAutoFit/>
+            </a:bodyPr>
+            <a:lstStyle/>
+            <a:p>
+              <a:r>
+                <a:rPr lang="de-DE" dirty="0">
+                  <a:solidFill>
+                    <a:srgbClr val="C00000"/>
+                  </a:solidFill>
+                </a:rPr>
+                <a:t>u</a:t>
+              </a:r>
+              <a:r>
+                <a:rPr lang="de-DE" baseline="-25000" dirty="0">
+                  <a:solidFill>
+                    <a:srgbClr val="C00000"/>
+                  </a:solidFill>
+                </a:rPr>
+                <a:t>2</a:t>
+              </a:r>
+            </a:p>
+          </p:txBody>
+        </p:sp>
+      </p:grpSp>
+    </p:spTree>
+    <p:extLst>
+      <p:ext uri="{BB962C8B-B14F-4D97-AF65-F5344CB8AC3E}">
+        <p14:creationId xmlns:p14="http://schemas.microsoft.com/office/powerpoint/2010/main" val="1107258089"/>
+      </p:ext>
+    </p:extLst>
+  </p:cSld>
+  <p:clrMapOvr>
+    <a:masterClrMapping/>
+  </p:clrMapOvr>
+</p:sld>
+</file>
+
 <file path=ppt/theme/theme1.xml><?xml version="1.0" encoding="utf-8"?>
 <a:theme xmlns:a="http://schemas.openxmlformats.org/drawingml/2006/main" name="Larissa-Design">
   <a:themeElements>
